--- a/agent/slides/api/impress-a-api.pptx
+++ b/agent/slides/api/impress-a-api.pptx
@@ -30,9 +30,13 @@
     <p:sldId id="278" r:id="rId24"/>
     <p:sldId id="279" r:id="rId25"/>
     <p:sldId id="280" r:id="rId26"/>
+    <p:sldId id="281" r:id="rId27"/>
+    <p:sldId id="282" r:id="rId28"/>
+    <p:sldId id="283" r:id="rId29"/>
+    <p:sldId id="284" r:id="rId30"/>
   </p:sldIdLst>
   <p:notesMasterIdLst>
-    <p:notesMasterId r:id="rId27"/>
+    <p:notesMasterId r:id="rId31"/>
   </p:notesMasterIdLst>
   <p:sldSz cx="12192000" cy="6858000"/>
   <p:notesSz cx="6858000" cy="12192000"/>
@@ -535,7 +539,7 @@
 half an hour of your time is what they have in common underneath: one executor that owns
 all the state, and one set of gates that refuses all of them the same way.
 [Point at the ring on the right.] Six callers, one engine.
-Everything on these slides is derived against merge-impress-a @ c163fe2, and every number is mined from the
+Everything on these slides is derived against examples/agentic-small-molecule-binding @ b5a3b2d, and every number is mined from the
 checkout by a script that ships beside the deck — so if you pull this branch and re-run
 it, a figure that has moved will disagree with me out loud. There is one run in this deck
 and it takes under three seconds on a laptop; I ran it while building these slides.
@@ -1153,13 +1157,13 @@
 which cycle.
 The campaign times itself — every provenance record carries a timestamp, so these offsets
 are measured rather than instrumented in by me. Cycle one, from composed to dispatched,
-1.09 seconds. Cycle two, 71 milliseconds. The entire difference is
+1.09 seconds. Cycle two, 84 milliseconds. The entire difference is
 building the execution engine, which happens once.
 So the steady-state cost of going round this loop — compose a graph, type-check it, run it
 through five gates and a dry run, dispatch four mock tasks across two lineages, absorb the
-results, re-rank the Pareto front, write the provenance — is about seventy milliseconds.
+results, re-rank the Pareto front, write the provenance — is about 84 milliseconds.
 Now the units, because this is where overclaiming is easy. The campaign's own span is
-1.177 seconds. The process took 2.8. So about a second and a half is Python interpreter
+1.201 seconds. The process took 3.5. So about 2.3 seconds is Python interpreter
 startup and imports, outside the loop entirely — which, if you care about cycle latency on
 a cluster, is the number that will annoy you first.
 And the denominators, on the right: one host, one experiment in flight, two lineages, four
@@ -1568,22 +1572,19 @@
             <a:r>
               <a:rPr lang="en-US" dirty="0"/>
               <a:t>
-As an application, the thing I would point at is not the run command — it is preflight.
-Every real adapter in this project raises on a missing environment variable. But it raises
-once a task is already running, which on HPC means inside the allocation, after the queue
-wait. So preflight runs the same checks on the login node, where repairing them is free and
-there is still internet.
-The detail worth stealing is the third state. None means undetermined, not failed. Several
-probes shell out to import a heavy science stack and can take minutes on a loaded login
-node; report that as FAIL and you have trained the reader to ignore the FAIL column.
-And the rule that holds it together: None is only ever for a probe that produced no answer.
-A missing MPNN_DIR is a FAIL forever. A pyrosetta import error is a FAIL. A pyrosetta
-timeout is undetermined. The moment "warn" starts meaning "a failure we would rather not
-block on", the column is decoration.
-What it has caught: a venv on spinning disk instead of NVMe, which works perfectly, about
-eight times slower, and shows up inside an allocation as an unexplained task timeout.
-And every job writes one directory you can hand to someone else — including the git sha and
-whether the checkout was dirty.
+This is the whole thing from where a user sits, and it is deliberately the least technical
+slide in the deck.
+You write one file. About twenty lines: what you want, what you are willing to spend, how
+you will know it worked, and which tools you trust. Then you run preflight on the login
+node, because finding out that an environment variable is missing is free there and costs
+you an allocation inside the queue.
+Then you submit it and stop watching. That is the part that is different. There is no step
+list to babysit.
+While you were not watching, this run asked for 3 lineages, had that refused on cost by
+its own interlock, came back with 2, and was admitted. Nobody was woken up. It stopped
+because it reached the front size it was told to reach, and it says so in those words.
+And what lands on disk is one directory you can hand to somebody else — including whether
+the checkout was dirty when it started.
   </a:t>
             </a:r>
             <a:endParaRPr lang="en-US" dirty="0"/>
@@ -1679,7 +1680,7 @@
 noticing now is the back edge: this is a loop, not a pipeline, and the reasoner is not the
 body of it — several experiments sit at different steps at the same time.
 Left card: what actually ran to make this deck. A complete campaign on the bundled mock
-toolkit, 2.8 seconds, 3 graphs composed, one of them refused, two admitted,
+toolkit, 3.5 seconds, 3 graphs composed, one of them refused, two admitted,
 4 design nodes, a Pareto front of 3. That is a real campaign through the real
 manager, the real composer, the real validator and the real provenance writer.
 Right card, and this is the one I want you to hold onto: every stage of it was a mock. The
@@ -1777,24 +1778,19 @@
             <a:r>
               <a:rPr lang="en-US" dirty="0"/>
               <a:t>
-Surface five is the one an external caller sees, and it is the one I would most like
-someone to attack.
-One protocol. In-process and HTTP are adapters over it, and the rule — ADR 0007 — is that no
-adapter may offer an operation the others do not. 19 operations, 15 route heads, and the
-routes are a mechanical rendering of the Protocol, which is why the mining script counts
-both and puts them next to each other: if they drift, the slide is wrong out loud.
-Four semantics in that table are not the transport's invention. Admission is synchronous:
-202 with a run id, or 409 carrying the structured failure that refused it. Waiting is a long
-poll with three honest answers: here it is, ask again, or the campaign ended and the answer
-is never coming. Observe returns the same object a policy's decide receives. And a
-measurement can arrive after the campaign is over, because the campaign record is
-append-only and outlives execution.
-On the right: RemoteSession implements the reasoner's own protocol over this plane, which
-means the sequential driver and an unmodified threshold policy run against a socket exactly
-as they run in memory. That is the test that the seam is real.
-And the honest box at the bottom right: this is not a public-facing server. No auth, no TLS.
-The module's own docstring says bind it to loopback. That is fine today because nothing uses
-it, and it is the first thing that has to change when something does.
+A system that refuses you is only pleasant to use if the refusal tells you what to change,
+and there are three places this one can refuse.
+Before the queue: preflight, on the login node, where fixing it is free.
+Before anything runs: five gates and then the interlock, which is what happened in this
+deck's own campaign. The message names the cap, the number and the unit, and it is marked
+transient — which is the part that matters, because transient means "ask me for less",
+not "give up". The policy recomposed and was admitted.
+After a tool succeeds: QC. These tools fail silently. A tool can exit zero, report
+confident numbers, and have produced a noodle, so exit code is never the evidence.
+And then the honest one, in red. There is a place where it does not refuse loudly: when
+inflated cost estimates make a graph too expensive, the policy can quietly hand back a
+smaller graph that no longer produces the objective you launched for. That ran on real
+hardware. It warns now. A warning is not a gate.
   </a:t>
             </a:r>
             <a:endParaRPr lang="en-US" dirty="0"/>
@@ -1884,21 +1880,20 @@
             <a:r>
               <a:rPr lang="en-US" dirty="0"/>
               <a:t>
-Last content slide, and it is the one that makes everything I have claimed checkable.
-Ten layers. Each row shows what that layer may import, and the red column shows the edges
-that are forbidden. This is not a diagram in a document — it is a table in a test that walks
-the source with ast and fails the suite on any edge that is not in the list.
-Three of these are load-bearing. Policy may not reach tools or exec: if it could, a policy
-would stop emitting abstract intent and start invoking tools, and the control models would
-stop being swappable. Compose may not reach exec: that single absence is what makes the
-entire validation path testable with no backend, which is the whole laptop test tier. And
-core imports nothing internal, which is what keeps the serializable seam honest.
-Two details I like. It walks the ast rather than scanning module-level imports, because the
-adapters defer their heavy science imports into run bodies on purpose — so a deferred import
-of exec inside a compose function is caught too. And it is an allow-list, so a new
-cross-layer import fails by default: the contract cannot rot by addition.
-One honest blind spot, which the test's own docstring names: a dynamic importlib call is
-invisible to it.
+This is the one slide in the deck with figures I did not mine from this checkout, and I
+want to be exact about where it came from and what it is.
+On the twenty-second, two jobs went in together: four hours, one node, four pipelines, the
+same inputs and the same thresholds. One arm was the reference pipeline's state machine.
+The other was an LLM holding the same eight tools. Everything below the decision layer is
+identical by construction.
+Throughput came out equal, which is the result I least expected: the model's round trip
+costs nothing measurable against GPU work. The funnel was not equal — three times the
+passing designs, from fewer sequence tasks.
+Now the red box, because this number will get quoted at me otherwise. The reference arm
+came in about twice as bad as its own record, so part of that gap is a weak baseline and
+not agent skill. And the place the difference actually originates — an eighty-eight against
+forty-nine percent pass rate on the same relax tool — is unexplained.
+And the thing to hold on to: none of this ran through IMPRESS-A.
   </a:t>
             </a:r>
             <a:endParaRPr lang="en-US" dirty="0"/>
@@ -1988,22 +1983,21 @@
             <a:r>
               <a:rPr lang="en-US" dirty="0"/>
               <a:t>
-Status, three columns, and the format is the argument: three things that run and three that
-do not, per dimension, deliberately the same length.
-Functionality runs: six surfaces exercised, loading validates, and refuse-and-retry was
-observed in a real run rather than asserted. Functionality does not: one topology family,
-no third-party author, and the calibration machinery — a measurement superseding a
-prediction, the one capability a composed graph has that a written-down one does not — has
-never been exercised.
-Performance runs: engine latency is measured, both ends of the backend lifecycle are
-bounded, and the provenance log is complete enough to time the campaign from outside.
-Performance does not: no concurrency measurement, no baseline, and the real chain has only
-ever run one lineage.
-Usability runs: one YAML and one command, runtime toolkit discovery, two transports tested
-against each other. Usability does not: nothing external drives it, model C fails open, and
-there is no serve command.
-The red column is not a to-do list. It is the list of things you should not believe from
-this deck.
+So what does a four-hour run of somebody else's code tell you about these six surfaces?
+Four things. The round trip being free is the premise this whole design rests on, and it
+now has a number against it — next door, on real tools, not here.
+The second one is the interesting one. The model skipped the cheap gate before the
+expensive fold, repeatedly. That is not a criticism of the model; it is the reason this
+engine refuses on cost before anything runs rather than trusting the reasoner to be
+disciplined. A policy here cannot even name a tool parameter.
+Third, the honest one: a work directory the container could not see produced empty outputs,
+and the model correctly concluded its own designs kept failing. An environmental failure
+that reads exactly like a reasoning failure. That is the class of thing preflight exists
+for, and preflight would not have caught this one.
+Fourth: the model can be served inside the allocation for no API cost at all, which is what
+model C's endpoint could be — if model C stopped silently falling back.
+And then the red line, which I would rather say than have asked: none of this ran through
+IMPRESS-A.
   </a:t>
             </a:r>
             <a:endParaRPr lang="en-US" dirty="0"/>
@@ -2093,25 +2087,22 @@
             <a:r>
               <a:rPr lang="en-US" dirty="0"/>
               <a:t>
-I would rather end on the questions than on a summary, and they are grouped by what each one
-costs. The left column costs a wrong answer or real time. The right column costs whoever
-adopts this next.
-One. Should the pattern signature normalise replica width? It is documented as shape-only
-and deliberately excludes parameter values, but it emits one entry per node, so width is in
-the hash. Fixing it makes trust transfer across widths. It also weakens the argument that a
-wide run is genuinely a new shape, which may be the right argument. I do not know which.
-Two. Should a streak of acceptance failures demote a pattern? Trust counts integrity only,
-which is the right rule — but a tool emitting well-formed, uselessly-scored output promotes
-after three runs.
-Three. Should shrink-on-transient live in the base class? Today the default is Stop and
-every policy re-implements shrinking, and that is exactly where a four-lineage independence
-check quietly becomes a three-lineage one.
-Four. Is loopback-only permanent for the control plane?
-Five. Should model C with no caller refuse to start rather than fall back?
-Six. Should the CLI's policy imports be lazy? Listing tools currently pays for langgraph,
-and about a second and a half of this deck's run was startup outside the loop.
-Thank you — and the fastest way to disagree with any of this is to pull the branch and run
-the mining script.
+As an application, the thing I would point at is not the run command — it is preflight.
+Every real adapter in this project raises on a missing environment variable. But it raises
+once a task is already running, which on HPC means inside the allocation, after the queue
+wait. So preflight runs the same checks on the login node, where repairing them is free and
+there is still internet.
+The detail worth stealing is the third state. None means undetermined, not failed. Several
+probes shell out to import a heavy science stack and can take minutes on a loaded login
+node; report that as FAIL and you have trained the reader to ignore the FAIL column.
+And the rule that holds it together: None is only ever for a probe that produced no answer.
+A missing MPNN_DIR is a FAIL forever. A pyrosetta import error is a FAIL. A pyrosetta
+timeout is undetermined. The moment "warn" starts meaning "a failure we would rather not
+block on", the column is decoration.
+What it has caught: a venv on spinning disk instead of NVMe, which works perfectly, about
+eight times slower, and shows up inside an allocation as an unexplained task timeout.
+And every job writes one directory you can hand to someone else — including the git sha and
+whether the checkout was dirty.
   </a:t>
             </a:r>
             <a:endParaRPr lang="en-US" dirty="0"/>
@@ -2201,13 +2192,24 @@
             <a:r>
               <a:rPr lang="en-US" dirty="0"/>
               <a:t>
-Backup slide, if someone asks about the pattern taxonomy. Eight patterns, organised by what
-they imply for scheduling rather than by what the tool computes. Two are used: P1 for the
-GPU stages and P2 for the Rosetta fan-out. P6 is the interesting one — in-process, and it
-must never be scheduled; the composer inlines it, so a scheduled P6 is a bug and not a slow
-path. P4 and P8 are the two that outlive the agent and therefore need a durable ledger
-entry, and P8 is forward-declared for a wet-lab measurement arriving after the campaign has
-ended.
+Surface five is the one an external caller sees, and it is the one I would most like
+someone to attack.
+One protocol. In-process and HTTP are adapters over it, and the rule — ADR 0007 — is that no
+adapter may offer an operation the others do not. 19 operations, 15 route heads, and the
+routes are a mechanical rendering of the Protocol, which is why the mining script counts
+both and puts them next to each other: if they drift, the slide is wrong out loud.
+Four semantics in that table are not the transport's invention. Admission is synchronous:
+202 with a run id, or 409 carrying the structured failure that refused it. Waiting is a long
+poll with three honest answers: here it is, ask again, or the campaign ended and the answer
+is never coming. Observe returns the same object a policy's decide receives. And a
+measurement can arrive after the campaign is over, because the campaign record is
+append-only and outlives execution.
+On the right: RemoteSession implements the reasoner's own protocol over this plane, which
+means the sequential driver and an unmodified threshold policy run against a socket exactly
+as they run in memory. That is the test that the seam is real.
+And the honest box at the bottom right: this is not a public-facing server. No auth, no TLS.
+The module's own docstring says bind it to loopback. That is fine today because nothing uses
+it, and it is the first thing that has to change when something does.
   </a:t>
             </a:r>
             <a:endParaRPr lang="en-US" dirty="0"/>
@@ -2297,6 +2299,419 @@
             <a:r>
               <a:rPr lang="en-US" dirty="0"/>
               <a:t>
+Last content slide, and it is the one that makes everything I have claimed checkable.
+Ten layers. Each row shows what that layer may import, and the red column shows the edges
+that are forbidden. This is not a diagram in a document — it is a table in a test that walks
+the source with ast and fails the suite on any edge that is not in the list.
+Three of these are load-bearing. Policy may not reach tools or exec: if it could, a policy
+would stop emitting abstract intent and start invoking tools, and the control models would
+stop being swappable. Compose may not reach exec: that single absence is what makes the
+entire validation path testable with no backend, which is the whole laptop test tier. And
+core imports nothing internal, which is what keeps the serializable seam honest.
+Two details I like. It walks the ast rather than scanning module-level imports, because the
+adapters defer their heavy science imports into run bodies on purpose — so a deferred import
+of exec inside a compose function is caught too. And it is an allow-list, so a new
+cross-layer import fails by default: the contract cannot rot by addition.
+One honest blind spot, which the test's own docstring names: a dynamic importlib call is
+invisible to it.
+  </a:t>
+            </a:r>
+            <a:endParaRPr lang="en-US" dirty="0"/>
+          </a:p>
+        </p:txBody>
+      </p:sp>
+      <p:sp>
+        <p:nvSpPr>
+          <p:cNvPr id="4" name="Slide Number Placeholder 3"/>
+          <p:cNvSpPr>
+            <a:spLocks noGrp="1"/>
+          </p:cNvSpPr>
+          <p:nvPr>
+            <p:ph type="sldNum" sz="quarter" idx="10"/>
+          </p:nvPr>
+        </p:nvSpPr>
+        <p:spPr/>
+        <p:txBody>
+          <a:bodyPr/>
+          <a:lstStyle/>
+          <a:p>
+            <a:fld id="{F7021451-1387-4CA6-816F-3879F97B5CBC}" type="slidenum">
+              <a:rPr lang="en-US"/>
+              <a:t>25</a:t>
+            </a:fld>
+            <a:endParaRPr lang="en-US"/>
+          </a:p>
+        </p:txBody>
+      </p:sp>
+    </p:spTree>
+    <p:extLst>
+      <p:ext uri="{BB962C8B-B14F-4D97-AF65-F5344CB8AC3E}">
+        <p14:creationId xmlns:p14="http://schemas.microsoft.com/office/powerpoint/2010/main" val="1024086991"/>
+      </p:ext>
+    </p:extLst>
+  </p:cSld>
+  <p:clrMapOvr>
+    <a:masterClrMapping/>
+  </p:clrMapOvr>
+</p:notes>
+</file>
+
+<file path=ppt/notesSlides/notesSlide26.xml><?xml version="1.0" encoding="utf-8"?>
+<p:notes xmlns:a="http://schemas.openxmlformats.org/drawingml/2006/main" xmlns:r="http://schemas.openxmlformats.org/officeDocument/2006/relationships" xmlns:p="http://schemas.openxmlformats.org/presentationml/2006/main">
+  <p:cSld>
+    <p:spTree>
+      <p:nvGrpSpPr>
+        <p:cNvPr id="1" name=""/>
+        <p:cNvGrpSpPr/>
+        <p:nvPr/>
+      </p:nvGrpSpPr>
+      <p:grpSpPr>
+        <a:xfrm>
+          <a:off x="0" y="0"/>
+          <a:ext cx="0" cy="0"/>
+          <a:chOff x="0" y="0"/>
+          <a:chExt cx="0" cy="0"/>
+        </a:xfrm>
+      </p:grpSpPr>
+      <p:sp>
+        <p:nvSpPr>
+          <p:cNvPr id="2" name="Slide Image Placeholder 1"/>
+          <p:cNvSpPr>
+            <a:spLocks noGrp="1" noRot="1" noChangeAspect="1"/>
+          </p:cNvSpPr>
+          <p:nvPr>
+            <p:ph type="sldImg"/>
+          </p:nvPr>
+        </p:nvSpPr>
+        <p:spPr/>
+      </p:sp>
+      <p:sp>
+        <p:nvSpPr>
+          <p:cNvPr id="3" name="Notes Placeholder 2"/>
+          <p:cNvSpPr>
+            <a:spLocks noGrp="1"/>
+          </p:cNvSpPr>
+          <p:nvPr>
+            <p:ph type="body" idx="1"/>
+          </p:nvPr>
+        </p:nvSpPr>
+        <p:spPr/>
+        <p:txBody>
+          <a:bodyPr/>
+          <a:lstStyle/>
+          <a:p>
+            <a:r>
+              <a:rPr lang="en-US" dirty="0"/>
+              <a:t>
+Status, three columns, and the format is the argument: three things that run and three that
+do not, per dimension, deliberately the same length.
+Functionality runs: six surfaces exercised, loading validates, and refuse-and-retry was
+observed in a real run rather than asserted. Functionality does not: one topology family,
+no third-party author, and the calibration machinery — a measurement superseding a
+prediction, the one capability a composed graph has that a written-down one does not — has
+never been exercised.
+Performance runs: engine latency is measured, both ends of the backend lifecycle are
+bounded, and the provenance log is complete enough to time the campaign from outside.
+Performance does not: no concurrency measurement, no baseline, and the real chain has only
+ever run one lineage.
+Usability runs: one YAML and one command, runtime toolkit discovery, two transports tested
+against each other. Usability does not: nothing external drives it, model C fails open, and
+there is no serve command.
+The red column is not a to-do list. It is the list of things you should not believe from
+this deck.
+  </a:t>
+            </a:r>
+            <a:endParaRPr lang="en-US" dirty="0"/>
+          </a:p>
+        </p:txBody>
+      </p:sp>
+      <p:sp>
+        <p:nvSpPr>
+          <p:cNvPr id="4" name="Slide Number Placeholder 3"/>
+          <p:cNvSpPr>
+            <a:spLocks noGrp="1"/>
+          </p:cNvSpPr>
+          <p:nvPr>
+            <p:ph type="sldNum" sz="quarter" idx="10"/>
+          </p:nvPr>
+        </p:nvSpPr>
+        <p:spPr/>
+        <p:txBody>
+          <a:bodyPr/>
+          <a:lstStyle/>
+          <a:p>
+            <a:fld id="{F7021451-1387-4CA6-816F-3879F97B5CBC}" type="slidenum">
+              <a:rPr lang="en-US"/>
+              <a:t>26</a:t>
+            </a:fld>
+            <a:endParaRPr lang="en-US"/>
+          </a:p>
+        </p:txBody>
+      </p:sp>
+    </p:spTree>
+    <p:extLst>
+      <p:ext uri="{BB962C8B-B14F-4D97-AF65-F5344CB8AC3E}">
+        <p14:creationId xmlns:p14="http://schemas.microsoft.com/office/powerpoint/2010/main" val="1024086991"/>
+      </p:ext>
+    </p:extLst>
+  </p:cSld>
+  <p:clrMapOvr>
+    <a:masterClrMapping/>
+  </p:clrMapOvr>
+</p:notes>
+</file>
+
+<file path=ppt/notesSlides/notesSlide27.xml><?xml version="1.0" encoding="utf-8"?>
+<p:notes xmlns:a="http://schemas.openxmlformats.org/drawingml/2006/main" xmlns:r="http://schemas.openxmlformats.org/officeDocument/2006/relationships" xmlns:p="http://schemas.openxmlformats.org/presentationml/2006/main">
+  <p:cSld>
+    <p:spTree>
+      <p:nvGrpSpPr>
+        <p:cNvPr id="1" name=""/>
+        <p:cNvGrpSpPr/>
+        <p:nvPr/>
+      </p:nvGrpSpPr>
+      <p:grpSpPr>
+        <a:xfrm>
+          <a:off x="0" y="0"/>
+          <a:ext cx="0" cy="0"/>
+          <a:chOff x="0" y="0"/>
+          <a:chExt cx="0" cy="0"/>
+        </a:xfrm>
+      </p:grpSpPr>
+      <p:sp>
+        <p:nvSpPr>
+          <p:cNvPr id="2" name="Slide Image Placeholder 1"/>
+          <p:cNvSpPr>
+            <a:spLocks noGrp="1" noRot="1" noChangeAspect="1"/>
+          </p:cNvSpPr>
+          <p:nvPr>
+            <p:ph type="sldImg"/>
+          </p:nvPr>
+        </p:nvSpPr>
+        <p:spPr/>
+      </p:sp>
+      <p:sp>
+        <p:nvSpPr>
+          <p:cNvPr id="3" name="Notes Placeholder 2"/>
+          <p:cNvSpPr>
+            <a:spLocks noGrp="1"/>
+          </p:cNvSpPr>
+          <p:nvPr>
+            <p:ph type="body" idx="1"/>
+          </p:nvPr>
+        </p:nvSpPr>
+        <p:spPr/>
+        <p:txBody>
+          <a:bodyPr/>
+          <a:lstStyle/>
+          <a:p>
+            <a:r>
+              <a:rPr lang="en-US" dirty="0"/>
+              <a:t>
+I would rather end on the questions than on a summary, and they are grouped by what each one
+costs. The left column costs a wrong answer or real time. The right column costs whoever
+adopts this next.
+One. Should the pattern signature normalise replica width? It is documented as shape-only
+and deliberately excludes parameter values, but it emits one entry per node, so width is in
+the hash. Fixing it makes trust transfer across widths. It also weakens the argument that a
+wide run is genuinely a new shape, which may be the right argument. I do not know which.
+Two. Should a streak of acceptance failures demote a pattern? Trust counts integrity only,
+which is the right rule — but a tool emitting well-formed, uselessly-scored output promotes
+after three runs.
+Three. Should shrink-on-transient live in the base class? Today the default is Stop and
+every policy re-implements shrinking, and that is exactly where a four-lineage independence
+check quietly becomes a three-lineage one.
+Four. Is loopback-only permanent for the control plane?
+Five. Should model C with no caller refuse to start rather than fall back?
+Six. Should the CLI's policy imports be lazy? Listing tools currently pays for langgraph,
+and about 2.3 seconds of this deck's run was startup outside the loop.
+Thank you — and the fastest way to disagree with any of this is to pull the branch and run
+the mining script.
+  </a:t>
+            </a:r>
+            <a:endParaRPr lang="en-US" dirty="0"/>
+          </a:p>
+        </p:txBody>
+      </p:sp>
+      <p:sp>
+        <p:nvSpPr>
+          <p:cNvPr id="4" name="Slide Number Placeholder 3"/>
+          <p:cNvSpPr>
+            <a:spLocks noGrp="1"/>
+          </p:cNvSpPr>
+          <p:nvPr>
+            <p:ph type="sldNum" sz="quarter" idx="10"/>
+          </p:nvPr>
+        </p:nvSpPr>
+        <p:spPr/>
+        <p:txBody>
+          <a:bodyPr/>
+          <a:lstStyle/>
+          <a:p>
+            <a:fld id="{F7021451-1387-4CA6-816F-3879F97B5CBC}" type="slidenum">
+              <a:rPr lang="en-US"/>
+              <a:t>27</a:t>
+            </a:fld>
+            <a:endParaRPr lang="en-US"/>
+          </a:p>
+        </p:txBody>
+      </p:sp>
+    </p:spTree>
+    <p:extLst>
+      <p:ext uri="{BB962C8B-B14F-4D97-AF65-F5344CB8AC3E}">
+        <p14:creationId xmlns:p14="http://schemas.microsoft.com/office/powerpoint/2010/main" val="1024086991"/>
+      </p:ext>
+    </p:extLst>
+  </p:cSld>
+  <p:clrMapOvr>
+    <a:masterClrMapping/>
+  </p:clrMapOvr>
+</p:notes>
+</file>
+
+<file path=ppt/notesSlides/notesSlide28.xml><?xml version="1.0" encoding="utf-8"?>
+<p:notes xmlns:a="http://schemas.openxmlformats.org/drawingml/2006/main" xmlns:r="http://schemas.openxmlformats.org/officeDocument/2006/relationships" xmlns:p="http://schemas.openxmlformats.org/presentationml/2006/main">
+  <p:cSld>
+    <p:spTree>
+      <p:nvGrpSpPr>
+        <p:cNvPr id="1" name=""/>
+        <p:cNvGrpSpPr/>
+        <p:nvPr/>
+      </p:nvGrpSpPr>
+      <p:grpSpPr>
+        <a:xfrm>
+          <a:off x="0" y="0"/>
+          <a:ext cx="0" cy="0"/>
+          <a:chOff x="0" y="0"/>
+          <a:chExt cx="0" cy="0"/>
+        </a:xfrm>
+      </p:grpSpPr>
+      <p:sp>
+        <p:nvSpPr>
+          <p:cNvPr id="2" name="Slide Image Placeholder 1"/>
+          <p:cNvSpPr>
+            <a:spLocks noGrp="1" noRot="1" noChangeAspect="1"/>
+          </p:cNvSpPr>
+          <p:nvPr>
+            <p:ph type="sldImg"/>
+          </p:nvPr>
+        </p:nvSpPr>
+        <p:spPr/>
+      </p:sp>
+      <p:sp>
+        <p:nvSpPr>
+          <p:cNvPr id="3" name="Notes Placeholder 2"/>
+          <p:cNvSpPr>
+            <a:spLocks noGrp="1"/>
+          </p:cNvSpPr>
+          <p:nvPr>
+            <p:ph type="body" idx="1"/>
+          </p:nvPr>
+        </p:nvSpPr>
+        <p:spPr/>
+        <p:txBody>
+          <a:bodyPr/>
+          <a:lstStyle/>
+          <a:p>
+            <a:r>
+              <a:rPr lang="en-US" dirty="0"/>
+              <a:t>
+Backup slide, if someone asks about the pattern taxonomy. Eight patterns, organised by what
+they imply for scheduling rather than by what the tool computes. Two are used: P1 for the
+GPU stages and P2 for the Rosetta fan-out. P6 is the interesting one — in-process, and it
+must never be scheduled; the composer inlines it, so a scheduled P6 is a bug and not a slow
+path. P4 and P8 are the two that outlive the agent and therefore need a durable ledger
+entry, and P8 is forward-declared for a wet-lab measurement arriving after the campaign has
+ended.
+  </a:t>
+            </a:r>
+            <a:endParaRPr lang="en-US" dirty="0"/>
+          </a:p>
+        </p:txBody>
+      </p:sp>
+      <p:sp>
+        <p:nvSpPr>
+          <p:cNvPr id="4" name="Slide Number Placeholder 3"/>
+          <p:cNvSpPr>
+            <a:spLocks noGrp="1"/>
+          </p:cNvSpPr>
+          <p:nvPr>
+            <p:ph type="sldNum" sz="quarter" idx="10"/>
+          </p:nvPr>
+        </p:nvSpPr>
+        <p:spPr/>
+        <p:txBody>
+          <a:bodyPr/>
+          <a:lstStyle/>
+          <a:p>
+            <a:fld id="{F7021451-1387-4CA6-816F-3879F97B5CBC}" type="slidenum">
+              <a:rPr lang="en-US"/>
+              <a:t>28</a:t>
+            </a:fld>
+            <a:endParaRPr lang="en-US"/>
+          </a:p>
+        </p:txBody>
+      </p:sp>
+    </p:spTree>
+    <p:extLst>
+      <p:ext uri="{BB962C8B-B14F-4D97-AF65-F5344CB8AC3E}">
+        <p14:creationId xmlns:p14="http://schemas.microsoft.com/office/powerpoint/2010/main" val="1024086991"/>
+      </p:ext>
+    </p:extLst>
+  </p:cSld>
+  <p:clrMapOvr>
+    <a:masterClrMapping/>
+  </p:clrMapOvr>
+</p:notes>
+</file>
+
+<file path=ppt/notesSlides/notesSlide29.xml><?xml version="1.0" encoding="utf-8"?>
+<p:notes xmlns:a="http://schemas.openxmlformats.org/drawingml/2006/main" xmlns:r="http://schemas.openxmlformats.org/officeDocument/2006/relationships" xmlns:p="http://schemas.openxmlformats.org/presentationml/2006/main">
+  <p:cSld>
+    <p:spTree>
+      <p:nvGrpSpPr>
+        <p:cNvPr id="1" name=""/>
+        <p:cNvGrpSpPr/>
+        <p:nvPr/>
+      </p:nvGrpSpPr>
+      <p:grpSpPr>
+        <a:xfrm>
+          <a:off x="0" y="0"/>
+          <a:ext cx="0" cy="0"/>
+          <a:chOff x="0" y="0"/>
+          <a:chExt cx="0" cy="0"/>
+        </a:xfrm>
+      </p:grpSpPr>
+      <p:sp>
+        <p:nvSpPr>
+          <p:cNvPr id="2" name="Slide Image Placeholder 1"/>
+          <p:cNvSpPr>
+            <a:spLocks noGrp="1" noRot="1" noChangeAspect="1"/>
+          </p:cNvSpPr>
+          <p:nvPr>
+            <p:ph type="sldImg"/>
+          </p:nvPr>
+        </p:nvSpPr>
+        <p:spPr/>
+      </p:sp>
+      <p:sp>
+        <p:nvSpPr>
+          <p:cNvPr id="3" name="Notes Placeholder 2"/>
+          <p:cNvSpPr>
+            <a:spLocks noGrp="1"/>
+          </p:cNvSpPr>
+          <p:nvPr>
+            <p:ph type="body" idx="1"/>
+          </p:nvPr>
+        </p:nvSpPr>
+        <p:spPr/>
+        <p:txBody>
+          <a:bodyPr/>
+          <a:lstStyle/>
+          <a:p>
+            <a:r>
+              <a:rPr lang="en-US" dirty="0"/>
+              <a:t>
 Second backup: the type lattice. Twelve scientific types rather than file formats, and the
 reason is gate one. If these were .pdb and .json, the type gate could only check that a file
 exists — and the composer could not refuse a graph that is structurally fine and
@@ -2329,7 +2744,7 @@
           <a:p>
             <a:fld id="{F7021451-1387-4CA6-816F-3879F97B5CBC}" type="slidenum">
               <a:rPr lang="en-US"/>
-              <a:t>25</a:t>
+              <a:t>29</a:t>
             </a:fld>
             <a:endParaRPr lang="en-US"/>
           </a:p>
@@ -3705,7 +4120,7 @@
                 <a:ea typeface="Calibri" pitchFamily="34" charset="-122"/>
                 <a:cs typeface="Calibri" pitchFamily="34" charset="-120"/>
               </a:rPr>
-              <a:t>Derived against merge-impress-a @ c163fe2 · every figure mined by slides/api/run_model.py</a:t>
+              <a:t>Derived against examples/agentic-small-molecule-binding @ b5a3b2d · every figure mined by slides/api/run_model.py, except the live runs on 21-22, which are transcribed and say so</a:t>
             </a:r>
             <a:endParaRPr lang="en-US" sz="1100" dirty="0"/>
           </a:p>
@@ -4475,7 +4890,7 @@
                 <a:ea typeface="Calibri" pitchFamily="34" charset="-122"/>
                 <a:cs typeface="Calibri" pitchFamily="34" charset="-120"/>
               </a:rPr>
-              <a:t>IMPRESS-A · agent/ · merge-impress-a @ c163fe2</a:t>
+              <a:t>IMPRESS-A · agent/ · examples/agentic-small-molecule-binding @ b5a3b2d</a:t>
             </a:r>
             <a:endParaRPr lang="en-US" sz="1000" dirty="0"/>
           </a:p>
@@ -5613,7 +6028,7 @@
                 <a:ea typeface="Calibri" pitchFamily="34" charset="-122"/>
                 <a:cs typeface="Calibri" pitchFamily="34" charset="-120"/>
               </a:rPr>
-              <a:t>11 tools load clean at merge-impress-a @ c163fe2; registry errors: 0</a:t>
+              <a:t>11 tools load clean at examples/agentic-small-molecule-binding @ b5a3b2d; registry errors: 0</a:t>
             </a:r>
             <a:endParaRPr lang="en-US" sz="1000" dirty="0"/>
           </a:p>
@@ -9862,7 +10277,7 @@
                 <a:ea typeface="Calibri" pitchFamily="34" charset="-122"/>
                 <a:cs typeface="Calibri" pitchFamily="34" charset="-120"/>
               </a:rPr>
-              <a:t>cycle 2 cost 71 ms against cycle 1's 1.09 s — the difference is engine construction, once</a:t>
+              <a:t>cycle 2 cost 84 ms against cycle 1's 1.09 s — the difference is engine construction, once</a:t>
             </a:r>
             <a:endParaRPr lang="en-US" sz="1200" dirty="0"/>
           </a:p>
@@ -11718,7 +12133,7 @@
         <p:spPr>
           <a:xfrm>
             <a:off x="2194560" y="1755648"/>
-            <a:ext cx="5310835" cy="237744"/>
+            <a:ext cx="4929319" cy="237744"/>
           </a:xfrm>
           <a:prstGeom prst="rect">
             <a:avLst/>
@@ -11742,7 +12157,7 @@
         </p:nvSpPr>
         <p:spPr>
           <a:xfrm>
-            <a:off x="6609283" y="1737360"/>
+            <a:off x="7197031" y="1737360"/>
             <a:ext cx="822960" cy="237744"/>
           </a:xfrm>
           <a:prstGeom prst="rect">
@@ -11755,19 +12170,19 @@
           <a:bodyPr wrap="square" lIns="0" tIns="0" rIns="0" bIns="0" rtlCol="0" anchor="ctr"/>
           <a:lstStyle/>
           <a:p>
-            <a:pPr algn="r" indent="0" marL="0">
+            <a:pPr algn="l" indent="0" marL="0">
               <a:buNone/>
             </a:pPr>
             <a:r>
               <a:rPr lang="en-US" sz="950" dirty="0">
                 <a:solidFill>
-                  <a:srgbClr val="FFFFFF"/>
+                  <a:srgbClr val="5E6B75"/>
                 </a:solidFill>
                 <a:latin typeface="Consolas" pitchFamily="34" charset="0"/>
                 <a:ea typeface="Consolas" pitchFamily="34" charset="-122"/>
                 <a:cs typeface="Consolas" pitchFamily="34" charset="-120"/>
               </a:rPr>
-              <a:t>1.089 s</a:t>
+              <a:t>1.095 s</a:t>
             </a:r>
             <a:endParaRPr lang="en-US" sz="950" dirty="0"/>
           </a:p>
@@ -11820,8 +12235,8 @@
         </p:nvSpPr>
         <p:spPr>
           <a:xfrm>
-            <a:off x="7520026" y="2377440"/>
-            <a:ext cx="346253" cy="237744"/>
+            <a:off x="7141886" y="2377440"/>
+            <a:ext cx="378140" cy="237744"/>
           </a:xfrm>
           <a:prstGeom prst="rect">
             <a:avLst/>
@@ -11845,7 +12260,7 @@
         </p:nvSpPr>
         <p:spPr>
           <a:xfrm>
-            <a:off x="6587338" y="2359152"/>
+            <a:off x="6209198" y="2359152"/>
             <a:ext cx="822960" cy="237744"/>
           </a:xfrm>
           <a:prstGeom prst="rect">
@@ -11870,7 +12285,7 @@
                 <a:ea typeface="Consolas" pitchFamily="34" charset="-122"/>
                 <a:cs typeface="Consolas" pitchFamily="34" charset="-120"/>
               </a:rPr>
-              <a:t>0.071 s</a:t>
+              <a:t>0.084 s</a:t>
             </a:r>
             <a:endParaRPr lang="en-US" sz="950" dirty="0"/>
           </a:p>
@@ -11969,7 +12384,7 @@
         </p:nvSpPr>
         <p:spPr>
           <a:xfrm>
-            <a:off x="3413760" y="3035808"/>
+            <a:off x="3319975" y="3035808"/>
             <a:ext cx="91" cy="91440"/>
           </a:xfrm>
           <a:prstGeom prst="line">
@@ -11992,7 +12407,7 @@
         </p:nvSpPr>
         <p:spPr>
           <a:xfrm>
-            <a:off x="3139440" y="3127248"/>
+            <a:off x="3045655" y="3127248"/>
             <a:ext cx="548640" cy="237744"/>
           </a:xfrm>
           <a:prstGeom prst="rect">
@@ -12031,7 +12446,7 @@
         </p:nvSpPr>
         <p:spPr>
           <a:xfrm>
-            <a:off x="4632960" y="3035808"/>
+            <a:off x="4445391" y="3035808"/>
             <a:ext cx="91" cy="91440"/>
           </a:xfrm>
           <a:prstGeom prst="line">
@@ -12054,7 +12469,7 @@
         </p:nvSpPr>
         <p:spPr>
           <a:xfrm>
-            <a:off x="4358640" y="3127248"/>
+            <a:off x="4171071" y="3127248"/>
             <a:ext cx="548640" cy="237744"/>
           </a:xfrm>
           <a:prstGeom prst="rect">
@@ -12093,7 +12508,7 @@
         </p:nvSpPr>
         <p:spPr>
           <a:xfrm>
-            <a:off x="5852160" y="3035808"/>
+            <a:off x="5570806" y="3035808"/>
             <a:ext cx="91" cy="91440"/>
           </a:xfrm>
           <a:prstGeom prst="line">
@@ -12116,7 +12531,7 @@
         </p:nvSpPr>
         <p:spPr>
           <a:xfrm>
-            <a:off x="5577840" y="3127248"/>
+            <a:off x="5296486" y="3127248"/>
             <a:ext cx="548640" cy="237744"/>
           </a:xfrm>
           <a:prstGeom prst="rect">
@@ -12155,7 +12570,7 @@
         </p:nvSpPr>
         <p:spPr>
           <a:xfrm>
-            <a:off x="7071360" y="3035808"/>
+            <a:off x="6696222" y="3035808"/>
             <a:ext cx="91" cy="91440"/>
           </a:xfrm>
           <a:prstGeom prst="line">
@@ -12178,7 +12593,7 @@
         </p:nvSpPr>
         <p:spPr>
           <a:xfrm>
-            <a:off x="6797040" y="3127248"/>
+            <a:off x="6421902" y="3127248"/>
             <a:ext cx="548640" cy="237744"/>
           </a:xfrm>
           <a:prstGeom prst="rect">
@@ -12242,7 +12657,7 @@
                 <a:ea typeface="Calibri" pitchFamily="34" charset="-122"/>
                 <a:cs typeface="Calibri" pitchFamily="34" charset="-120"/>
               </a:rPr>
-              <a:t>the whole difference is engine construction, paid once: 1.02 s of it</a:t>
+              <a:t>the whole difference is engine construction, paid once: 1.01 s of it</a:t>
             </a:r>
             <a:endParaRPr lang="en-US" sz="1050" dirty="0"/>
           </a:p>
@@ -12498,7 +12913,7 @@
                           <a:ea typeface="Consolas" pitchFamily="34" charset="-122"/>
                           <a:cs typeface="Consolas" pitchFamily="34" charset="-120"/>
                         </a:rPr>
-                        <a:t>rejected  r0001  g000001-4052</a:t>
+                        <a:t>rejected  r0001  g000001-ed96</a:t>
                       </a:r>
                       <a:endParaRPr lang="en-US" sz="850" dirty="0">
                         <a:latin typeface="Consolas" charset="0"/>
@@ -12568,7 +12983,7 @@
                           <a:ea typeface="Consolas" pitchFamily="34" charset="-122"/>
                           <a:cs typeface="Consolas" pitchFamily="34" charset="-120"/>
                         </a:rPr>
-                        <a:t>0.000s</a:t>
+                        <a:t>0.001s</a:t>
                       </a:r>
                       <a:endParaRPr lang="en-US" sz="850" dirty="0">
                         <a:latin typeface="Consolas" charset="0"/>
@@ -12636,7 +13051,7 @@
                           <a:ea typeface="Consolas" pitchFamily="34" charset="-122"/>
                           <a:cs typeface="Consolas" pitchFamily="34" charset="-120"/>
                         </a:rPr>
-                        <a:t>composed  r0002  g000002-4052</a:t>
+                        <a:t>composed  r0002  g000002-ed96</a:t>
                       </a:r>
                       <a:endParaRPr lang="en-US" sz="850" dirty="0">
                         <a:latin typeface="Consolas" charset="0"/>
@@ -12706,7 +13121,7 @@
                           <a:ea typeface="Consolas" pitchFamily="34" charset="-122"/>
                           <a:cs typeface="Consolas" pitchFamily="34" charset="-120"/>
                         </a:rPr>
-                        <a:t>1.089s</a:t>
+                        <a:t>1.095s</a:t>
                       </a:r>
                       <a:endParaRPr lang="en-US" sz="850" dirty="0">
                         <a:latin typeface="Consolas" charset="0"/>
@@ -12774,7 +13189,7 @@
                           <a:ea typeface="Consolas" pitchFamily="34" charset="-122"/>
                           <a:cs typeface="Consolas" pitchFamily="34" charset="-120"/>
                         </a:rPr>
-                        <a:t>dispatched  r0002  g000002-4052</a:t>
+                        <a:t>dispatched  r0002  g000002-ed96</a:t>
                       </a:r>
                       <a:endParaRPr lang="en-US" sz="850" dirty="0">
                         <a:latin typeface="Consolas" charset="0"/>
@@ -12844,7 +13259,7 @@
                           <a:ea typeface="Consolas" pitchFamily="34" charset="-122"/>
                           <a:cs typeface="Consolas" pitchFamily="34" charset="-120"/>
                         </a:rPr>
-                        <a:t>1.091s</a:t>
+                        <a:t>1.097s</a:t>
                       </a:r>
                       <a:endParaRPr lang="en-US" sz="850" dirty="0">
                         <a:latin typeface="Consolas" charset="0"/>
@@ -12982,7 +13397,7 @@
                           <a:ea typeface="Consolas" pitchFamily="34" charset="-122"/>
                           <a:cs typeface="Consolas" pitchFamily="34" charset="-120"/>
                         </a:rPr>
-                        <a:t>1.092s</a:t>
+                        <a:t>1.099s</a:t>
                       </a:r>
                       <a:endParaRPr lang="en-US" sz="850" dirty="0">
                         <a:latin typeface="Consolas" charset="0"/>
@@ -13050,7 +13465,7 @@
                           <a:ea typeface="Consolas" pitchFamily="34" charset="-122"/>
                           <a:cs typeface="Consolas" pitchFamily="34" charset="-120"/>
                         </a:rPr>
-                        <a:t>composed  r0003  g000003-4052</a:t>
+                        <a:t>composed  r0003  g000003-ed96</a:t>
                       </a:r>
                       <a:endParaRPr lang="en-US" sz="850" dirty="0">
                         <a:latin typeface="Consolas" charset="0"/>
@@ -13120,7 +13535,7 @@
                           <a:ea typeface="Consolas" pitchFamily="34" charset="-122"/>
                           <a:cs typeface="Consolas" pitchFamily="34" charset="-120"/>
                         </a:rPr>
-                        <a:t>1.163s</a:t>
+                        <a:t>1.183s</a:t>
                       </a:r>
                       <a:endParaRPr lang="en-US" sz="850" dirty="0">
                         <a:latin typeface="Consolas" charset="0"/>
@@ -13188,7 +13603,7 @@
                           <a:ea typeface="Consolas" pitchFamily="34" charset="-122"/>
                           <a:cs typeface="Consolas" pitchFamily="34" charset="-120"/>
                         </a:rPr>
-                        <a:t>dispatched  r0003  g000003-4052</a:t>
+                        <a:t>dispatched  r0003  g000003-ed96</a:t>
                       </a:r>
                       <a:endParaRPr lang="en-US" sz="850" dirty="0">
                         <a:latin typeface="Consolas" charset="0"/>
@@ -13258,7 +13673,7 @@
                           <a:ea typeface="Consolas" pitchFamily="34" charset="-122"/>
                           <a:cs typeface="Consolas" pitchFamily="34" charset="-120"/>
                         </a:rPr>
-                        <a:t>1.164s</a:t>
+                        <a:t>1.185s</a:t>
                       </a:r>
                       <a:endParaRPr lang="en-US" sz="850" dirty="0">
                         <a:latin typeface="Consolas" charset="0"/>
@@ -13396,7 +13811,7 @@
                           <a:ea typeface="Consolas" pitchFamily="34" charset="-122"/>
                           <a:cs typeface="Consolas" pitchFamily="34" charset="-120"/>
                         </a:rPr>
-                        <a:t>1.165s</a:t>
+                        <a:t>1.187s</a:t>
                       </a:r>
                       <a:endParaRPr lang="en-US" sz="850" dirty="0">
                         <a:latin typeface="Consolas" charset="0"/>
@@ -13534,7 +13949,7 @@
                           <a:ea typeface="Consolas" pitchFamily="34" charset="-122"/>
                           <a:cs typeface="Consolas" pitchFamily="34" charset="-120"/>
                         </a:rPr>
-                        <a:t>1.177s</a:t>
+                        <a:t>1.201s</a:t>
                       </a:r>
                       <a:endParaRPr lang="en-US" sz="850" dirty="0">
                         <a:latin typeface="Consolas" charset="0"/>
@@ -13759,7 +14174,7 @@
                 <a:ea typeface="Calibri" pitchFamily="34" charset="-122"/>
                 <a:cs typeface="Calibri" pitchFamily="34" charset="-120"/>
               </a:rPr>
-              <a:t>The campaign's own provenance clock: first record to `terminated` is 1.177 s. The process took 2.8 s, so roughly 1.6 s is interpreter startup and imports, OUTSIDE the loop.</a:t>
+              <a:t>The campaign's own provenance clock: first record to `terminated` is 1.201 s. The process took 3.5 s, so roughly 2.3 s is interpreter startup and imports, OUTSIDE the loop.</a:t>
             </a:r>
             <a:endParaRPr lang="en-US" sz="1050" dirty="0"/>
           </a:p>
@@ -13887,7 +14302,7 @@
                 <a:ea typeface="Calibri" pitchFamily="34" charset="-122"/>
                 <a:cs typeface="Calibri" pitchFamily="34" charset="-120"/>
               </a:rPr>
-              <a:t>Cycle 1's 1.09 s includes building the execution engine. Cycle 2 reuses it and costs 71 ms for compose, validate, dispatch, absorb and rank — with four mock tasks across two lineages in it.</a:t>
+              <a:t>Cycle 1's 1.09 s includes building the execution engine. Cycle 2 reuses it and costs 84 ms for compose, validate, dispatch, absorb and rank — with four mock tasks across two lineages in it.</a:t>
             </a:r>
             <a:endParaRPr lang="en-US" sz="1050" dirty="0"/>
           </a:p>
@@ -14075,7 +14490,7 @@
                 <a:ea typeface="Calibri" pitchFamily="34" charset="-122"/>
                 <a:cs typeface="Calibri" pitchFamily="34" charset="-120"/>
               </a:rPr>
-              <a:t>mined: run.json · mock.timeline · merge-impress-a @ c163fe2 · one laptop, mock stages, no allocation</a:t>
+              <a:t>mined: run.json · mock.timeline · examples/agentic-small-molecule-binding @ b5a3b2d · one laptop, mock stages, no allocation</a:t>
             </a:r>
             <a:endParaRPr lang="en-US" sz="1000" dirty="0"/>
           </a:p>
@@ -14503,7 +14918,7 @@
                           <a:ea typeface="Consolas" pitchFamily="34" charset="-122"/>
                           <a:cs typeface="Consolas" pitchFamily="34" charset="-120"/>
                         </a:rPr>
-                        <a:t>1.177 s</a:t>
+                        <a:t>1.201 s</a:t>
                       </a:r>
                       <a:endParaRPr lang="en-US" sz="900" dirty="0">
                         <a:latin typeface="Consolas" charset="0"/>
@@ -14709,7 +15124,7 @@
                           <a:ea typeface="Consolas" pitchFamily="34" charset="-122"/>
                           <a:cs typeface="Consolas" pitchFamily="34" charset="-120"/>
                         </a:rPr>
-                        <a:t>71 ms</a:t>
+                        <a:t>84 ms</a:t>
                       </a:r>
                       <a:endParaRPr lang="en-US" sz="900" dirty="0">
                         <a:latin typeface="Consolas" charset="0"/>
@@ -18494,7 +18909,7 @@
                 <a:ea typeface="Calibri" pitchFamily="34" charset="-122"/>
                 <a:cs typeface="Calibri" pitchFamily="34" charset="-120"/>
               </a:rPr>
-              <a:t>nothing outside this package has ever driven a campaign, and `--model C` with no caller attached does not block or fail — it falls back to model D after 5 s</a:t>
+              <a:t>nothing outside this package has ever driven a campaign — the four-hour live run two slides from now is the reference pipeline's toolkit with an LLM on it, not this engine — and `--model C` with no caller falls back to model D after 5 s</a:t>
             </a:r>
             <a:endParaRPr lang="en-US" sz="1300" dirty="0"/>
           </a:p>
@@ -18597,7 +19012,7 @@
                 <a:ea typeface="Cambria" pitchFamily="34" charset="-122"/>
                 <a:cs typeface="Cambria" pitchFamily="34" charset="-120"/>
               </a:rPr>
-              <a:t>As an application: one command, one honest gate</a:t>
+              <a:t>What running one is actually like</a:t>
             </a:r>
             <a:endParaRPr lang="en-US" sz="2800" dirty="0"/>
           </a:p>
@@ -18612,7 +19027,842 @@
         <p:spPr>
           <a:xfrm>
             <a:off x="457200" y="1371600"/>
-            <a:ext cx="6858000" cy="2286000"/>
+            <a:ext cx="2153046" cy="1965960"/>
+          </a:xfrm>
+          <a:prstGeom prst="rect">
+            <a:avLst/>
+          </a:prstGeom>
+          <a:solidFill>
+            <a:srgbClr val="EEF2F5"/>
+          </a:solidFill>
+          <a:ln w="12700">
+            <a:solidFill>
+              <a:srgbClr val="C9D1D8"/>
+            </a:solidFill>
+            <a:prstDash val="solid"/>
+          </a:ln>
+        </p:spPr>
+      </p:sp>
+      <p:sp>
+        <p:nvSpPr>
+          <p:cNvPr id="5" name="Shape 3"/>
+          <p:cNvSpPr/>
+          <p:nvPr/>
+        </p:nvSpPr>
+        <p:spPr>
+          <a:xfrm>
+            <a:off x="457200" y="1371600"/>
+            <a:ext cx="2153046" cy="54864"/>
+          </a:xfrm>
+          <a:prstGeom prst="rect">
+            <a:avLst/>
+          </a:prstGeom>
+          <a:solidFill>
+            <a:srgbClr val="D9731A"/>
+          </a:solidFill>
+          <a:ln w="12700">
+            <a:solidFill>
+              <a:srgbClr val="D9731A"/>
+            </a:solidFill>
+            <a:prstDash val="solid"/>
+          </a:ln>
+        </p:spPr>
+      </p:sp>
+      <p:sp>
+        <p:nvSpPr>
+          <p:cNvPr id="6" name="Text 4"/>
+          <p:cNvSpPr txBox="1"/>
+          <p:nvPr/>
+        </p:nvSpPr>
+        <p:spPr>
+          <a:xfrm>
+            <a:off x="566928" y="1481328"/>
+            <a:ext cx="365760" cy="237744"/>
+          </a:xfrm>
+          <a:prstGeom prst="rect">
+            <a:avLst/>
+          </a:prstGeom>
+          <a:noFill/>
+          <a:ln/>
+        </p:spPr>
+        <p:txBody>
+          <a:bodyPr wrap="square" lIns="0" tIns="0" rIns="0" bIns="0" rtlCol="0" anchor="t"/>
+          <a:lstStyle/>
+          <a:p>
+            <a:pPr indent="0" marL="0">
+              <a:buNone/>
+            </a:pPr>
+            <a:r>
+              <a:rPr lang="en-US" sz="1500" b="1" dirty="0">
+                <a:solidFill>
+                  <a:srgbClr val="D9731A"/>
+                </a:solidFill>
+                <a:latin typeface="Cambria" pitchFamily="34" charset="0"/>
+                <a:ea typeface="Cambria" pitchFamily="34" charset="-122"/>
+                <a:cs typeface="Cambria" pitchFamily="34" charset="-120"/>
+              </a:rPr>
+              <a:t>1</a:t>
+            </a:r>
+            <a:endParaRPr lang="en-US" sz="1500" dirty="0"/>
+          </a:p>
+        </p:txBody>
+      </p:sp>
+      <p:sp>
+        <p:nvSpPr>
+          <p:cNvPr id="7" name="Text 5"/>
+          <p:cNvSpPr txBox="1"/>
+          <p:nvPr/>
+        </p:nvSpPr>
+        <p:spPr>
+          <a:xfrm>
+            <a:off x="566928" y="1755648"/>
+            <a:ext cx="1933590" cy="274320"/>
+          </a:xfrm>
+          <a:prstGeom prst="rect">
+            <a:avLst/>
+          </a:prstGeom>
+          <a:noFill/>
+          <a:ln/>
+        </p:spPr>
+        <p:txBody>
+          <a:bodyPr wrap="square" lIns="0" tIns="0" rIns="0" bIns="0" rtlCol="0" anchor="t"/>
+          <a:lstStyle/>
+          <a:p>
+            <a:pPr indent="0" marL="0">
+              <a:buNone/>
+            </a:pPr>
+            <a:r>
+              <a:rPr lang="en-US" sz="1200" b="1" dirty="0">
+                <a:solidFill>
+                  <a:srgbClr val="16222B"/>
+                </a:solidFill>
+                <a:latin typeface="Calibri" pitchFamily="34" charset="0"/>
+                <a:ea typeface="Calibri" pitchFamily="34" charset="-122"/>
+                <a:cs typeface="Calibri" pitchFamily="34" charset="-120"/>
+              </a:rPr>
+              <a:t>You write the file</a:t>
+            </a:r>
+            <a:endParaRPr lang="en-US" sz="1200" dirty="0"/>
+          </a:p>
+        </p:txBody>
+      </p:sp>
+      <p:sp>
+        <p:nvSpPr>
+          <p:cNvPr id="8" name="Text 6"/>
+          <p:cNvSpPr txBox="1"/>
+          <p:nvPr/>
+        </p:nvSpPr>
+        <p:spPr>
+          <a:xfrm>
+            <a:off x="566928" y="2066544"/>
+            <a:ext cx="1933590" cy="1188720"/>
+          </a:xfrm>
+          <a:prstGeom prst="rect">
+            <a:avLst/>
+          </a:prstGeom>
+          <a:noFill/>
+          <a:ln/>
+        </p:spPr>
+        <p:txBody>
+          <a:bodyPr wrap="square" lIns="0" tIns="0" rIns="0" bIns="0" rtlCol="0" anchor="t"/>
+          <a:lstStyle/>
+          <a:p>
+            <a:pPr indent="0" marL="0">
+              <a:buNone/>
+            </a:pPr>
+            <a:r>
+              <a:rPr lang="en-US" sz="1000" dirty="0">
+                <a:solidFill>
+                  <a:srgbClr val="22303C"/>
+                </a:solidFill>
+                <a:latin typeface="Calibri" pitchFamily="34" charset="0"/>
+                <a:ea typeface="Calibri" pitchFamily="34" charset="-122"/>
+                <a:cs typeface="Calibri" pitchFamily="34" charset="-120"/>
+              </a:rPr>
+              <a:t>22 keys exist. A real campaign uses about twenty lines: the goal, the budget, the objectives, and the stages you trust</a:t>
+            </a:r>
+            <a:endParaRPr lang="en-US" sz="1000" dirty="0"/>
+          </a:p>
+        </p:txBody>
+      </p:sp>
+      <p:sp>
+        <p:nvSpPr>
+          <p:cNvPr id="9" name="Shape 7"/>
+          <p:cNvSpPr/>
+          <p:nvPr/>
+        </p:nvSpPr>
+        <p:spPr>
+          <a:xfrm>
+            <a:off x="2738262" y="1371600"/>
+            <a:ext cx="2153046" cy="1965960"/>
+          </a:xfrm>
+          <a:prstGeom prst="rect">
+            <a:avLst/>
+          </a:prstGeom>
+          <a:solidFill>
+            <a:srgbClr val="EEF2F5"/>
+          </a:solidFill>
+          <a:ln w="12700">
+            <a:solidFill>
+              <a:srgbClr val="C9D1D8"/>
+            </a:solidFill>
+            <a:prstDash val="solid"/>
+          </a:ln>
+        </p:spPr>
+      </p:sp>
+      <p:sp>
+        <p:nvSpPr>
+          <p:cNvPr id="10" name="Shape 8"/>
+          <p:cNvSpPr/>
+          <p:nvPr/>
+        </p:nvSpPr>
+        <p:spPr>
+          <a:xfrm>
+            <a:off x="2738262" y="1371600"/>
+            <a:ext cx="2153046" cy="54864"/>
+          </a:xfrm>
+          <a:prstGeom prst="rect">
+            <a:avLst/>
+          </a:prstGeom>
+          <a:solidFill>
+            <a:srgbClr val="D9731A"/>
+          </a:solidFill>
+          <a:ln w="12700">
+            <a:solidFill>
+              <a:srgbClr val="D9731A"/>
+            </a:solidFill>
+            <a:prstDash val="solid"/>
+          </a:ln>
+        </p:spPr>
+      </p:sp>
+      <p:sp>
+        <p:nvSpPr>
+          <p:cNvPr id="11" name="Text 9"/>
+          <p:cNvSpPr txBox="1"/>
+          <p:nvPr/>
+        </p:nvSpPr>
+        <p:spPr>
+          <a:xfrm>
+            <a:off x="2847990" y="1481328"/>
+            <a:ext cx="365760" cy="237744"/>
+          </a:xfrm>
+          <a:prstGeom prst="rect">
+            <a:avLst/>
+          </a:prstGeom>
+          <a:noFill/>
+          <a:ln/>
+        </p:spPr>
+        <p:txBody>
+          <a:bodyPr wrap="square" lIns="0" tIns="0" rIns="0" bIns="0" rtlCol="0" anchor="t"/>
+          <a:lstStyle/>
+          <a:p>
+            <a:pPr indent="0" marL="0">
+              <a:buNone/>
+            </a:pPr>
+            <a:r>
+              <a:rPr lang="en-US" sz="1500" b="1" dirty="0">
+                <a:solidFill>
+                  <a:srgbClr val="D9731A"/>
+                </a:solidFill>
+                <a:latin typeface="Cambria" pitchFamily="34" charset="0"/>
+                <a:ea typeface="Cambria" pitchFamily="34" charset="-122"/>
+                <a:cs typeface="Cambria" pitchFamily="34" charset="-120"/>
+              </a:rPr>
+              <a:t>2</a:t>
+            </a:r>
+            <a:endParaRPr lang="en-US" sz="1500" dirty="0"/>
+          </a:p>
+        </p:txBody>
+      </p:sp>
+      <p:sp>
+        <p:nvSpPr>
+          <p:cNvPr id="12" name="Text 10"/>
+          <p:cNvSpPr txBox="1"/>
+          <p:nvPr/>
+        </p:nvSpPr>
+        <p:spPr>
+          <a:xfrm>
+            <a:off x="2847990" y="1755648"/>
+            <a:ext cx="1933590" cy="274320"/>
+          </a:xfrm>
+          <a:prstGeom prst="rect">
+            <a:avLst/>
+          </a:prstGeom>
+          <a:noFill/>
+          <a:ln/>
+        </p:spPr>
+        <p:txBody>
+          <a:bodyPr wrap="square" lIns="0" tIns="0" rIns="0" bIns="0" rtlCol="0" anchor="t"/>
+          <a:lstStyle/>
+          <a:p>
+            <a:pPr indent="0" marL="0">
+              <a:buNone/>
+            </a:pPr>
+            <a:r>
+              <a:rPr lang="en-US" sz="1200" b="1" dirty="0">
+                <a:solidFill>
+                  <a:srgbClr val="16222B"/>
+                </a:solidFill>
+                <a:latin typeface="Calibri" pitchFamily="34" charset="0"/>
+                <a:ea typeface="Calibri" pitchFamily="34" charset="-122"/>
+                <a:cs typeface="Calibri" pitchFamily="34" charset="-120"/>
+              </a:rPr>
+              <a:t>You run preflight</a:t>
+            </a:r>
+            <a:endParaRPr lang="en-US" sz="1200" dirty="0"/>
+          </a:p>
+        </p:txBody>
+      </p:sp>
+      <p:sp>
+        <p:nvSpPr>
+          <p:cNvPr id="13" name="Text 11"/>
+          <p:cNvSpPr txBox="1"/>
+          <p:nvPr/>
+        </p:nvSpPr>
+        <p:spPr>
+          <a:xfrm>
+            <a:off x="2847990" y="2066544"/>
+            <a:ext cx="1933590" cy="1188720"/>
+          </a:xfrm>
+          <a:prstGeom prst="rect">
+            <a:avLst/>
+          </a:prstGeom>
+          <a:noFill/>
+          <a:ln/>
+        </p:spPr>
+        <p:txBody>
+          <a:bodyPr wrap="square" lIns="0" tIns="0" rIns="0" bIns="0" rtlCol="0" anchor="t"/>
+          <a:lstStyle/>
+          <a:p>
+            <a:pPr indent="0" marL="0">
+              <a:buNone/>
+            </a:pPr>
+            <a:r>
+              <a:rPr lang="en-US" sz="1000" dirty="0">
+                <a:solidFill>
+                  <a:srgbClr val="22303C"/>
+                </a:solidFill>
+                <a:latin typeface="Calibri" pitchFamily="34" charset="0"/>
+                <a:ea typeface="Calibri" pitchFamily="34" charset="-122"/>
+                <a:cs typeface="Calibri" pitchFamily="34" charset="-120"/>
+              </a:rPr>
+              <a:t>On the login node, before the queue, where repairing anything is free. ok / FAIL / undetermined — and undetermined never reads as a pass</a:t>
+            </a:r>
+            <a:endParaRPr lang="en-US" sz="1000" dirty="0"/>
+          </a:p>
+        </p:txBody>
+      </p:sp>
+      <p:sp>
+        <p:nvSpPr>
+          <p:cNvPr id="14" name="Shape 12"/>
+          <p:cNvSpPr/>
+          <p:nvPr/>
+        </p:nvSpPr>
+        <p:spPr>
+          <a:xfrm>
+            <a:off x="5019324" y="1371600"/>
+            <a:ext cx="2153046" cy="1965960"/>
+          </a:xfrm>
+          <a:prstGeom prst="rect">
+            <a:avLst/>
+          </a:prstGeom>
+          <a:solidFill>
+            <a:srgbClr val="EEF2F5"/>
+          </a:solidFill>
+          <a:ln w="12700">
+            <a:solidFill>
+              <a:srgbClr val="C9D1D8"/>
+            </a:solidFill>
+            <a:prstDash val="solid"/>
+          </a:ln>
+        </p:spPr>
+      </p:sp>
+      <p:sp>
+        <p:nvSpPr>
+          <p:cNvPr id="15" name="Shape 13"/>
+          <p:cNvSpPr/>
+          <p:nvPr/>
+        </p:nvSpPr>
+        <p:spPr>
+          <a:xfrm>
+            <a:off x="5019324" y="1371600"/>
+            <a:ext cx="2153046" cy="54864"/>
+          </a:xfrm>
+          <a:prstGeom prst="rect">
+            <a:avLst/>
+          </a:prstGeom>
+          <a:solidFill>
+            <a:srgbClr val="3B4E8C"/>
+          </a:solidFill>
+          <a:ln w="12700">
+            <a:solidFill>
+              <a:srgbClr val="3B4E8C"/>
+            </a:solidFill>
+            <a:prstDash val="solid"/>
+          </a:ln>
+        </p:spPr>
+      </p:sp>
+      <p:sp>
+        <p:nvSpPr>
+          <p:cNvPr id="16" name="Text 14"/>
+          <p:cNvSpPr txBox="1"/>
+          <p:nvPr/>
+        </p:nvSpPr>
+        <p:spPr>
+          <a:xfrm>
+            <a:off x="5129052" y="1481328"/>
+            <a:ext cx="365760" cy="237744"/>
+          </a:xfrm>
+          <a:prstGeom prst="rect">
+            <a:avLst/>
+          </a:prstGeom>
+          <a:noFill/>
+          <a:ln/>
+        </p:spPr>
+        <p:txBody>
+          <a:bodyPr wrap="square" lIns="0" tIns="0" rIns="0" bIns="0" rtlCol="0" anchor="t"/>
+          <a:lstStyle/>
+          <a:p>
+            <a:pPr indent="0" marL="0">
+              <a:buNone/>
+            </a:pPr>
+            <a:r>
+              <a:rPr lang="en-US" sz="1500" b="1" dirty="0">
+                <a:solidFill>
+                  <a:srgbClr val="3B4E8C"/>
+                </a:solidFill>
+                <a:latin typeface="Cambria" pitchFamily="34" charset="0"/>
+                <a:ea typeface="Cambria" pitchFamily="34" charset="-122"/>
+                <a:cs typeface="Cambria" pitchFamily="34" charset="-120"/>
+              </a:rPr>
+              <a:t>3</a:t>
+            </a:r>
+            <a:endParaRPr lang="en-US" sz="1500" dirty="0"/>
+          </a:p>
+        </p:txBody>
+      </p:sp>
+      <p:sp>
+        <p:nvSpPr>
+          <p:cNvPr id="17" name="Text 15"/>
+          <p:cNvSpPr txBox="1"/>
+          <p:nvPr/>
+        </p:nvSpPr>
+        <p:spPr>
+          <a:xfrm>
+            <a:off x="5129052" y="1755648"/>
+            <a:ext cx="1933590" cy="274320"/>
+          </a:xfrm>
+          <a:prstGeom prst="rect">
+            <a:avLst/>
+          </a:prstGeom>
+          <a:noFill/>
+          <a:ln/>
+        </p:spPr>
+        <p:txBody>
+          <a:bodyPr wrap="square" lIns="0" tIns="0" rIns="0" bIns="0" rtlCol="0" anchor="t"/>
+          <a:lstStyle/>
+          <a:p>
+            <a:pPr indent="0" marL="0">
+              <a:buNone/>
+            </a:pPr>
+            <a:r>
+              <a:rPr lang="en-US" sz="1200" b="1" dirty="0">
+                <a:solidFill>
+                  <a:srgbClr val="16222B"/>
+                </a:solidFill>
+                <a:latin typeface="Calibri" pitchFamily="34" charset="0"/>
+                <a:ea typeface="Calibri" pitchFamily="34" charset="-122"/>
+                <a:cs typeface="Calibri" pitchFamily="34" charset="-120"/>
+              </a:rPr>
+              <a:t>You stop watching</a:t>
+            </a:r>
+            <a:endParaRPr lang="en-US" sz="1200" dirty="0"/>
+          </a:p>
+        </p:txBody>
+      </p:sp>
+      <p:sp>
+        <p:nvSpPr>
+          <p:cNvPr id="18" name="Text 16"/>
+          <p:cNvSpPr txBox="1"/>
+          <p:nvPr/>
+        </p:nvSpPr>
+        <p:spPr>
+          <a:xfrm>
+            <a:off x="5129052" y="2066544"/>
+            <a:ext cx="1933590" cy="1188720"/>
+          </a:xfrm>
+          <a:prstGeom prst="rect">
+            <a:avLst/>
+          </a:prstGeom>
+          <a:noFill/>
+          <a:ln/>
+        </p:spPr>
+        <p:txBody>
+          <a:bodyPr wrap="square" lIns="0" tIns="0" rIns="0" bIns="0" rtlCol="0" anchor="t"/>
+          <a:lstStyle/>
+          <a:p>
+            <a:pPr indent="0" marL="0">
+              <a:buNone/>
+            </a:pPr>
+            <a:r>
+              <a:rPr lang="en-US" sz="1000" dirty="0">
+                <a:solidFill>
+                  <a:srgbClr val="22303C"/>
+                </a:solidFill>
+                <a:latin typeface="Calibri" pitchFamily="34" charset="0"/>
+                <a:ea typeface="Calibri" pitchFamily="34" charset="-122"/>
+                <a:cs typeface="Calibri" pitchFamily="34" charset="-120"/>
+              </a:rPr>
+              <a:t>There is no step list to babysit. It observes, decides, composes a graph, type-checks it, gates it, and dispatches</a:t>
+            </a:r>
+            <a:endParaRPr lang="en-US" sz="1000" dirty="0"/>
+          </a:p>
+        </p:txBody>
+      </p:sp>
+      <p:sp>
+        <p:nvSpPr>
+          <p:cNvPr id="19" name="Shape 17"/>
+          <p:cNvSpPr/>
+          <p:nvPr/>
+        </p:nvSpPr>
+        <p:spPr>
+          <a:xfrm>
+            <a:off x="7300387" y="1371600"/>
+            <a:ext cx="2153046" cy="1965960"/>
+          </a:xfrm>
+          <a:prstGeom prst="rect">
+            <a:avLst/>
+          </a:prstGeom>
+          <a:solidFill>
+            <a:srgbClr val="EEF2F5"/>
+          </a:solidFill>
+          <a:ln w="12700">
+            <a:solidFill>
+              <a:srgbClr val="C9D1D8"/>
+            </a:solidFill>
+            <a:prstDash val="solid"/>
+          </a:ln>
+        </p:spPr>
+      </p:sp>
+      <p:sp>
+        <p:nvSpPr>
+          <p:cNvPr id="20" name="Shape 18"/>
+          <p:cNvSpPr/>
+          <p:nvPr/>
+        </p:nvSpPr>
+        <p:spPr>
+          <a:xfrm>
+            <a:off x="7300387" y="1371600"/>
+            <a:ext cx="2153046" cy="54864"/>
+          </a:xfrm>
+          <a:prstGeom prst="rect">
+            <a:avLst/>
+          </a:prstGeom>
+          <a:solidFill>
+            <a:srgbClr val="2E7D5B"/>
+          </a:solidFill>
+          <a:ln w="12700">
+            <a:solidFill>
+              <a:srgbClr val="2E7D5B"/>
+            </a:solidFill>
+            <a:prstDash val="solid"/>
+          </a:ln>
+        </p:spPr>
+      </p:sp>
+      <p:sp>
+        <p:nvSpPr>
+          <p:cNvPr id="21" name="Text 19"/>
+          <p:cNvSpPr txBox="1"/>
+          <p:nvPr/>
+        </p:nvSpPr>
+        <p:spPr>
+          <a:xfrm>
+            <a:off x="7410115" y="1481328"/>
+            <a:ext cx="365760" cy="237744"/>
+          </a:xfrm>
+          <a:prstGeom prst="rect">
+            <a:avLst/>
+          </a:prstGeom>
+          <a:noFill/>
+          <a:ln/>
+        </p:spPr>
+        <p:txBody>
+          <a:bodyPr wrap="square" lIns="0" tIns="0" rIns="0" bIns="0" rtlCol="0" anchor="t"/>
+          <a:lstStyle/>
+          <a:p>
+            <a:pPr indent="0" marL="0">
+              <a:buNone/>
+            </a:pPr>
+            <a:r>
+              <a:rPr lang="en-US" sz="1500" b="1" dirty="0">
+                <a:solidFill>
+                  <a:srgbClr val="2E7D5B"/>
+                </a:solidFill>
+                <a:latin typeface="Cambria" pitchFamily="34" charset="0"/>
+                <a:ea typeface="Cambria" pitchFamily="34" charset="-122"/>
+                <a:cs typeface="Cambria" pitchFamily="34" charset="-120"/>
+              </a:rPr>
+              <a:t>4</a:t>
+            </a:r>
+            <a:endParaRPr lang="en-US" sz="1500" dirty="0"/>
+          </a:p>
+        </p:txBody>
+      </p:sp>
+      <p:sp>
+        <p:nvSpPr>
+          <p:cNvPr id="22" name="Text 20"/>
+          <p:cNvSpPr txBox="1"/>
+          <p:nvPr/>
+        </p:nvSpPr>
+        <p:spPr>
+          <a:xfrm>
+            <a:off x="7410115" y="1755648"/>
+            <a:ext cx="1933590" cy="274320"/>
+          </a:xfrm>
+          <a:prstGeom prst="rect">
+            <a:avLst/>
+          </a:prstGeom>
+          <a:noFill/>
+          <a:ln/>
+        </p:spPr>
+        <p:txBody>
+          <a:bodyPr wrap="square" lIns="0" tIns="0" rIns="0" bIns="0" rtlCol="0" anchor="t"/>
+          <a:lstStyle/>
+          <a:p>
+            <a:pPr indent="0" marL="0">
+              <a:buNone/>
+            </a:pPr>
+            <a:r>
+              <a:rPr lang="en-US" sz="1200" b="1" dirty="0">
+                <a:solidFill>
+                  <a:srgbClr val="16222B"/>
+                </a:solidFill>
+                <a:latin typeface="Calibri" pitchFamily="34" charset="0"/>
+                <a:ea typeface="Calibri" pitchFamily="34" charset="-122"/>
+                <a:cs typeface="Calibri" pitchFamily="34" charset="-120"/>
+              </a:rPr>
+              <a:t>It argues with itself</a:t>
+            </a:r>
+            <a:endParaRPr lang="en-US" sz="1200" dirty="0"/>
+          </a:p>
+        </p:txBody>
+      </p:sp>
+      <p:sp>
+        <p:nvSpPr>
+          <p:cNvPr id="23" name="Text 21"/>
+          <p:cNvSpPr txBox="1"/>
+          <p:nvPr/>
+        </p:nvSpPr>
+        <p:spPr>
+          <a:xfrm>
+            <a:off x="7410115" y="2066544"/>
+            <a:ext cx="1933590" cy="1188720"/>
+          </a:xfrm>
+          <a:prstGeom prst="rect">
+            <a:avLst/>
+          </a:prstGeom>
+          <a:noFill/>
+          <a:ln/>
+        </p:spPr>
+        <p:txBody>
+          <a:bodyPr wrap="square" lIns="0" tIns="0" rIns="0" bIns="0" rtlCol="0" anchor="t"/>
+          <a:lstStyle/>
+          <a:p>
+            <a:pPr indent="0" marL="0">
+              <a:buNone/>
+            </a:pPr>
+            <a:r>
+              <a:rPr lang="en-US" sz="1000" dirty="0">
+                <a:solidFill>
+                  <a:srgbClr val="22303C"/>
+                </a:solidFill>
+                <a:latin typeface="Calibri" pitchFamily="34" charset="0"/>
+                <a:ea typeface="Calibri" pitchFamily="34" charset="-122"/>
+                <a:cs typeface="Calibri" pitchFamily="34" charset="-120"/>
+              </a:rPr>
+              <a:t>It asked for 3 lineages. The interlock refused on cost. It came back with 2 and was admitted — nobody woken up</a:t>
+            </a:r>
+            <a:endParaRPr lang="en-US" sz="1000" dirty="0"/>
+          </a:p>
+        </p:txBody>
+      </p:sp>
+      <p:sp>
+        <p:nvSpPr>
+          <p:cNvPr id="24" name="Shape 22"/>
+          <p:cNvSpPr/>
+          <p:nvPr/>
+        </p:nvSpPr>
+        <p:spPr>
+          <a:xfrm>
+            <a:off x="9581449" y="1371600"/>
+            <a:ext cx="2153046" cy="1965960"/>
+          </a:xfrm>
+          <a:prstGeom prst="rect">
+            <a:avLst/>
+          </a:prstGeom>
+          <a:solidFill>
+            <a:srgbClr val="EEF2F5"/>
+          </a:solidFill>
+          <a:ln w="12700">
+            <a:solidFill>
+              <a:srgbClr val="C9D1D8"/>
+            </a:solidFill>
+            <a:prstDash val="solid"/>
+          </a:ln>
+        </p:spPr>
+      </p:sp>
+      <p:sp>
+        <p:nvSpPr>
+          <p:cNvPr id="25" name="Shape 23"/>
+          <p:cNvSpPr/>
+          <p:nvPr/>
+        </p:nvSpPr>
+        <p:spPr>
+          <a:xfrm>
+            <a:off x="9581449" y="1371600"/>
+            <a:ext cx="2153046" cy="54864"/>
+          </a:xfrm>
+          <a:prstGeom prst="rect">
+            <a:avLst/>
+          </a:prstGeom>
+          <a:solidFill>
+            <a:srgbClr val="1E6470"/>
+          </a:solidFill>
+          <a:ln w="12700">
+            <a:solidFill>
+              <a:srgbClr val="1E6470"/>
+            </a:solidFill>
+            <a:prstDash val="solid"/>
+          </a:ln>
+        </p:spPr>
+      </p:sp>
+      <p:sp>
+        <p:nvSpPr>
+          <p:cNvPr id="26" name="Text 24"/>
+          <p:cNvSpPr txBox="1"/>
+          <p:nvPr/>
+        </p:nvSpPr>
+        <p:spPr>
+          <a:xfrm>
+            <a:off x="9691177" y="1481328"/>
+            <a:ext cx="365760" cy="237744"/>
+          </a:xfrm>
+          <a:prstGeom prst="rect">
+            <a:avLst/>
+          </a:prstGeom>
+          <a:noFill/>
+          <a:ln/>
+        </p:spPr>
+        <p:txBody>
+          <a:bodyPr wrap="square" lIns="0" tIns="0" rIns="0" bIns="0" rtlCol="0" anchor="t"/>
+          <a:lstStyle/>
+          <a:p>
+            <a:pPr indent="0" marL="0">
+              <a:buNone/>
+            </a:pPr>
+            <a:r>
+              <a:rPr lang="en-US" sz="1500" b="1" dirty="0">
+                <a:solidFill>
+                  <a:srgbClr val="1E6470"/>
+                </a:solidFill>
+                <a:latin typeface="Cambria" pitchFamily="34" charset="0"/>
+                <a:ea typeface="Cambria" pitchFamily="34" charset="-122"/>
+                <a:cs typeface="Cambria" pitchFamily="34" charset="-120"/>
+              </a:rPr>
+              <a:t>5</a:t>
+            </a:r>
+            <a:endParaRPr lang="en-US" sz="1500" dirty="0"/>
+          </a:p>
+        </p:txBody>
+      </p:sp>
+      <p:sp>
+        <p:nvSpPr>
+          <p:cNvPr id="27" name="Text 25"/>
+          <p:cNvSpPr txBox="1"/>
+          <p:nvPr/>
+        </p:nvSpPr>
+        <p:spPr>
+          <a:xfrm>
+            <a:off x="9691177" y="1755648"/>
+            <a:ext cx="1933590" cy="274320"/>
+          </a:xfrm>
+          <a:prstGeom prst="rect">
+            <a:avLst/>
+          </a:prstGeom>
+          <a:noFill/>
+          <a:ln/>
+        </p:spPr>
+        <p:txBody>
+          <a:bodyPr wrap="square" lIns="0" tIns="0" rIns="0" bIns="0" rtlCol="0" anchor="t"/>
+          <a:lstStyle/>
+          <a:p>
+            <a:pPr indent="0" marL="0">
+              <a:buNone/>
+            </a:pPr>
+            <a:r>
+              <a:rPr lang="en-US" sz="1200" b="1" dirty="0">
+                <a:solidFill>
+                  <a:srgbClr val="16222B"/>
+                </a:solidFill>
+                <a:latin typeface="Calibri" pitchFamily="34" charset="0"/>
+                <a:ea typeface="Calibri" pitchFamily="34" charset="-122"/>
+                <a:cs typeface="Calibri" pitchFamily="34" charset="-120"/>
+              </a:rPr>
+              <a:t>It stops, and says why</a:t>
+            </a:r>
+            <a:endParaRPr lang="en-US" sz="1200" dirty="0"/>
+          </a:p>
+        </p:txBody>
+      </p:sp>
+      <p:sp>
+        <p:nvSpPr>
+          <p:cNvPr id="28" name="Text 26"/>
+          <p:cNvSpPr txBox="1"/>
+          <p:nvPr/>
+        </p:nvSpPr>
+        <p:spPr>
+          <a:xfrm>
+            <a:off x="9691177" y="2066544"/>
+            <a:ext cx="1933590" cy="1188720"/>
+          </a:xfrm>
+          <a:prstGeom prst="rect">
+            <a:avLst/>
+          </a:prstGeom>
+          <a:noFill/>
+          <a:ln/>
+        </p:spPr>
+        <p:txBody>
+          <a:bodyPr wrap="square" lIns="0" tIns="0" rIns="0" bIns="0" rtlCol="0" anchor="t"/>
+          <a:lstStyle/>
+          <a:p>
+            <a:pPr indent="0" marL="0">
+              <a:buNone/>
+            </a:pPr>
+            <a:r>
+              <a:rPr lang="en-US" sz="1000" dirty="0">
+                <a:solidFill>
+                  <a:srgbClr val="22303C"/>
+                </a:solidFill>
+                <a:latin typeface="Calibri" pitchFamily="34" charset="0"/>
+                <a:ea typeface="Calibri" pitchFamily="34" charset="-122"/>
+                <a:cs typeface="Calibri" pitchFamily="34" charset="-120"/>
+              </a:rPr>
+              <a:t>"target front size 3 reached". 3 designs on the front, 4 nodes, every one marked suspect until a human has looked</a:t>
+            </a:r>
+            <a:endParaRPr lang="en-US" sz="1000" dirty="0"/>
+          </a:p>
+        </p:txBody>
+      </p:sp>
+      <p:sp>
+        <p:nvSpPr>
+          <p:cNvPr id="29" name="Shape 27"/>
+          <p:cNvSpPr/>
+          <p:nvPr/>
+        </p:nvSpPr>
+        <p:spPr>
+          <a:xfrm>
+            <a:off x="457200" y="3520440"/>
+            <a:ext cx="6675120" cy="475488"/>
           </a:xfrm>
           <a:prstGeom prst="rect">
             <a:avLst/>
@@ -18630,14 +19880,14 @@
       </p:sp>
       <p:sp>
         <p:nvSpPr>
-          <p:cNvPr id="5" name="Text 3"/>
+          <p:cNvPr id="30" name="Text 28"/>
           <p:cNvSpPr txBox="1"/>
           <p:nvPr/>
         </p:nvSpPr>
         <p:spPr>
           <a:xfrm>
-            <a:off x="557784" y="1463040"/>
-            <a:ext cx="6656832" cy="2103120"/>
+            <a:off x="557784" y="3611880"/>
+            <a:ext cx="6473952" cy="292608"/>
           </a:xfrm>
           <a:prstGeom prst="rect">
             <a:avLst/>
@@ -18656,7 +19906,7 @@
               <a:buNone/>
             </a:pPr>
             <a:r>
-              <a:rPr lang="en-US" sz="950" dirty="0">
+              <a:rPr lang="en-US" sz="1040" dirty="0">
                 <a:solidFill>
                   <a:srgbClr val="DCE5EC"/>
                 </a:solidFill>
@@ -18664,258 +19914,32 @@
                 <a:ea typeface="Consolas" pitchFamily="34" charset="-122"/>
                 <a:cs typeface="Consolas" pitchFamily="34" charset="-120"/>
               </a:rPr>
-              <a:t>$ impress-a preflight campaigns/delta-small-molecule-smoke.yaml</a:t>
-            </a:r>
-            <a:endParaRPr lang="en-US" sz="950" dirty="0"/>
-          </a:p>
-          <a:p>
-            <a:pPr indent="0" marL="0">
-              <a:lnSpc>
-                <a:spcPts val="1300"/>
-              </a:lnSpc>
-              <a:buNone/>
-            </a:pPr>
-            <a:endParaRPr lang="en-US" sz="950" dirty="0"/>
-          </a:p>
-          <a:p>
-            <a:pPr indent="0" marL="0">
-              <a:lnSpc>
-                <a:spcPts val="1300"/>
-              </a:lnSpc>
-              <a:buNone/>
-            </a:pPr>
-            <a:r>
-              <a:rPr lang="en-US" sz="950" dirty="0">
-                <a:solidFill>
-                  <a:srgbClr val="DCE5EC"/>
-                </a:solidFill>
-                <a:latin typeface="Consolas" pitchFamily="34" charset="0"/>
-                <a:ea typeface="Consolas" pitchFamily="34" charset="-122"/>
-                <a:cs typeface="Consolas" pitchFamily="34" charset="-120"/>
-              </a:rPr>
-              <a:t>  preflight</a:t>
-            </a:r>
-            <a:endParaRPr lang="en-US" sz="950" dirty="0"/>
-          </a:p>
-          <a:p>
-            <a:pPr indent="0" marL="0">
-              <a:lnSpc>
-                <a:spcPts val="1300"/>
-              </a:lnSpc>
-              <a:buNone/>
-            </a:pPr>
-            <a:endParaRPr lang="en-US" sz="950" dirty="0"/>
-          </a:p>
-          <a:p>
-            <a:pPr indent="0" marL="0">
-              <a:lnSpc>
-                <a:spcPts val="1300"/>
-              </a:lnSpc>
-              <a:buNone/>
-            </a:pPr>
-            <a:r>
-              <a:rPr lang="en-US" sz="950" dirty="0">
-                <a:solidFill>
-                  <a:srgbClr val="DCE5EC"/>
-                </a:solidFill>
-                <a:latin typeface="Consolas" pitchFamily="34" charset="0"/>
-                <a:ea typeface="Consolas" pitchFamily="34" charset="-122"/>
-                <a:cs typeface="Consolas" pitchFamily="34" charset="-120"/>
-              </a:rPr>
-              <a:t>    [ok  ] $WORK_DIR            /work/nvme/&lt;project&gt;/&lt;user&gt;</a:t>
-            </a:r>
-            <a:endParaRPr lang="en-US" sz="950" dirty="0"/>
-          </a:p>
-          <a:p>
-            <a:pPr indent="0" marL="0">
-              <a:lnSpc>
-                <a:spcPts val="1300"/>
-              </a:lnSpc>
-              <a:buNone/>
-            </a:pPr>
-            <a:r>
-              <a:rPr lang="en-US" sz="950" dirty="0">
-                <a:solidFill>
-                  <a:srgbClr val="DCE5EC"/>
-                </a:solidFill>
-                <a:latin typeface="Consolas" pitchFamily="34" charset="0"/>
-                <a:ea typeface="Consolas" pitchFamily="34" charset="-122"/>
-                <a:cs typeface="Consolas" pitchFamily="34" charset="-120"/>
-              </a:rPr>
-              <a:t>    [FAIL] $MPNN_DIR            no model_params/ - run its get_model_params.sh</a:t>
-            </a:r>
-            <a:endParaRPr lang="en-US" sz="950" dirty="0"/>
-          </a:p>
-          <a:p>
-            <a:pPr indent="0" marL="0">
-              <a:lnSpc>
-                <a:spcPts val="1300"/>
-              </a:lnSpc>
-              <a:buNone/>
-            </a:pPr>
-            <a:r>
-              <a:rPr lang="en-US" sz="950" dirty="0">
-                <a:solidFill>
-                  <a:srgbClr val="DCE5EC"/>
-                </a:solidFill>
-                <a:latin typeface="Consolas" pitchFamily="34" charset="0"/>
-                <a:ea typeface="Consolas" pitchFamily="34" charset="-122"/>
-                <a:cs typeface="Consolas" pitchFamily="34" charset="-120"/>
-              </a:rPr>
-              <a:t>    [ok  ] boltz CCD cache      extraction proven complete</a:t>
-            </a:r>
-            <a:endParaRPr lang="en-US" sz="950" dirty="0"/>
-          </a:p>
-          <a:p>
-            <a:pPr indent="0" marL="0">
-              <a:lnSpc>
-                <a:spcPts val="1300"/>
-              </a:lnSpc>
-              <a:buNone/>
-            </a:pPr>
-            <a:r>
-              <a:rPr lang="en-US" sz="950" dirty="0">
-                <a:solidFill>
-                  <a:srgbClr val="DCE5EC"/>
-                </a:solidFill>
-                <a:latin typeface="Consolas" pitchFamily="34" charset="0"/>
-                <a:ea typeface="Consolas" pitchFamily="34" charset="-122"/>
-                <a:cs typeface="Consolas" pitchFamily="34" charset="-120"/>
-              </a:rPr>
-              <a:t>    [warn] pyrosetta            timed out after 120s - a loaded login node can</a:t>
-            </a:r>
-            <a:endParaRPr lang="en-US" sz="950" dirty="0"/>
-          </a:p>
-          <a:p>
-            <a:pPr indent="0" marL="0">
-              <a:lnSpc>
-                <a:spcPts val="1300"/>
-              </a:lnSpc>
-              <a:buNone/>
-            </a:pPr>
-            <a:r>
-              <a:rPr lang="en-US" sz="950" dirty="0">
-                <a:solidFill>
-                  <a:srgbClr val="DCE5EC"/>
-                </a:solidFill>
-                <a:latin typeface="Consolas" pitchFamily="34" charset="0"/>
-                <a:ea typeface="Consolas" pitchFamily="34" charset="-122"/>
-                <a:cs typeface="Consolas" pitchFamily="34" charset="-120"/>
-              </a:rPr>
-              <a:t>                                take that long to import it; re-run</a:t>
-            </a:r>
-            <a:endParaRPr lang="en-US" sz="950" dirty="0"/>
-          </a:p>
-          <a:p>
-            <a:pPr indent="0" marL="0">
-              <a:lnSpc>
-                <a:spcPts val="1300"/>
-              </a:lnSpc>
-              <a:buNone/>
-            </a:pPr>
-            <a:r>
-              <a:rPr lang="en-US" sz="950" dirty="0">
-                <a:solidFill>
-                  <a:srgbClr val="DCE5EC"/>
-                </a:solidFill>
-                <a:latin typeface="Consolas" pitchFamily="34" charset="0"/>
-                <a:ea typeface="Consolas" pitchFamily="34" charset="-122"/>
-                <a:cs typeface="Consolas" pitchFamily="34" charset="-120"/>
-              </a:rPr>
-              <a:t>    [ok  ] venv on fast storage /work/nvme/&lt;project&gt;/&lt;user&gt;/venv</a:t>
-            </a:r>
-            <a:endParaRPr lang="en-US" sz="950" dirty="0"/>
-          </a:p>
-          <a:p>
-            <a:pPr indent="0" marL="0">
-              <a:lnSpc>
-                <a:spcPts val="1300"/>
-              </a:lnSpc>
-              <a:buNone/>
-            </a:pPr>
-            <a:endParaRPr lang="en-US" sz="950" dirty="0"/>
-          </a:p>
-          <a:p>
-            <a:pPr indent="0" marL="0">
-              <a:lnSpc>
-                <a:spcPts val="1300"/>
-              </a:lnSpc>
-              <a:buNone/>
-            </a:pPr>
-            <a:r>
-              <a:rPr lang="en-US" sz="950" dirty="0">
-                <a:solidFill>
-                  <a:srgbClr val="DCE5EC"/>
-                </a:solidFill>
-                <a:latin typeface="Consolas" pitchFamily="34" charset="0"/>
-                <a:ea typeface="Consolas" pitchFamily="34" charset="-122"/>
-                <a:cs typeface="Consolas" pitchFamily="34" charset="-120"/>
-              </a:rPr>
-              <a:t>  7/9 ok, 1 undetermined (pyrosetta) - missing: $MPNN_DIR</a:t>
-            </a:r>
-            <a:endParaRPr lang="en-US" sz="950" dirty="0"/>
-          </a:p>
-        </p:txBody>
-      </p:sp>
-      <p:sp>
-        <p:nvSpPr>
-          <p:cNvPr id="6" name="Text 4"/>
-          <p:cNvSpPr txBox="1"/>
-          <p:nvPr/>
-        </p:nvSpPr>
-        <p:spPr>
-          <a:xfrm>
-            <a:off x="457200" y="3675888"/>
-            <a:ext cx="6858000" cy="182880"/>
-          </a:xfrm>
-          <a:prstGeom prst="rect">
-            <a:avLst/>
-          </a:prstGeom>
-          <a:noFill/>
-          <a:ln/>
-        </p:spPr>
-        <p:txBody>
-          <a:bodyPr wrap="square" lIns="0" tIns="0" rIns="0" bIns="0" rtlCol="0" anchor="t"/>
-          <a:lstStyle/>
-          <a:p>
-            <a:pPr algn="r" indent="0" marL="0">
-              <a:buNone/>
-            </a:pPr>
-            <a:r>
-              <a:rPr lang="en-US" sz="850" dirty="0">
-                <a:solidFill>
-                  <a:srgbClr val="5E6B75"/>
-                </a:solidFill>
-                <a:latin typeface="Consolas" pitchFamily="34" charset="0"/>
-                <a:ea typeface="Consolas" pitchFamily="34" charset="-122"/>
-                <a:cs typeface="Consolas" pitchFamily="34" charset="-120"/>
-              </a:rPr>
-              <a:t>cli/__init__.py:252 · ILLUSTRATIVE (shape of real output)</a:t>
-            </a:r>
-            <a:endParaRPr lang="en-US" sz="850" dirty="0"/>
-          </a:p>
-        </p:txBody>
-      </p:sp>
-      <p:sp>
-        <p:nvSpPr>
-          <p:cNvPr id="7" name="Shape 5"/>
+              <a:t>$ impress-a run campaigns/delta-small-molecule.yaml --model D</a:t>
+            </a:r>
+            <a:endParaRPr lang="en-US" sz="1040" dirty="0"/>
+          </a:p>
+        </p:txBody>
+      </p:sp>
+      <p:sp>
+        <p:nvSpPr>
+          <p:cNvPr id="31" name="Shape 29"/>
           <p:cNvSpPr/>
           <p:nvPr/>
         </p:nvSpPr>
         <p:spPr>
           <a:xfrm>
-            <a:off x="7543800" y="1371600"/>
-            <a:ext cx="4187952" cy="2286000"/>
+            <a:off x="7360920" y="3456432"/>
+            <a:ext cx="4370832" cy="960120"/>
           </a:xfrm>
           <a:prstGeom prst="rect">
             <a:avLst/>
           </a:prstGeom>
           <a:solidFill>
-            <a:srgbClr val="E4F1EA"/>
+            <a:srgbClr val="E9EDF7"/>
           </a:solidFill>
           <a:ln w="12700">
             <a:solidFill>
-              <a:srgbClr val="E4F1EA"/>
+              <a:srgbClr val="E9EDF7"/>
             </a:solidFill>
             <a:prstDash val="solid"/>
           </a:ln>
@@ -18923,14 +19947,14 @@
       </p:sp>
       <p:sp>
         <p:nvSpPr>
-          <p:cNvPr id="8" name="Text 6"/>
+          <p:cNvPr id="32" name="Text 30"/>
           <p:cNvSpPr txBox="1"/>
           <p:nvPr/>
         </p:nvSpPr>
         <p:spPr>
           <a:xfrm>
-            <a:off x="7671816" y="1453896"/>
-            <a:ext cx="3931920" cy="274320"/>
+            <a:off x="7488936" y="3538728"/>
+            <a:ext cx="4114800" cy="274320"/>
           </a:xfrm>
           <a:prstGeom prst="rect">
             <a:avLst/>
@@ -18948,13 +19972,13 @@
             <a:r>
               <a:rPr lang="en-US" sz="1300" b="1" dirty="0">
                 <a:solidFill>
-                  <a:srgbClr val="2E7D5B"/>
+                  <a:srgbClr val="3B4E8C"/>
                 </a:solidFill>
                 <a:latin typeface="Calibri" pitchFamily="34" charset="0"/>
                 <a:ea typeface="Calibri" pitchFamily="34" charset="-122"/>
                 <a:cs typeface="Calibri" pitchFamily="34" charset="-120"/>
               </a:rPr>
-              <a:t>Why the third state exists</a:t>
+              <a:t>What you never write</a:t>
             </a:r>
             <a:endParaRPr lang="en-US" sz="1300" dirty="0"/>
           </a:p>
@@ -18962,14 +19986,14 @@
       </p:sp>
       <p:sp>
         <p:nvSpPr>
-          <p:cNvPr id="9" name="Text 7"/>
+          <p:cNvPr id="33" name="Text 31"/>
           <p:cNvSpPr txBox="1"/>
           <p:nvPr/>
         </p:nvSpPr>
         <p:spPr>
           <a:xfrm>
-            <a:off x="7671816" y="1764792"/>
-            <a:ext cx="3931920" cy="1810512"/>
+            <a:off x="7488936" y="3849624"/>
+            <a:ext cx="4114800" cy="484632"/>
           </a:xfrm>
           <a:prstGeom prst="rect">
             <a:avLst/>
@@ -18997,282 +20021,26 @@
                 <a:ea typeface="Calibri" pitchFamily="34" charset="-122"/>
                 <a:cs typeface="Calibri" pitchFamily="34" charset="-120"/>
               </a:rPr>
-              <a:t>Every real adapter raises on a missing env var — but only once a task is RUNNING, which on HPC means inside the allocation, after the queue wait.</a:t>
+              <a:t>No DAG, no step list, no retry loop, and no per-experiment edit to a batch script — the shape of the work is composed each cycle from the stages you named.</a:t>
             </a:r>
             <a:endParaRPr lang="en-US" sz="1050" dirty="0"/>
           </a:p>
-          <a:p>
-            <a:pPr marL="342900" indent="-342900">
-              <a:spcAft>
-                <a:spcPts val="400"/>
-              </a:spcAft>
-              <a:buSzPct val="100000"/>
-              <a:buChar char="•"/>
-            </a:pPr>
-            <a:r>
-              <a:rPr lang="en-US" sz="1050" dirty="0">
-                <a:solidFill>
-                  <a:srgbClr val="22303C"/>
-                </a:solidFill>
-                <a:latin typeface="Calibri" pitchFamily="34" charset="0"/>
-                <a:ea typeface="Calibri" pitchFamily="34" charset="-122"/>
-                <a:cs typeface="Calibri" pitchFamily="34" charset="-120"/>
-              </a:rPr>
-              <a:t>`ok` is tri-state: None means UNDETERMINED, not failed. A probe that shells out to import a heavy science stack can take minutes on a busy login node, and reporting that as FAIL trains the reader to ignore the FAIL column.</a:t>
-            </a:r>
-            <a:endParaRPr lang="en-US" sz="1050" dirty="0"/>
-          </a:p>
-        </p:txBody>
-      </p:sp>
-      <p:sp>
-        <p:nvSpPr>
-          <p:cNvPr id="10" name="Shape 8"/>
+        </p:txBody>
+      </p:sp>
+      <p:sp>
+        <p:nvSpPr>
+          <p:cNvPr id="34" name="Shape 32"/>
           <p:cNvSpPr/>
           <p:nvPr/>
         </p:nvSpPr>
         <p:spPr>
           <a:xfrm>
-            <a:off x="457200" y="3840480"/>
-            <a:ext cx="5577840" cy="1188720"/>
-          </a:xfrm>
-          <a:prstGeom prst="rect">
-            <a:avLst/>
-          </a:prstGeom>
-          <a:solidFill>
-            <a:srgbClr val="EEF2F5"/>
-          </a:solidFill>
-          <a:ln w="12700">
-            <a:solidFill>
-              <a:srgbClr val="EEF2F5"/>
-            </a:solidFill>
-            <a:prstDash val="solid"/>
-          </a:ln>
-        </p:spPr>
-      </p:sp>
-      <p:sp>
-        <p:nvSpPr>
-          <p:cNvPr id="11" name="Text 9"/>
-          <p:cNvSpPr txBox="1"/>
-          <p:nvPr/>
-        </p:nvSpPr>
-        <p:spPr>
-          <a:xfrm>
-            <a:off x="585216" y="3922776"/>
-            <a:ext cx="5321808" cy="274320"/>
-          </a:xfrm>
-          <a:prstGeom prst="rect">
-            <a:avLst/>
-          </a:prstGeom>
-          <a:noFill/>
-          <a:ln/>
-        </p:spPr>
-        <p:txBody>
-          <a:bodyPr wrap="square" lIns="0" tIns="0" rIns="0" bIns="0" rtlCol="0" anchor="t"/>
-          <a:lstStyle/>
-          <a:p>
-            <a:pPr indent="0" marL="0">
-              <a:buNone/>
-            </a:pPr>
-            <a:r>
-              <a:rPr lang="en-US" sz="1300" b="1" dirty="0">
-                <a:solidFill>
-                  <a:srgbClr val="16222B"/>
-                </a:solidFill>
-                <a:latin typeface="Calibri" pitchFamily="34" charset="0"/>
-                <a:ea typeface="Calibri" pitchFamily="34" charset="-122"/>
-                <a:cs typeface="Calibri" pitchFamily="34" charset="-120"/>
-              </a:rPr>
-              <a:t>The rule that must not erode</a:t>
-            </a:r>
-            <a:endParaRPr lang="en-US" sz="1300" dirty="0"/>
-          </a:p>
-        </p:txBody>
-      </p:sp>
-      <p:sp>
-        <p:nvSpPr>
-          <p:cNvPr id="12" name="Text 10"/>
-          <p:cNvSpPr txBox="1"/>
-          <p:nvPr/>
-        </p:nvSpPr>
-        <p:spPr>
-          <a:xfrm>
-            <a:off x="585216" y="4233672"/>
-            <a:ext cx="5321808" cy="713232"/>
-          </a:xfrm>
-          <a:prstGeom prst="rect">
-            <a:avLst/>
-          </a:prstGeom>
-          <a:noFill/>
-          <a:ln/>
-        </p:spPr>
-        <p:txBody>
-          <a:bodyPr wrap="square" lIns="0" tIns="0" rIns="0" bIns="0" rtlCol="0" anchor="t"/>
-          <a:lstStyle/>
-          <a:p>
-            <a:pPr marL="342900" indent="-342900">
-              <a:spcAft>
-                <a:spcPts val="400"/>
-              </a:spcAft>
-              <a:buSzPct val="100000"/>
-              <a:buChar char="•"/>
-            </a:pPr>
-            <a:r>
-              <a:rPr lang="en-US" sz="1050" dirty="0">
-                <a:solidFill>
-                  <a:srgbClr val="22303C"/>
-                </a:solidFill>
-                <a:latin typeface="Calibri" pitchFamily="34" charset="0"/>
-                <a:ea typeface="Calibri" pitchFamily="34" charset="-122"/>
-                <a:cs typeface="Calibri" pitchFamily="34" charset="-120"/>
-              </a:rPr>
-              <a:t>None is ONLY for a probe that produced no answer. A deterministic negative is always False: a missing `$MPNN_DIR` is a FAIL forever; a pyrosetta *import error* is a FAIL, a pyrosetta *timeout* is undetermined.</a:t>
-            </a:r>
-            <a:endParaRPr lang="en-US" sz="1050" dirty="0"/>
-          </a:p>
-        </p:txBody>
-      </p:sp>
-      <p:sp>
-        <p:nvSpPr>
-          <p:cNvPr id="13" name="Shape 11"/>
-          <p:cNvSpPr/>
-          <p:nvPr/>
-        </p:nvSpPr>
-        <p:spPr>
-          <a:xfrm>
-            <a:off x="6245352" y="3840480"/>
-            <a:ext cx="5577840" cy="1188720"/>
-          </a:xfrm>
-          <a:prstGeom prst="rect">
-            <a:avLst/>
-          </a:prstGeom>
-          <a:solidFill>
-            <a:srgbClr val="EEF2F5"/>
-          </a:solidFill>
-          <a:ln w="12700">
-            <a:solidFill>
-              <a:srgbClr val="EEF2F5"/>
-            </a:solidFill>
-            <a:prstDash val="solid"/>
-          </a:ln>
-        </p:spPr>
-      </p:sp>
-      <p:sp>
-        <p:nvSpPr>
-          <p:cNvPr id="14" name="Text 12"/>
-          <p:cNvSpPr txBox="1"/>
-          <p:nvPr/>
-        </p:nvSpPr>
-        <p:spPr>
-          <a:xfrm>
-            <a:off x="6373368" y="3922776"/>
-            <a:ext cx="5321808" cy="274320"/>
-          </a:xfrm>
-          <a:prstGeom prst="rect">
-            <a:avLst/>
-          </a:prstGeom>
-          <a:noFill/>
-          <a:ln/>
-        </p:spPr>
-        <p:txBody>
-          <a:bodyPr wrap="square" lIns="0" tIns="0" rIns="0" bIns="0" rtlCol="0" anchor="t"/>
-          <a:lstStyle/>
-          <a:p>
-            <a:pPr indent="0" marL="0">
-              <a:buNone/>
-            </a:pPr>
-            <a:r>
-              <a:rPr lang="en-US" sz="1300" b="1" dirty="0">
-                <a:solidFill>
-                  <a:srgbClr val="16222B"/>
-                </a:solidFill>
-                <a:latin typeface="Calibri" pitchFamily="34" charset="0"/>
-                <a:ea typeface="Calibri" pitchFamily="34" charset="-122"/>
-                <a:cs typeface="Calibri" pitchFamily="34" charset="-120"/>
-              </a:rPr>
-              <a:t>What it caught that nothing else would</a:t>
-            </a:r>
-            <a:endParaRPr lang="en-US" sz="1300" dirty="0"/>
-          </a:p>
-        </p:txBody>
-      </p:sp>
-      <p:sp>
-        <p:nvSpPr>
-          <p:cNvPr id="15" name="Text 13"/>
-          <p:cNvSpPr txBox="1"/>
-          <p:nvPr/>
-        </p:nvSpPr>
-        <p:spPr>
-          <a:xfrm>
-            <a:off x="6373368" y="4233672"/>
-            <a:ext cx="5321808" cy="713232"/>
-          </a:xfrm>
-          <a:prstGeom prst="rect">
-            <a:avLst/>
-          </a:prstGeom>
-          <a:noFill/>
-          <a:ln/>
-        </p:spPr>
-        <p:txBody>
-          <a:bodyPr wrap="square" lIns="0" tIns="0" rIns="0" bIns="0" rtlCol="0" anchor="t"/>
-          <a:lstStyle/>
-          <a:p>
-            <a:pPr marL="342900" indent="-342900">
-              <a:spcAft>
-                <a:spcPts val="400"/>
-              </a:spcAft>
-              <a:buSzPct val="100000"/>
-              <a:buChar char="•"/>
-            </a:pPr>
-            <a:r>
-              <a:rPr lang="en-US" sz="1050" dirty="0">
-                <a:solidFill>
-                  <a:srgbClr val="22303C"/>
-                </a:solidFill>
-                <a:latin typeface="Calibri" pitchFamily="34" charset="0"/>
-                <a:ea typeface="Calibri" pitchFamily="34" charset="-122"/>
-                <a:cs typeface="Calibri" pitchFamily="34" charset="-120"/>
-              </a:rPr>
-              <a:t>A venv on HDD rather than NVMe — which works perfectly, about 8x slower, and lands as an unexplained task timeout inside an allocation.</a:t>
-            </a:r>
-            <a:endParaRPr lang="en-US" sz="1050" dirty="0"/>
-          </a:p>
-          <a:p>
-            <a:pPr marL="342900" indent="-342900">
-              <a:spcAft>
-                <a:spcPts val="400"/>
-              </a:spcAft>
-              <a:buSzPct val="100000"/>
-              <a:buChar char="•"/>
-            </a:pPr>
-            <a:r>
-              <a:rPr lang="en-US" sz="1050" dirty="0">
-                <a:solidFill>
-                  <a:srgbClr val="22303C"/>
-                </a:solidFill>
-                <a:latin typeface="Calibri" pitchFamily="34" charset="0"/>
-                <a:ea typeface="Calibri" pitchFamily="34" charset="-122"/>
-                <a:cs typeface="Calibri" pitchFamily="34" charset="-120"/>
-              </a:rPr>
-              <a:t>`ml_collections`, which only LigandMPNN's bundled openfold imports.</a:t>
-            </a:r>
-            <a:endParaRPr lang="en-US" sz="1050" dirty="0"/>
-          </a:p>
-        </p:txBody>
-      </p:sp>
-      <p:sp>
-        <p:nvSpPr>
-          <p:cNvPr id="16" name="Shape 14"/>
-          <p:cNvSpPr/>
-          <p:nvPr/>
-        </p:nvSpPr>
-        <p:spPr>
-          <a:xfrm>
-            <a:off x="457200" y="5166360"/>
-            <a:ext cx="11277295" cy="914400"/>
+            <a:off x="457200" y="4617720"/>
+            <a:ext cx="11277295" cy="841248"/>
           </a:xfrm>
           <a:prstGeom prst="roundRect">
             <a:avLst>
-              <a:gd name="adj" fmla="val 8000"/>
+              <a:gd name="adj" fmla="val 8696"/>
             </a:avLst>
           </a:prstGeom>
           <a:solidFill>
@@ -19288,14 +20056,14 @@
       </p:sp>
       <p:sp>
         <p:nvSpPr>
-          <p:cNvPr id="17" name="Text 15"/>
+          <p:cNvPr id="35" name="Text 33"/>
           <p:cNvSpPr txBox="1"/>
           <p:nvPr/>
         </p:nvSpPr>
         <p:spPr>
           <a:xfrm>
-            <a:off x="530352" y="5212080"/>
-            <a:ext cx="11130991" cy="822960"/>
+            <a:off x="530352" y="4663440"/>
+            <a:ext cx="11130991" cy="749808"/>
           </a:xfrm>
           <a:prstGeom prst="rect">
             <a:avLst/>
@@ -19319,7 +20087,7 @@
                 <a:ea typeface="Calibri" pitchFamily="34" charset="-122"/>
                 <a:cs typeface="Calibri" pitchFamily="34" charset="-120"/>
               </a:rPr>
-              <a:t>Each job writes one self-contained directory: manifest.json (job id, campaign, model, git sha + dirty), slurm.out, campaign.log, provenance/*.jsonl, jobs/ledger.jsonl</a:t>
+              <a:t>What comes back: one directory per job — manifest.json (campaign, model, git sha and whether the checkout was dirty), campaign.log, provenance/*.jsonl (14 records across 5 kinds), jobs/ledger.jsonl (7)</a:t>
             </a:r>
             <a:endParaRPr lang="en-US" sz="1400" dirty="0"/>
           </a:p>
@@ -19336,7 +20104,7 @@
                 <a:ea typeface="Calibri" pitchFamily="34" charset="-122"/>
                 <a:cs typeface="Calibri" pitchFamily="34" charset="-120"/>
               </a:rPr>
-              <a:t>a run you can hand to someone else, including whether the checkout was dirty when it started</a:t>
+              <a:t>you can hand the directory to someone else and they can reconstruct every decision, including the one that was refused</a:t>
             </a:r>
             <a:endParaRPr lang="en-US" sz="1400" dirty="0"/>
           </a:p>
@@ -19344,14 +20112,14 @@
       </p:sp>
       <p:sp>
         <p:nvSpPr>
-          <p:cNvPr id="19" name="Text 16"/>
+          <p:cNvPr id="36" name="Text 34"/>
           <p:cNvSpPr txBox="1"/>
           <p:nvPr/>
         </p:nvSpPr>
         <p:spPr>
           <a:xfrm>
-            <a:off x="457200" y="6492240"/>
-            <a:ext cx="11277295" cy="228600"/>
+            <a:off x="457200" y="5669280"/>
+            <a:ext cx="11277295" cy="457200"/>
           </a:xfrm>
           <a:prstGeom prst="rect">
             <a:avLst/>
@@ -19367,15 +20135,68 @@
               <a:buNone/>
             </a:pPr>
             <a:r>
-              <a:rPr lang="en-US" sz="1000" i="1" dirty="0">
-                <a:solidFill>
-                  <a:srgbClr val="5E6B75"/>
+              <a:rPr lang="en-US" sz="1250" b="1" dirty="0">
+                <a:solidFill>
+                  <a:srgbClr val="16222B"/>
                 </a:solidFill>
                 <a:latin typeface="Calibri" pitchFamily="34" charset="0"/>
                 <a:ea typeface="Calibri" pitchFamily="34" charset="-122"/>
                 <a:cs typeface="Calibri" pitchFamily="34" charset="-120"/>
               </a:rPr>
-              <a:t>the output above is the shape of real preflight output, with paths replaced by placeholders — see CODE_FOR_DECK.md</a:t>
+              <a:t>The experience it is trying to buy:  </a:t>
+            </a:r>
+            <a:pPr indent="0" marL="0">
+              <a:buNone/>
+            </a:pPr>
+            <a:r>
+              <a:rPr lang="en-US" sz="1250" dirty="0">
+                <a:solidFill>
+                  <a:srgbClr val="22303C"/>
+                </a:solidFill>
+                <a:latin typeface="Calibri" pitchFamily="34" charset="0"/>
+                <a:ea typeface="Calibri" pitchFamily="34" charset="-122"/>
+                <a:cs typeface="Calibri" pitchFamily="34" charset="-120"/>
+              </a:rPr>
+              <a:t>you spend your attention on what you want, not on what order to ask for it in — and the first thing you read when it finishes is the reason it stopped.</a:t>
+            </a:r>
+            <a:endParaRPr lang="en-US" sz="1250" dirty="0"/>
+          </a:p>
+        </p:txBody>
+      </p:sp>
+      <p:sp>
+        <p:nvSpPr>
+          <p:cNvPr id="38" name="Text 35"/>
+          <p:cNvSpPr txBox="1"/>
+          <p:nvPr/>
+        </p:nvSpPr>
+        <p:spPr>
+          <a:xfrm>
+            <a:off x="457200" y="6492240"/>
+            <a:ext cx="11277295" cy="228600"/>
+          </a:xfrm>
+          <a:prstGeom prst="rect">
+            <a:avLst/>
+          </a:prstGeom>
+          <a:noFill/>
+          <a:ln/>
+        </p:spPr>
+        <p:txBody>
+          <a:bodyPr wrap="square" lIns="0" tIns="0" rIns="0" bIns="0" rtlCol="0" anchor="t"/>
+          <a:lstStyle/>
+          <a:p>
+            <a:pPr indent="0" marL="0">
+              <a:buNone/>
+            </a:pPr>
+            <a:r>
+              <a:rPr lang="en-US" sz="1000" i="1" dirty="0">
+                <a:solidFill>
+                  <a:srgbClr val="5E6B75"/>
+                </a:solidFill>
+                <a:latin typeface="Calibri" pitchFamily="34" charset="0"/>
+                <a:ea typeface="Calibri" pitchFamily="34" charset="-122"/>
+                <a:cs typeface="Calibri" pitchFamily="34" charset="-120"/>
+              </a:rPr>
+              <a:t>mined from the campaign this deck ran · examples/agentic-small-molecule-binding @ b5a3b2d</a:t>
             </a:r>
             <a:endParaRPr lang="en-US" sz="1000" dirty="0"/>
           </a:p>
@@ -20331,7 +21152,7 @@
                 <a:ea typeface="Calibri" pitchFamily="34" charset="-122"/>
                 <a:cs typeface="Calibri" pitchFamily="34" charset="-120"/>
               </a:rPr>
-              <a:t>`mock-stabilize.yaml --model D` end to end in 2.8 s: 3 graphs composed, 1 refused, 2 admitted</a:t>
+              <a:t>`mock-stabilize.yaml --model D` end to end in 3.5 s: 3 graphs composed, 1 refused, 2 admitted</a:t>
             </a:r>
             <a:endParaRPr lang="en-US" sz="1150" dirty="0"/>
           </a:p>
@@ -20706,7 +21527,910 @@
                 <a:ea typeface="Cambria" pitchFamily="34" charset="-122"/>
                 <a:cs typeface="Cambria" pitchFamily="34" charset="-120"/>
               </a:rPr>
-              <a:t>Surface 5: one protocol, two transports</a:t>
+              <a:t>When it says no, it says what to change</a:t>
+            </a:r>
+            <a:endParaRPr lang="en-US" sz="2800" dirty="0"/>
+          </a:p>
+        </p:txBody>
+      </p:sp>
+      <p:sp>
+        <p:nvSpPr>
+          <p:cNvPr id="4" name="Shape 2"/>
+          <p:cNvSpPr/>
+          <p:nvPr/>
+        </p:nvSpPr>
+        <p:spPr>
+          <a:xfrm>
+            <a:off x="457200" y="1371600"/>
+            <a:ext cx="3637178" cy="2148840"/>
+          </a:xfrm>
+          <a:prstGeom prst="rect">
+            <a:avLst/>
+          </a:prstGeom>
+          <a:solidFill>
+            <a:srgbClr val="FFFFFF"/>
+          </a:solidFill>
+          <a:ln w="19050">
+            <a:solidFill>
+              <a:srgbClr val="D9731A"/>
+            </a:solidFill>
+            <a:prstDash val="solid"/>
+          </a:ln>
+        </p:spPr>
+      </p:sp>
+      <p:sp>
+        <p:nvSpPr>
+          <p:cNvPr id="5" name="Shape 3"/>
+          <p:cNvSpPr/>
+          <p:nvPr/>
+        </p:nvSpPr>
+        <p:spPr>
+          <a:xfrm>
+            <a:off x="585216" y="1517904"/>
+            <a:ext cx="3381146" cy="274320"/>
+          </a:xfrm>
+          <a:prstGeom prst="roundRect">
+            <a:avLst>
+              <a:gd name="adj" fmla="val 50000"/>
+            </a:avLst>
+          </a:prstGeom>
+          <a:solidFill>
+            <a:srgbClr val="D9731A"/>
+          </a:solidFill>
+          <a:ln w="12700">
+            <a:solidFill>
+              <a:srgbClr val="D9731A"/>
+            </a:solidFill>
+            <a:prstDash val="solid"/>
+          </a:ln>
+        </p:spPr>
+      </p:sp>
+      <p:sp>
+        <p:nvSpPr>
+          <p:cNvPr id="6" name="Text 4"/>
+          <p:cNvSpPr txBox="1"/>
+          <p:nvPr/>
+        </p:nvSpPr>
+        <p:spPr>
+          <a:xfrm>
+            <a:off x="585216" y="1517904"/>
+            <a:ext cx="3381146" cy="274320"/>
+          </a:xfrm>
+          <a:prstGeom prst="rect">
+            <a:avLst/>
+          </a:prstGeom>
+          <a:noFill/>
+          <a:ln/>
+        </p:spPr>
+        <p:txBody>
+          <a:bodyPr wrap="square" lIns="0" tIns="0" rIns="0" bIns="0" rtlCol="0" anchor="ctr"/>
+          <a:lstStyle/>
+          <a:p>
+            <a:pPr algn="ctr" indent="0" marL="0">
+              <a:buNone/>
+            </a:pPr>
+            <a:r>
+              <a:rPr lang="en-US" sz="1000" b="1" dirty="0">
+                <a:solidFill>
+                  <a:srgbClr val="FFFFFF"/>
+                </a:solidFill>
+                <a:latin typeface="Calibri" pitchFamily="34" charset="0"/>
+                <a:ea typeface="Calibri" pitchFamily="34" charset="-122"/>
+                <a:cs typeface="Calibri" pitchFamily="34" charset="-120"/>
+              </a:rPr>
+              <a:t>Before the queue</a:t>
+            </a:r>
+            <a:endParaRPr lang="en-US" sz="1000" dirty="0"/>
+          </a:p>
+        </p:txBody>
+      </p:sp>
+      <p:sp>
+        <p:nvSpPr>
+          <p:cNvPr id="7" name="Text 5"/>
+          <p:cNvSpPr txBox="1"/>
+          <p:nvPr/>
+        </p:nvSpPr>
+        <p:spPr>
+          <a:xfrm>
+            <a:off x="585216" y="1938528"/>
+            <a:ext cx="3381146" cy="237744"/>
+          </a:xfrm>
+          <a:prstGeom prst="rect">
+            <a:avLst/>
+          </a:prstGeom>
+          <a:noFill/>
+          <a:ln/>
+        </p:spPr>
+        <p:txBody>
+          <a:bodyPr wrap="square" lIns="0" tIns="0" rIns="0" bIns="0" rtlCol="0" anchor="t"/>
+          <a:lstStyle/>
+          <a:p>
+            <a:pPr indent="0" marL="0">
+              <a:buNone/>
+            </a:pPr>
+            <a:r>
+              <a:rPr lang="en-US" sz="1050" i="1" dirty="0">
+                <a:solidFill>
+                  <a:srgbClr val="5E6B75"/>
+                </a:solidFill>
+                <a:latin typeface="Calibri" pitchFamily="34" charset="0"/>
+                <a:ea typeface="Calibri" pitchFamily="34" charset="-122"/>
+                <a:cs typeface="Calibri" pitchFamily="34" charset="-120"/>
+              </a:rPr>
+              <a:t>preflight, on the login node</a:t>
+            </a:r>
+            <a:endParaRPr lang="en-US" sz="1050" dirty="0"/>
+          </a:p>
+        </p:txBody>
+      </p:sp>
+      <p:sp>
+        <p:nvSpPr>
+          <p:cNvPr id="8" name="Text 6"/>
+          <p:cNvSpPr txBox="1"/>
+          <p:nvPr/>
+        </p:nvSpPr>
+        <p:spPr>
+          <a:xfrm>
+            <a:off x="585216" y="2231136"/>
+            <a:ext cx="3381146" cy="1188720"/>
+          </a:xfrm>
+          <a:prstGeom prst="rect">
+            <a:avLst/>
+          </a:prstGeom>
+          <a:noFill/>
+          <a:ln/>
+        </p:spPr>
+        <p:txBody>
+          <a:bodyPr wrap="square" lIns="0" tIns="0" rIns="0" bIns="0" rtlCol="0" anchor="t"/>
+          <a:lstStyle/>
+          <a:p>
+            <a:pPr indent="0" marL="0">
+              <a:buNone/>
+            </a:pPr>
+            <a:r>
+              <a:rPr lang="en-US" sz="1100" dirty="0">
+                <a:solidFill>
+                  <a:srgbClr val="22303C"/>
+                </a:solidFill>
+                <a:latin typeface="Calibri" pitchFamily="34" charset="0"/>
+                <a:ea typeface="Calibri" pitchFamily="34" charset="-122"/>
+                <a:cs typeface="Calibri" pitchFamily="34" charset="-120"/>
+              </a:rPr>
+              <a:t>`$MPNN_DIR has no model_params/ — run its get_model_params.sh`. Seconds to fix, no allocation spent. A timeout reports as undetermined, never as a pass.</a:t>
+            </a:r>
+            <a:endParaRPr lang="en-US" sz="1100" dirty="0"/>
+          </a:p>
+        </p:txBody>
+      </p:sp>
+      <p:sp>
+        <p:nvSpPr>
+          <p:cNvPr id="9" name="Shape 7"/>
+          <p:cNvSpPr/>
+          <p:nvPr/>
+        </p:nvSpPr>
+        <p:spPr>
+          <a:xfrm>
+            <a:off x="4277258" y="1371600"/>
+            <a:ext cx="3637178" cy="2148840"/>
+          </a:xfrm>
+          <a:prstGeom prst="rect">
+            <a:avLst/>
+          </a:prstGeom>
+          <a:solidFill>
+            <a:srgbClr val="FFFFFF"/>
+          </a:solidFill>
+          <a:ln w="19050">
+            <a:solidFill>
+              <a:srgbClr val="2E7D5B"/>
+            </a:solidFill>
+            <a:prstDash val="solid"/>
+          </a:ln>
+        </p:spPr>
+      </p:sp>
+      <p:sp>
+        <p:nvSpPr>
+          <p:cNvPr id="10" name="Shape 8"/>
+          <p:cNvSpPr/>
+          <p:nvPr/>
+        </p:nvSpPr>
+        <p:spPr>
+          <a:xfrm>
+            <a:off x="4405274" y="1517904"/>
+            <a:ext cx="3381146" cy="274320"/>
+          </a:xfrm>
+          <a:prstGeom prst="roundRect">
+            <a:avLst>
+              <a:gd name="adj" fmla="val 50000"/>
+            </a:avLst>
+          </a:prstGeom>
+          <a:solidFill>
+            <a:srgbClr val="2E7D5B"/>
+          </a:solidFill>
+          <a:ln w="12700">
+            <a:solidFill>
+              <a:srgbClr val="2E7D5B"/>
+            </a:solidFill>
+            <a:prstDash val="solid"/>
+          </a:ln>
+        </p:spPr>
+      </p:sp>
+      <p:sp>
+        <p:nvSpPr>
+          <p:cNvPr id="11" name="Text 9"/>
+          <p:cNvSpPr txBox="1"/>
+          <p:nvPr/>
+        </p:nvSpPr>
+        <p:spPr>
+          <a:xfrm>
+            <a:off x="4405274" y="1517904"/>
+            <a:ext cx="3381146" cy="274320"/>
+          </a:xfrm>
+          <a:prstGeom prst="rect">
+            <a:avLst/>
+          </a:prstGeom>
+          <a:noFill/>
+          <a:ln/>
+        </p:spPr>
+        <p:txBody>
+          <a:bodyPr wrap="square" lIns="0" tIns="0" rIns="0" bIns="0" rtlCol="0" anchor="ctr"/>
+          <a:lstStyle/>
+          <a:p>
+            <a:pPr algn="ctr" indent="0" marL="0">
+              <a:buNone/>
+            </a:pPr>
+            <a:r>
+              <a:rPr lang="en-US" sz="1000" b="1" dirty="0">
+                <a:solidFill>
+                  <a:srgbClr val="FFFFFF"/>
+                </a:solidFill>
+                <a:latin typeface="Calibri" pitchFamily="34" charset="0"/>
+                <a:ea typeface="Calibri" pitchFamily="34" charset="-122"/>
+                <a:cs typeface="Calibri" pitchFamily="34" charset="-120"/>
+              </a:rPr>
+              <a:t>Before anything runs</a:t>
+            </a:r>
+            <a:endParaRPr lang="en-US" sz="1000" dirty="0"/>
+          </a:p>
+        </p:txBody>
+      </p:sp>
+      <p:sp>
+        <p:nvSpPr>
+          <p:cNvPr id="12" name="Text 10"/>
+          <p:cNvSpPr txBox="1"/>
+          <p:nvPr/>
+        </p:nvSpPr>
+        <p:spPr>
+          <a:xfrm>
+            <a:off x="4405274" y="1938528"/>
+            <a:ext cx="3381146" cy="237744"/>
+          </a:xfrm>
+          <a:prstGeom prst="rect">
+            <a:avLst/>
+          </a:prstGeom>
+          <a:noFill/>
+          <a:ln/>
+        </p:spPr>
+        <p:txBody>
+          <a:bodyPr wrap="square" lIns="0" tIns="0" rIns="0" bIns="0" rtlCol="0" anchor="t"/>
+          <a:lstStyle/>
+          <a:p>
+            <a:pPr indent="0" marL="0">
+              <a:buNone/>
+            </a:pPr>
+            <a:r>
+              <a:rPr lang="en-US" sz="1050" i="1" dirty="0">
+                <a:solidFill>
+                  <a:srgbClr val="5E6B75"/>
+                </a:solidFill>
+                <a:latin typeface="Calibri" pitchFamily="34" charset="0"/>
+                <a:ea typeface="Calibri" pitchFamily="34" charset="-122"/>
+                <a:cs typeface="Calibri" pitchFamily="34" charset="-120"/>
+              </a:rPr>
+              <a:t>five gates, then the interlock</a:t>
+            </a:r>
+            <a:endParaRPr lang="en-US" sz="1050" dirty="0"/>
+          </a:p>
+        </p:txBody>
+      </p:sp>
+      <p:sp>
+        <p:nvSpPr>
+          <p:cNvPr id="13" name="Text 11"/>
+          <p:cNvSpPr txBox="1"/>
+          <p:nvPr/>
+        </p:nvSpPr>
+        <p:spPr>
+          <a:xfrm>
+            <a:off x="4405274" y="2231136"/>
+            <a:ext cx="3381146" cy="1188720"/>
+          </a:xfrm>
+          <a:prstGeom prst="rect">
+            <a:avLst/>
+          </a:prstGeom>
+          <a:noFill/>
+          <a:ln/>
+        </p:spPr>
+        <p:txBody>
+          <a:bodyPr wrap="square" lIns="0" tIns="0" rIns="0" bIns="0" rtlCol="0" anchor="t"/>
+          <a:lstStyle/>
+          <a:p>
+            <a:pPr indent="0" marL="0">
+              <a:buNone/>
+            </a:pPr>
+            <a:r>
+              <a:rPr lang="en-US" sz="1100" dirty="0">
+                <a:solidFill>
+                  <a:srgbClr val="22303C"/>
+                </a:solidFill>
+                <a:latin typeface="Calibri" pitchFamily="34" charset="0"/>
+                <a:ea typeface="Calibri" pitchFamily="34" charset="-122"/>
+                <a:cs typeface="Calibri" pitchFamily="34" charset="-120"/>
+              </a:rPr>
+              <a:t>"provisional pattern capped at 10% of available cpu_hours (1.500 &gt; 1.200)" — marked transient, so the policy shrinks the request and tries again instead of stopping. Cost of the refusal: one composition, no GPU.</a:t>
+            </a:r>
+            <a:endParaRPr lang="en-US" sz="1100" dirty="0"/>
+          </a:p>
+        </p:txBody>
+      </p:sp>
+      <p:sp>
+        <p:nvSpPr>
+          <p:cNvPr id="14" name="Shape 12"/>
+          <p:cNvSpPr/>
+          <p:nvPr/>
+        </p:nvSpPr>
+        <p:spPr>
+          <a:xfrm>
+            <a:off x="8097317" y="1371600"/>
+            <a:ext cx="3637178" cy="2148840"/>
+          </a:xfrm>
+          <a:prstGeom prst="rect">
+            <a:avLst/>
+          </a:prstGeom>
+          <a:solidFill>
+            <a:srgbClr val="FFFFFF"/>
+          </a:solidFill>
+          <a:ln w="19050">
+            <a:solidFill>
+              <a:srgbClr val="7A4A8C"/>
+            </a:solidFill>
+            <a:prstDash val="solid"/>
+          </a:ln>
+        </p:spPr>
+      </p:sp>
+      <p:sp>
+        <p:nvSpPr>
+          <p:cNvPr id="15" name="Shape 13"/>
+          <p:cNvSpPr/>
+          <p:nvPr/>
+        </p:nvSpPr>
+        <p:spPr>
+          <a:xfrm>
+            <a:off x="8225333" y="1517904"/>
+            <a:ext cx="3381146" cy="274320"/>
+          </a:xfrm>
+          <a:prstGeom prst="roundRect">
+            <a:avLst>
+              <a:gd name="adj" fmla="val 50000"/>
+            </a:avLst>
+          </a:prstGeom>
+          <a:solidFill>
+            <a:srgbClr val="7A4A8C"/>
+          </a:solidFill>
+          <a:ln w="12700">
+            <a:solidFill>
+              <a:srgbClr val="7A4A8C"/>
+            </a:solidFill>
+            <a:prstDash val="solid"/>
+          </a:ln>
+        </p:spPr>
+      </p:sp>
+      <p:sp>
+        <p:nvSpPr>
+          <p:cNvPr id="16" name="Text 14"/>
+          <p:cNvSpPr txBox="1"/>
+          <p:nvPr/>
+        </p:nvSpPr>
+        <p:spPr>
+          <a:xfrm>
+            <a:off x="8225333" y="1517904"/>
+            <a:ext cx="3381146" cy="274320"/>
+          </a:xfrm>
+          <a:prstGeom prst="rect">
+            <a:avLst/>
+          </a:prstGeom>
+          <a:noFill/>
+          <a:ln/>
+        </p:spPr>
+        <p:txBody>
+          <a:bodyPr wrap="square" lIns="0" tIns="0" rIns="0" bIns="0" rtlCol="0" anchor="ctr"/>
+          <a:lstStyle/>
+          <a:p>
+            <a:pPr algn="ctr" indent="0" marL="0">
+              <a:buNone/>
+            </a:pPr>
+            <a:r>
+              <a:rPr lang="en-US" sz="1000" b="1" dirty="0">
+                <a:solidFill>
+                  <a:srgbClr val="FFFFFF"/>
+                </a:solidFill>
+                <a:latin typeface="Calibri" pitchFamily="34" charset="0"/>
+                <a:ea typeface="Calibri" pitchFamily="34" charset="-122"/>
+                <a:cs typeface="Calibri" pitchFamily="34" charset="-120"/>
+              </a:rPr>
+              <a:t>After a tool succeeds</a:t>
+            </a:r>
+            <a:endParaRPr lang="en-US" sz="1000" dirty="0"/>
+          </a:p>
+        </p:txBody>
+      </p:sp>
+      <p:sp>
+        <p:nvSpPr>
+          <p:cNvPr id="17" name="Text 15"/>
+          <p:cNvSpPr txBox="1"/>
+          <p:nvPr/>
+        </p:nvSpPr>
+        <p:spPr>
+          <a:xfrm>
+            <a:off x="8225333" y="1938528"/>
+            <a:ext cx="3381146" cy="237744"/>
+          </a:xfrm>
+          <a:prstGeom prst="rect">
+            <a:avLst/>
+          </a:prstGeom>
+          <a:noFill/>
+          <a:ln/>
+        </p:spPr>
+        <p:txBody>
+          <a:bodyPr wrap="square" lIns="0" tIns="0" rIns="0" bIns="0" rtlCol="0" anchor="t"/>
+          <a:lstStyle/>
+          <a:p>
+            <a:pPr indent="0" marL="0">
+              <a:buNone/>
+            </a:pPr>
+            <a:r>
+              <a:rPr lang="en-US" sz="1050" i="1" dirty="0">
+                <a:solidFill>
+                  <a:srgbClr val="5E6B75"/>
+                </a:solidFill>
+                <a:latin typeface="Calibri" pitchFamily="34" charset="0"/>
+                <a:ea typeface="Calibri" pitchFamily="34" charset="-122"/>
+                <a:cs typeface="Calibri" pitchFamily="34" charset="-120"/>
+              </a:rPr>
+              <a:t>QC, on the way out of the node</a:t>
+            </a:r>
+            <a:endParaRPr lang="en-US" sz="1050" dirty="0"/>
+          </a:p>
+        </p:txBody>
+      </p:sp>
+      <p:sp>
+        <p:nvSpPr>
+          <p:cNvPr id="18" name="Text 16"/>
+          <p:cNvSpPr txBox="1"/>
+          <p:nvPr/>
+        </p:nvSpPr>
+        <p:spPr>
+          <a:xfrm>
+            <a:off x="8225333" y="2231136"/>
+            <a:ext cx="3381146" cy="1188720"/>
+          </a:xfrm>
+          <a:prstGeom prst="rect">
+            <a:avLst/>
+          </a:prstGeom>
+          <a:noFill/>
+          <a:ln/>
+        </p:spPr>
+        <p:txBody>
+          <a:bodyPr wrap="square" lIns="0" tIns="0" rIns="0" bIns="0" rtlCol="0" anchor="t"/>
+          <a:lstStyle/>
+          <a:p>
+            <a:pPr indent="0" marL="0">
+              <a:buNone/>
+            </a:pPr>
+            <a:r>
+              <a:rPr lang="en-US" sz="1100" dirty="0">
+                <a:solidFill>
+                  <a:srgbClr val="22303C"/>
+                </a:solidFill>
+                <a:latin typeface="Calibri" pitchFamily="34" charset="0"/>
+                <a:ea typeface="Calibri" pitchFamily="34" charset="-122"/>
+                <a:cs typeface="Calibri" pitchFamily="34" charset="-120"/>
+              </a:rPr>
+              <a:t>A tool can exit 0, report 0.91 designability, and have produced a noodle. The integrity gate fails the node anyway, and a failed node never reaches the front.</a:t>
+            </a:r>
+            <a:endParaRPr lang="en-US" sz="1100" dirty="0"/>
+          </a:p>
+        </p:txBody>
+      </p:sp>
+      <p:sp>
+        <p:nvSpPr>
+          <p:cNvPr id="19" name="Shape 17"/>
+          <p:cNvSpPr/>
+          <p:nvPr/>
+        </p:nvSpPr>
+        <p:spPr>
+          <a:xfrm>
+            <a:off x="457200" y="3749040"/>
+            <a:ext cx="11277295" cy="1115568"/>
+          </a:xfrm>
+          <a:prstGeom prst="rect">
+            <a:avLst/>
+          </a:prstGeom>
+          <a:solidFill>
+            <a:srgbClr val="F9E0DD"/>
+          </a:solidFill>
+          <a:ln w="12700">
+            <a:solidFill>
+              <a:srgbClr val="F9E0DD"/>
+            </a:solidFill>
+            <a:prstDash val="solid"/>
+          </a:ln>
+        </p:spPr>
+      </p:sp>
+      <p:sp>
+        <p:nvSpPr>
+          <p:cNvPr id="20" name="Text 18"/>
+          <p:cNvSpPr txBox="1"/>
+          <p:nvPr/>
+        </p:nvSpPr>
+        <p:spPr>
+          <a:xfrm>
+            <a:off x="585216" y="3831336"/>
+            <a:ext cx="11021263" cy="274320"/>
+          </a:xfrm>
+          <a:prstGeom prst="rect">
+            <a:avLst/>
+          </a:prstGeom>
+          <a:noFill/>
+          <a:ln/>
+        </p:spPr>
+        <p:txBody>
+          <a:bodyPr wrap="square" lIns="0" tIns="0" rIns="0" bIns="0" rtlCol="0" anchor="t"/>
+          <a:lstStyle/>
+          <a:p>
+            <a:pPr indent="0" marL="0">
+              <a:buNone/>
+            </a:pPr>
+            <a:r>
+              <a:rPr lang="en-US" sz="1300" b="1" dirty="0">
+                <a:solidFill>
+                  <a:srgbClr val="C0392B"/>
+                </a:solidFill>
+                <a:latin typeface="Calibri" pitchFamily="34" charset="0"/>
+                <a:ea typeface="Calibri" pitchFamily="34" charset="-122"/>
+                <a:cs typeface="Calibri" pitchFamily="34" charset="-120"/>
+              </a:rPr>
+              <a:t>The one place it does NOT say no loudly — and it is the one that cost a real run</a:t>
+            </a:r>
+            <a:endParaRPr lang="en-US" sz="1300" dirty="0"/>
+          </a:p>
+        </p:txBody>
+      </p:sp>
+      <p:sp>
+        <p:nvSpPr>
+          <p:cNvPr id="21" name="Text 19"/>
+          <p:cNvSpPr txBox="1"/>
+          <p:nvPr/>
+        </p:nvSpPr>
+        <p:spPr>
+          <a:xfrm>
+            <a:off x="585216" y="4142232"/>
+            <a:ext cx="11021263" cy="640080"/>
+          </a:xfrm>
+          <a:prstGeom prst="rect">
+            <a:avLst/>
+          </a:prstGeom>
+          <a:noFill/>
+          <a:ln/>
+        </p:spPr>
+        <p:txBody>
+          <a:bodyPr wrap="square" lIns="0" tIns="0" rIns="0" bIns="0" rtlCol="0" anchor="t"/>
+          <a:lstStyle/>
+          <a:p>
+            <a:pPr marL="342900" indent="-342900">
+              <a:spcAft>
+                <a:spcPts val="400"/>
+              </a:spcAft>
+              <a:buSzPct val="100000"/>
+              <a:buChar char="•"/>
+            </a:pPr>
+            <a:r>
+              <a:rPr lang="en-US" sz="1050" dirty="0">
+                <a:solidFill>
+                  <a:srgbClr val="22303C"/>
+                </a:solidFill>
+                <a:latin typeface="Calibri" pitchFamily="34" charset="0"/>
+                <a:ea typeface="Calibri" pitchFamily="34" charset="-122"/>
+                <a:cs typeface="Calibri" pitchFamily="34" charset="-120"/>
+              </a:rPr>
+              <a:t>Cost-model figures sat 6–69× over measurement, so gate 5 summed past the cap and the policy quietly truncated `boltz_predict` off the end of the chain. The campaign ran. It just could not produce the objective it was launched for.</a:t>
+            </a:r>
+            <a:endParaRPr lang="en-US" sz="1050" dirty="0"/>
+          </a:p>
+          <a:p>
+            <a:pPr marL="342900" indent="-342900">
+              <a:spcAft>
+                <a:spcPts val="400"/>
+              </a:spcAft>
+              <a:buSzPct val="100000"/>
+              <a:buChar char="•"/>
+            </a:pPr>
+            <a:r>
+              <a:rPr lang="en-US" sz="1050" dirty="0">
+                <a:solidFill>
+                  <a:srgbClr val="22303C"/>
+                </a:solidFill>
+                <a:latin typeface="Calibri" pitchFamily="34" charset="0"/>
+                <a:ea typeface="Calibri" pitchFamily="34" charset="-122"/>
+                <a:cs typeface="Calibri" pitchFamily="34" charset="-120"/>
+              </a:rPr>
+              <a:t>It warns now — `_objectives_without_a_producer` — and a warning is not a gate. If you take one thing from this slide: a refusal you can read is a feature, and the dangerous refusals are the ones phrased as a smaller plan.</a:t>
+            </a:r>
+            <a:endParaRPr lang="en-US" sz="1050" dirty="0"/>
+          </a:p>
+        </p:txBody>
+      </p:sp>
+      <p:sp>
+        <p:nvSpPr>
+          <p:cNvPr id="22" name="Shape 20"/>
+          <p:cNvSpPr/>
+          <p:nvPr/>
+        </p:nvSpPr>
+        <p:spPr>
+          <a:xfrm>
+            <a:off x="457200" y="5120640"/>
+            <a:ext cx="11277295" cy="713232"/>
+          </a:xfrm>
+          <a:prstGeom prst="rect">
+            <a:avLst/>
+          </a:prstGeom>
+          <a:solidFill>
+            <a:srgbClr val="16222B"/>
+          </a:solidFill>
+          <a:ln w="12700">
+            <a:solidFill>
+              <a:srgbClr val="16222B"/>
+            </a:solidFill>
+            <a:prstDash val="solid"/>
+          </a:ln>
+        </p:spPr>
+      </p:sp>
+      <p:sp>
+        <p:nvSpPr>
+          <p:cNvPr id="23" name="Text 21"/>
+          <p:cNvSpPr txBox="1"/>
+          <p:nvPr/>
+        </p:nvSpPr>
+        <p:spPr>
+          <a:xfrm>
+            <a:off x="557784" y="5212080"/>
+            <a:ext cx="11076127" cy="530352"/>
+          </a:xfrm>
+          <a:prstGeom prst="rect">
+            <a:avLst/>
+          </a:prstGeom>
+          <a:noFill/>
+          <a:ln/>
+        </p:spPr>
+        <p:txBody>
+          <a:bodyPr wrap="square" lIns="0" tIns="0" rIns="0" bIns="0" rtlCol="0" anchor="t"/>
+          <a:lstStyle/>
+          <a:p>
+            <a:pPr indent="0" marL="0">
+              <a:lnSpc>
+                <a:spcPts val="1300"/>
+              </a:lnSpc>
+              <a:buNone/>
+            </a:pPr>
+            <a:r>
+              <a:rPr lang="en-US" sz="1040" dirty="0">
+                <a:solidFill>
+                  <a:srgbClr val="DCE5EC"/>
+                </a:solidFill>
+                <a:latin typeface="Consolas" pitchFamily="34" charset="0"/>
+                <a:ea typeface="Consolas" pitchFamily="34" charset="-122"/>
+                <a:cs typeface="Consolas" pitchFamily="34" charset="-120"/>
+              </a:rPr>
+              <a:t>interlock  provisional pattern capped at 10% of available cpu_hours (1.500 &gt; 1.200)</a:t>
+            </a:r>
+            <a:endParaRPr lang="en-US" sz="1040" dirty="0"/>
+          </a:p>
+          <a:p>
+            <a:pPr indent="0" marL="0">
+              <a:lnSpc>
+                <a:spcPts val="1300"/>
+              </a:lnSpc>
+              <a:buNone/>
+            </a:pPr>
+            <a:r>
+              <a:rPr lang="en-US" sz="1040" dirty="0">
+                <a:solidFill>
+                  <a:srgbClr val="DCE5EC"/>
+                </a:solidFill>
+                <a:latin typeface="Consolas" pitchFamily="34" charset="0"/>
+                <a:ea typeface="Consolas" pitchFamily="34" charset="-122"/>
+                <a:cs typeface="Consolas" pitchFamily="34" charset="-120"/>
+              </a:rPr>
+              <a:t>           transient=true  →  policy recomposed at 2 lineages, admitted</a:t>
+            </a:r>
+            <a:endParaRPr lang="en-US" sz="1040" dirty="0"/>
+          </a:p>
+        </p:txBody>
+      </p:sp>
+      <p:sp>
+        <p:nvSpPr>
+          <p:cNvPr id="24" name="Text 22"/>
+          <p:cNvSpPr txBox="1"/>
+          <p:nvPr/>
+        </p:nvSpPr>
+        <p:spPr>
+          <a:xfrm>
+            <a:off x="457200" y="5852160"/>
+            <a:ext cx="11277295" cy="182880"/>
+          </a:xfrm>
+          <a:prstGeom prst="rect">
+            <a:avLst/>
+          </a:prstGeom>
+          <a:noFill/>
+          <a:ln/>
+        </p:spPr>
+        <p:txBody>
+          <a:bodyPr wrap="square" lIns="0" tIns="0" rIns="0" bIns="0" rtlCol="0" anchor="t"/>
+          <a:lstStyle/>
+          <a:p>
+            <a:pPr algn="r" indent="0" marL="0">
+              <a:buNone/>
+            </a:pPr>
+            <a:r>
+              <a:rPr lang="en-US" sz="850" dirty="0">
+                <a:solidFill>
+                  <a:srgbClr val="5E6B75"/>
+                </a:solidFill>
+                <a:latin typeface="Consolas" pitchFamily="34" charset="0"/>
+                <a:ea typeface="Consolas" pitchFamily="34" charset="-122"/>
+                <a:cs typeface="Consolas" pitchFamily="34" charset="-120"/>
+              </a:rPr>
+              <a:t>runtime/executor.py:391 · run.json mock.refusals[0] · MINED</a:t>
+            </a:r>
+            <a:endParaRPr lang="en-US" sz="850" dirty="0"/>
+          </a:p>
+        </p:txBody>
+      </p:sp>
+      <p:sp>
+        <p:nvSpPr>
+          <p:cNvPr id="26" name="Text 23"/>
+          <p:cNvSpPr txBox="1"/>
+          <p:nvPr/>
+        </p:nvSpPr>
+        <p:spPr>
+          <a:xfrm>
+            <a:off x="457200" y="6492240"/>
+            <a:ext cx="11277295" cy="228600"/>
+          </a:xfrm>
+          <a:prstGeom prst="rect">
+            <a:avLst/>
+          </a:prstGeom>
+          <a:noFill/>
+          <a:ln/>
+        </p:spPr>
+        <p:txBody>
+          <a:bodyPr wrap="square" lIns="0" tIns="0" rIns="0" bIns="0" rtlCol="0" anchor="t"/>
+          <a:lstStyle/>
+          <a:p>
+            <a:pPr indent="0" marL="0">
+              <a:buNone/>
+            </a:pPr>
+            <a:r>
+              <a:rPr lang="en-US" sz="1000" i="1" dirty="0">
+                <a:solidFill>
+                  <a:srgbClr val="5E6B75"/>
+                </a:solidFill>
+                <a:latin typeface="Calibri" pitchFamily="34" charset="0"/>
+                <a:ea typeface="Calibri" pitchFamily="34" charset="-122"/>
+                <a:cs typeface="Calibri" pitchFamily="34" charset="-120"/>
+              </a:rPr>
+              <a:t>the dangerous refusal is the one phrased as a smaller plan</a:t>
+            </a:r>
+            <a:endParaRPr lang="en-US" sz="1000" dirty="0"/>
+          </a:p>
+        </p:txBody>
+      </p:sp>
+    </p:spTree>
+  </p:cSld>
+  <p:clrMapOvr>
+    <a:masterClrMapping/>
+  </p:clrMapOvr>
+</p:sld>
+</file>
+
+<file path=ppt/slides/slide21.xml><?xml version="1.0" encoding="utf-8"?>
+<p:sld xmlns:a="http://schemas.openxmlformats.org/drawingml/2006/main" xmlns:r="http://schemas.openxmlformats.org/officeDocument/2006/relationships" xmlns:p="http://schemas.openxmlformats.org/presentationml/2006/main">
+  <p:cSld name="Slide 21">
+    <p:spTree>
+      <p:nvGrpSpPr>
+        <p:cNvPr id="1" name=""/>
+        <p:cNvGrpSpPr/>
+        <p:nvPr/>
+      </p:nvGrpSpPr>
+      <p:grpSpPr>
+        <a:xfrm>
+          <a:off x="0" y="0"/>
+          <a:ext cx="0" cy="0"/>
+          <a:chOff x="0" y="0"/>
+          <a:chExt cx="0" cy="0"/>
+        </a:xfrm>
+      </p:grpSpPr>
+      <p:sp>
+        <p:nvSpPr>
+          <p:cNvPr id="2" name="Text 0"/>
+          <p:cNvSpPr txBox="1"/>
+          <p:nvPr/>
+        </p:nvSpPr>
+        <p:spPr>
+          <a:xfrm>
+            <a:off x="457200" y="320040"/>
+            <a:ext cx="8229600" cy="274320"/>
+          </a:xfrm>
+          <a:prstGeom prst="rect">
+            <a:avLst/>
+          </a:prstGeom>
+          <a:noFill/>
+          <a:ln/>
+        </p:spPr>
+        <p:txBody>
+          <a:bodyPr wrap="square" lIns="0" tIns="0" rIns="0" bIns="0" rtlCol="0" anchor="t"/>
+          <a:lstStyle/>
+          <a:p>
+            <a:pPr indent="0" marL="0">
+              <a:buNone/>
+            </a:pPr>
+            <a:r>
+              <a:rPr lang="en-US" sz="1200" b="1" spc="200" kern="0" dirty="0">
+                <a:solidFill>
+                  <a:srgbClr val="1E6470"/>
+                </a:solidFill>
+                <a:latin typeface="Calibri" pitchFamily="34" charset="0"/>
+                <a:ea typeface="Calibri" pitchFamily="34" charset="-122"/>
+                <a:cs typeface="Calibri" pitchFamily="34" charset="-120"/>
+              </a:rPr>
+              <a:t>ACT 3 · USABILITY · EVIDENCE FROM OUTSIDE THIS PACKAGE</a:t>
+            </a:r>
+            <a:endParaRPr lang="en-US" sz="1200" dirty="0"/>
+          </a:p>
+        </p:txBody>
+      </p:sp>
+      <p:sp>
+        <p:nvSpPr>
+          <p:cNvPr id="3" name="Text 1"/>
+          <p:cNvSpPr txBox="1"/>
+          <p:nvPr/>
+        </p:nvSpPr>
+        <p:spPr>
+          <a:xfrm>
+            <a:off x="457200" y="566928"/>
+            <a:ext cx="11277295" cy="731520"/>
+          </a:xfrm>
+          <a:prstGeom prst="rect">
+            <a:avLst/>
+          </a:prstGeom>
+          <a:noFill/>
+          <a:ln/>
+        </p:spPr>
+        <p:txBody>
+          <a:bodyPr wrap="square" lIns="0" tIns="0" rIns="0" bIns="0" rtlCol="0" anchor="t"/>
+          <a:lstStyle/>
+          <a:p>
+            <a:pPr indent="0" marL="0">
+              <a:buNone/>
+            </a:pPr>
+            <a:r>
+              <a:rPr lang="en-US" sz="2800" b="1" dirty="0">
+                <a:solidFill>
+                  <a:srgbClr val="16222B"/>
+                </a:solidFill>
+                <a:latin typeface="Cambria" pitchFamily="34" charset="0"/>
+                <a:ea typeface="Cambria" pitchFamily="34" charset="-122"/>
+                <a:cs typeface="Cambria" pitchFamily="34" charset="-120"/>
+              </a:rPr>
+              <a:t>Next door, a model drove the real toolkit for four hours</a:t>
             </a:r>
             <a:endParaRPr lang="en-US" sz="2800" dirty="0"/>
           </a:p>
@@ -20714,7 +22438,4242 @@
       </p:sp>
       <p:graphicFrame>
         <p:nvGraphicFramePr>
-          <p:cNvPr id="21" name="Table 0"/>
+          <p:cNvPr id="22" name="Table 0"/>
+          <p:cNvGraphicFramePr>
+            <a:graphicFrameLocks noGrp="1"/>
+          </p:cNvGraphicFramePr>
+          <p:nvPr>
+            <p:extLst>
+              <p:ext uri="{D42A27DB-BD31-4B8C-83A1-F6EECF244321}">
+                <p14:modId xmlns:p14="http://schemas.microsoft.com/office/powerpoint/2010/main" val="1579011935"/>
+              </p:ext>
+            </p:extLst>
+          </p:nvPr>
+        </p:nvGraphicFramePr>
+        <p:xfrm>
+          <a:off x="457200" y="1481328"/>
+          <a:ext cx="7315200" cy="914400"/>
+        </p:xfrm>
+        <a:graphic>
+          <a:graphicData uri="http://schemas.openxmlformats.org/drawingml/2006/table">
+            <a:tbl>
+              <a:tblPr/>
+              <a:tblGrid>
+                <a:gridCol w="3154680"/>
+                <a:gridCol w="1920240"/>
+                <a:gridCol w="2240280"/>
+              </a:tblGrid>
+              <a:tr h="274320">
+                <a:tc>
+                  <a:txBody>
+                    <a:bodyPr/>
+                    <a:lstStyle/>
+                    <a:p>
+                      <a:pPr indent="0" marL="0">
+                        <a:buNone/>
+                      </a:pPr>
+                      <a:r>
+                        <a:rPr lang="en-US" sz="1100" b="1" dirty="0">
+                          <a:solidFill>
+                            <a:srgbClr val="FFFFFF"/>
+                          </a:solidFill>
+                          <a:latin typeface="Calibri" pitchFamily="34" charset="0"/>
+                          <a:ea typeface="Calibri" pitchFamily="34" charset="-122"/>
+                          <a:cs typeface="Calibri" pitchFamily="34" charset="-120"/>
+                        </a:rPr>
+                        <a:t>4 h, 1 node, 4 pipelines, same inputs</a:t>
+                      </a:r>
+                      <a:endParaRPr lang="en-US" sz="1100" dirty="0">
+                        <a:latin typeface="Calibri" charset="0"/>
+                        <a:ea typeface="Calibri" charset="0"/>
+                        <a:cs typeface="Calibri" charset="0"/>
+                      </a:endParaRPr>
+                    </a:p>
+                  </a:txBody>
+                  <a:tcPr marL="64008" marR="64008" marT="64008" marB="64008" anchor="ctr">
+                    <a:lnL w="9525" cap="flat" cmpd="sng" algn="ctr">
+                      <a:solidFill>
+                        <a:srgbClr val="C9D1D8"/>
+                      </a:solidFill>
+                      <a:prstDash val="solid"/>
+                      <a:round/>
+                      <a:headEnd type="none" w="med" len="med"/>
+                      <a:tailEnd type="none" w="med" len="med"/>
+                    </a:lnL>
+                    <a:lnR w="9525" cap="flat" cmpd="sng" algn="ctr">
+                      <a:solidFill>
+                        <a:srgbClr val="C9D1D8"/>
+                      </a:solidFill>
+                      <a:prstDash val="solid"/>
+                      <a:round/>
+                      <a:headEnd type="none" w="med" len="med"/>
+                      <a:tailEnd type="none" w="med" len="med"/>
+                    </a:lnR>
+                    <a:lnT w="9525" cap="flat" cmpd="sng" algn="ctr">
+                      <a:solidFill>
+                        <a:srgbClr val="C9D1D8"/>
+                      </a:solidFill>
+                      <a:prstDash val="solid"/>
+                      <a:round/>
+                      <a:headEnd type="none" w="med" len="med"/>
+                      <a:tailEnd type="none" w="med" len="med"/>
+                    </a:lnT>
+                    <a:lnB w="9525" cap="flat" cmpd="sng" algn="ctr">
+                      <a:solidFill>
+                        <a:srgbClr val="C9D1D8"/>
+                      </a:solidFill>
+                      <a:prstDash val="solid"/>
+                      <a:round/>
+                      <a:headEnd type="none" w="med" len="med"/>
+                      <a:tailEnd type="none" w="med" len="med"/>
+                    </a:lnB>
+                    <a:solidFill>
+                      <a:srgbClr val="3B4E8C"/>
+                    </a:solidFill>
+                  </a:tcPr>
+                </a:tc>
+                <a:tc>
+                  <a:txBody>
+                    <a:bodyPr/>
+                    <a:lstStyle/>
+                    <a:p>
+                      <a:pPr indent="0" marL="0">
+                        <a:buNone/>
+                      </a:pPr>
+                      <a:r>
+                        <a:rPr lang="en-US" sz="1100" b="1" dirty="0">
+                          <a:solidFill>
+                            <a:srgbClr val="FFFFFF"/>
+                          </a:solidFill>
+                          <a:latin typeface="Calibri" pitchFamily="34" charset="0"/>
+                          <a:ea typeface="Calibri" pitchFamily="34" charset="-122"/>
+                          <a:cs typeface="Calibri" pitchFamily="34" charset="-120"/>
+                        </a:rPr>
+                        <a:t>state machine</a:t>
+                      </a:r>
+                      <a:endParaRPr lang="en-US" sz="1100" dirty="0">
+                        <a:latin typeface="Calibri" charset="0"/>
+                        <a:ea typeface="Calibri" charset="0"/>
+                        <a:cs typeface="Calibri" charset="0"/>
+                      </a:endParaRPr>
+                    </a:p>
+                  </a:txBody>
+                  <a:tcPr marL="64008" marR="64008" marT="64008" marB="64008" anchor="ctr">
+                    <a:lnL w="9525" cap="flat" cmpd="sng" algn="ctr">
+                      <a:solidFill>
+                        <a:srgbClr val="C9D1D8"/>
+                      </a:solidFill>
+                      <a:prstDash val="solid"/>
+                      <a:round/>
+                      <a:headEnd type="none" w="med" len="med"/>
+                      <a:tailEnd type="none" w="med" len="med"/>
+                    </a:lnL>
+                    <a:lnR w="9525" cap="flat" cmpd="sng" algn="ctr">
+                      <a:solidFill>
+                        <a:srgbClr val="C9D1D8"/>
+                      </a:solidFill>
+                      <a:prstDash val="solid"/>
+                      <a:round/>
+                      <a:headEnd type="none" w="med" len="med"/>
+                      <a:tailEnd type="none" w="med" len="med"/>
+                    </a:lnR>
+                    <a:lnT w="9525" cap="flat" cmpd="sng" algn="ctr">
+                      <a:solidFill>
+                        <a:srgbClr val="C9D1D8"/>
+                      </a:solidFill>
+                      <a:prstDash val="solid"/>
+                      <a:round/>
+                      <a:headEnd type="none" w="med" len="med"/>
+                      <a:tailEnd type="none" w="med" len="med"/>
+                    </a:lnT>
+                    <a:lnB w="9525" cap="flat" cmpd="sng" algn="ctr">
+                      <a:solidFill>
+                        <a:srgbClr val="C9D1D8"/>
+                      </a:solidFill>
+                      <a:prstDash val="solid"/>
+                      <a:round/>
+                      <a:headEnd type="none" w="med" len="med"/>
+                      <a:tailEnd type="none" w="med" len="med"/>
+                    </a:lnB>
+                    <a:solidFill>
+                      <a:srgbClr val="3B4E8C"/>
+                    </a:solidFill>
+                  </a:tcPr>
+                </a:tc>
+                <a:tc>
+                  <a:txBody>
+                    <a:bodyPr/>
+                    <a:lstStyle/>
+                    <a:p>
+                      <a:pPr indent="0" marL="0">
+                        <a:buNone/>
+                      </a:pPr>
+                      <a:r>
+                        <a:rPr lang="en-US" sz="1100" b="1" dirty="0">
+                          <a:solidFill>
+                            <a:srgbClr val="FFFFFF"/>
+                          </a:solidFill>
+                          <a:latin typeface="Calibri" pitchFamily="34" charset="0"/>
+                          <a:ea typeface="Calibri" pitchFamily="34" charset="-122"/>
+                          <a:cs typeface="Calibri" pitchFamily="34" charset="-120"/>
+                        </a:rPr>
+                        <a:t>an LLM, calling 8 tools</a:t>
+                      </a:r>
+                      <a:endParaRPr lang="en-US" sz="1100" dirty="0">
+                        <a:latin typeface="Calibri" charset="0"/>
+                        <a:ea typeface="Calibri" charset="0"/>
+                        <a:cs typeface="Calibri" charset="0"/>
+                      </a:endParaRPr>
+                    </a:p>
+                  </a:txBody>
+                  <a:tcPr marL="64008" marR="64008" marT="64008" marB="64008" anchor="ctr">
+                    <a:lnL w="9525" cap="flat" cmpd="sng" algn="ctr">
+                      <a:solidFill>
+                        <a:srgbClr val="C9D1D8"/>
+                      </a:solidFill>
+                      <a:prstDash val="solid"/>
+                      <a:round/>
+                      <a:headEnd type="none" w="med" len="med"/>
+                      <a:tailEnd type="none" w="med" len="med"/>
+                    </a:lnL>
+                    <a:lnR w="9525" cap="flat" cmpd="sng" algn="ctr">
+                      <a:solidFill>
+                        <a:srgbClr val="C9D1D8"/>
+                      </a:solidFill>
+                      <a:prstDash val="solid"/>
+                      <a:round/>
+                      <a:headEnd type="none" w="med" len="med"/>
+                      <a:tailEnd type="none" w="med" len="med"/>
+                    </a:lnR>
+                    <a:lnT w="9525" cap="flat" cmpd="sng" algn="ctr">
+                      <a:solidFill>
+                        <a:srgbClr val="C9D1D8"/>
+                      </a:solidFill>
+                      <a:prstDash val="solid"/>
+                      <a:round/>
+                      <a:headEnd type="none" w="med" len="med"/>
+                      <a:tailEnd type="none" w="med" len="med"/>
+                    </a:lnT>
+                    <a:lnB w="9525" cap="flat" cmpd="sng" algn="ctr">
+                      <a:solidFill>
+                        <a:srgbClr val="C9D1D8"/>
+                      </a:solidFill>
+                      <a:prstDash val="solid"/>
+                      <a:round/>
+                      <a:headEnd type="none" w="med" len="med"/>
+                      <a:tailEnd type="none" w="med" len="med"/>
+                    </a:lnB>
+                    <a:solidFill>
+                      <a:srgbClr val="3B4E8C"/>
+                    </a:solidFill>
+                  </a:tcPr>
+                </a:tc>
+              </a:tr>
+              <a:tr h="274320">
+                <a:tc>
+                  <a:txBody>
+                    <a:bodyPr/>
+                    <a:lstStyle/>
+                    <a:p>
+                      <a:pPr algn="l" indent="0" marL="0">
+                        <a:buNone/>
+                      </a:pPr>
+                      <a:r>
+                        <a:rPr lang="en-US" sz="1050" b="1" dirty="0">
+                          <a:solidFill>
+                            <a:srgbClr val="22303C"/>
+                          </a:solidFill>
+                          <a:latin typeface="Calibri" pitchFamily="34" charset="0"/>
+                          <a:ea typeface="Calibri" pitchFamily="34" charset="-122"/>
+                          <a:cs typeface="Calibri" pitchFamily="34" charset="-120"/>
+                        </a:rPr>
+                        <a:t>who decided what ran next</a:t>
+                      </a:r>
+                      <a:endParaRPr lang="en-US" sz="1050" dirty="0">
+                        <a:latin typeface="Calibri" charset="0"/>
+                        <a:ea typeface="Calibri" charset="0"/>
+                        <a:cs typeface="Calibri" charset="0"/>
+                      </a:endParaRPr>
+                    </a:p>
+                  </a:txBody>
+                  <a:tcPr marL="64008" marR="64008" marT="64008" marB="64008" anchor="ctr">
+                    <a:lnL w="9525" cap="flat" cmpd="sng" algn="ctr">
+                      <a:solidFill>
+                        <a:srgbClr val="C9D1D8"/>
+                      </a:solidFill>
+                      <a:prstDash val="solid"/>
+                      <a:round/>
+                      <a:headEnd type="none" w="med" len="med"/>
+                      <a:tailEnd type="none" w="med" len="med"/>
+                    </a:lnL>
+                    <a:lnR w="9525" cap="flat" cmpd="sng" algn="ctr">
+                      <a:solidFill>
+                        <a:srgbClr val="C9D1D8"/>
+                      </a:solidFill>
+                      <a:prstDash val="solid"/>
+                      <a:round/>
+                      <a:headEnd type="none" w="med" len="med"/>
+                      <a:tailEnd type="none" w="med" len="med"/>
+                    </a:lnR>
+                    <a:lnT w="9525" cap="flat" cmpd="sng" algn="ctr">
+                      <a:solidFill>
+                        <a:srgbClr val="C9D1D8"/>
+                      </a:solidFill>
+                      <a:prstDash val="solid"/>
+                      <a:round/>
+                      <a:headEnd type="none" w="med" len="med"/>
+                      <a:tailEnd type="none" w="med" len="med"/>
+                    </a:lnT>
+                    <a:lnB w="9525" cap="flat" cmpd="sng" algn="ctr">
+                      <a:solidFill>
+                        <a:srgbClr val="C9D1D8"/>
+                      </a:solidFill>
+                      <a:prstDash val="solid"/>
+                      <a:round/>
+                      <a:headEnd type="none" w="med" len="med"/>
+                      <a:tailEnd type="none" w="med" len="med"/>
+                    </a:lnB>
+                    <a:solidFill>
+                      <a:srgbClr val="EEF2F5"/>
+                    </a:solidFill>
+                  </a:tcPr>
+                </a:tc>
+                <a:tc>
+                  <a:txBody>
+                    <a:bodyPr/>
+                    <a:lstStyle/>
+                    <a:p>
+                      <a:pPr algn="l" indent="0" marL="0">
+                        <a:buNone/>
+                      </a:pPr>
+                      <a:r>
+                        <a:rPr lang="en-US" sz="950" dirty="0">
+                          <a:solidFill>
+                            <a:srgbClr val="5E6B75"/>
+                          </a:solidFill>
+                          <a:latin typeface="Consolas" pitchFamily="34" charset="0"/>
+                          <a:ea typeface="Consolas" pitchFamily="34" charset="-122"/>
+                          <a:cs typeface="Consolas" pitchFamily="34" charset="-120"/>
+                        </a:rPr>
+                        <a:t>adaptive_decision()</a:t>
+                      </a:r>
+                      <a:endParaRPr lang="en-US" sz="950" dirty="0">
+                        <a:latin typeface="Consolas" charset="0"/>
+                        <a:ea typeface="Consolas" charset="0"/>
+                        <a:cs typeface="Consolas" charset="0"/>
+                      </a:endParaRPr>
+                    </a:p>
+                  </a:txBody>
+                  <a:tcPr marL="64008" marR="64008" marT="64008" marB="64008" anchor="ctr">
+                    <a:lnL w="9525" cap="flat" cmpd="sng" algn="ctr">
+                      <a:solidFill>
+                        <a:srgbClr val="C9D1D8"/>
+                      </a:solidFill>
+                      <a:prstDash val="solid"/>
+                      <a:round/>
+                      <a:headEnd type="none" w="med" len="med"/>
+                      <a:tailEnd type="none" w="med" len="med"/>
+                    </a:lnL>
+                    <a:lnR w="9525" cap="flat" cmpd="sng" algn="ctr">
+                      <a:solidFill>
+                        <a:srgbClr val="C9D1D8"/>
+                      </a:solidFill>
+                      <a:prstDash val="solid"/>
+                      <a:round/>
+                      <a:headEnd type="none" w="med" len="med"/>
+                      <a:tailEnd type="none" w="med" len="med"/>
+                    </a:lnR>
+                    <a:lnT w="9525" cap="flat" cmpd="sng" algn="ctr">
+                      <a:solidFill>
+                        <a:srgbClr val="C9D1D8"/>
+                      </a:solidFill>
+                      <a:prstDash val="solid"/>
+                      <a:round/>
+                      <a:headEnd type="none" w="med" len="med"/>
+                      <a:tailEnd type="none" w="med" len="med"/>
+                    </a:lnT>
+                    <a:lnB w="9525" cap="flat" cmpd="sng" algn="ctr">
+                      <a:solidFill>
+                        <a:srgbClr val="C9D1D8"/>
+                      </a:solidFill>
+                      <a:prstDash val="solid"/>
+                      <a:round/>
+                      <a:headEnd type="none" w="med" len="med"/>
+                      <a:tailEnd type="none" w="med" len="med"/>
+                    </a:lnB>
+                    <a:solidFill>
+                      <a:srgbClr val="EEF2F5"/>
+                    </a:solidFill>
+                  </a:tcPr>
+                </a:tc>
+                <a:tc>
+                  <a:txBody>
+                    <a:bodyPr/>
+                    <a:lstStyle/>
+                    <a:p>
+                      <a:pPr algn="l" indent="0" marL="0">
+                        <a:buNone/>
+                      </a:pPr>
+                      <a:r>
+                        <a:rPr lang="en-US" sz="950" dirty="0">
+                          <a:solidFill>
+                            <a:srgbClr val="5E6B75"/>
+                          </a:solidFill>
+                          <a:latin typeface="Consolas" pitchFamily="34" charset="0"/>
+                          <a:ea typeface="Consolas" pitchFamily="34" charset="-122"/>
+                          <a:cs typeface="Consolas" pitchFamily="34" charset="-120"/>
+                        </a:rPr>
+                        <a:t>claude-sonnet-5-5</a:t>
+                      </a:r>
+                      <a:endParaRPr lang="en-US" sz="950" dirty="0">
+                        <a:latin typeface="Consolas" charset="0"/>
+                        <a:ea typeface="Consolas" charset="0"/>
+                        <a:cs typeface="Consolas" charset="0"/>
+                      </a:endParaRPr>
+                    </a:p>
+                  </a:txBody>
+                  <a:tcPr marL="64008" marR="64008" marT="64008" marB="64008" anchor="ctr">
+                    <a:lnL w="9525" cap="flat" cmpd="sng" algn="ctr">
+                      <a:solidFill>
+                        <a:srgbClr val="C9D1D8"/>
+                      </a:solidFill>
+                      <a:prstDash val="solid"/>
+                      <a:round/>
+                      <a:headEnd type="none" w="med" len="med"/>
+                      <a:tailEnd type="none" w="med" len="med"/>
+                    </a:lnL>
+                    <a:lnR w="9525" cap="flat" cmpd="sng" algn="ctr">
+                      <a:solidFill>
+                        <a:srgbClr val="C9D1D8"/>
+                      </a:solidFill>
+                      <a:prstDash val="solid"/>
+                      <a:round/>
+                      <a:headEnd type="none" w="med" len="med"/>
+                      <a:tailEnd type="none" w="med" len="med"/>
+                    </a:lnR>
+                    <a:lnT w="9525" cap="flat" cmpd="sng" algn="ctr">
+                      <a:solidFill>
+                        <a:srgbClr val="C9D1D8"/>
+                      </a:solidFill>
+                      <a:prstDash val="solid"/>
+                      <a:round/>
+                      <a:headEnd type="none" w="med" len="med"/>
+                      <a:tailEnd type="none" w="med" len="med"/>
+                    </a:lnT>
+                    <a:lnB w="9525" cap="flat" cmpd="sng" algn="ctr">
+                      <a:solidFill>
+                        <a:srgbClr val="C9D1D8"/>
+                      </a:solidFill>
+                      <a:prstDash val="solid"/>
+                      <a:round/>
+                      <a:headEnd type="none" w="med" len="med"/>
+                      <a:tailEnd type="none" w="med" len="med"/>
+                    </a:lnB>
+                    <a:solidFill>
+                      <a:srgbClr val="EEF2F5"/>
+                    </a:solidFill>
+                  </a:tcPr>
+                </a:tc>
+              </a:tr>
+              <a:tr h="274320">
+                <a:tc>
+                  <a:txBody>
+                    <a:bodyPr/>
+                    <a:lstStyle/>
+                    <a:p>
+                      <a:pPr algn="l" indent="0" marL="0">
+                        <a:buNone/>
+                      </a:pPr>
+                      <a:r>
+                        <a:rPr lang="en-US" sz="1050" b="1" dirty="0">
+                          <a:solidFill>
+                            <a:srgbClr val="22303C"/>
+                          </a:solidFill>
+                          <a:latin typeface="Calibri" pitchFamily="34" charset="0"/>
+                          <a:ea typeface="Calibri" pitchFamily="34" charset="-122"/>
+                          <a:cs typeface="Calibri" pitchFamily="34" charset="-120"/>
+                        </a:rPr>
+                        <a:t>rfd3 per pipeline-hour</a:t>
+                      </a:r>
+                      <a:endParaRPr lang="en-US" sz="1050" dirty="0">
+                        <a:latin typeface="Calibri" charset="0"/>
+                        <a:ea typeface="Calibri" charset="0"/>
+                        <a:cs typeface="Calibri" charset="0"/>
+                      </a:endParaRPr>
+                    </a:p>
+                  </a:txBody>
+                  <a:tcPr marL="64008" marR="64008" marT="64008" marB="64008" anchor="ctr">
+                    <a:lnL w="9525" cap="flat" cmpd="sng" algn="ctr">
+                      <a:solidFill>
+                        <a:srgbClr val="C9D1D8"/>
+                      </a:solidFill>
+                      <a:prstDash val="solid"/>
+                      <a:round/>
+                      <a:headEnd type="none" w="med" len="med"/>
+                      <a:tailEnd type="none" w="med" len="med"/>
+                    </a:lnL>
+                    <a:lnR w="9525" cap="flat" cmpd="sng" algn="ctr">
+                      <a:solidFill>
+                        <a:srgbClr val="C9D1D8"/>
+                      </a:solidFill>
+                      <a:prstDash val="solid"/>
+                      <a:round/>
+                      <a:headEnd type="none" w="med" len="med"/>
+                      <a:tailEnd type="none" w="med" len="med"/>
+                    </a:lnR>
+                    <a:lnT w="9525" cap="flat" cmpd="sng" algn="ctr">
+                      <a:solidFill>
+                        <a:srgbClr val="C9D1D8"/>
+                      </a:solidFill>
+                      <a:prstDash val="solid"/>
+                      <a:round/>
+                      <a:headEnd type="none" w="med" len="med"/>
+                      <a:tailEnd type="none" w="med" len="med"/>
+                    </a:lnT>
+                    <a:lnB w="9525" cap="flat" cmpd="sng" algn="ctr">
+                      <a:solidFill>
+                        <a:srgbClr val="C9D1D8"/>
+                      </a:solidFill>
+                      <a:prstDash val="solid"/>
+                      <a:round/>
+                      <a:headEnd type="none" w="med" len="med"/>
+                      <a:tailEnd type="none" w="med" len="med"/>
+                    </a:lnB>
+                    <a:solidFill>
+                      <a:srgbClr val="FFFFFF"/>
+                    </a:solidFill>
+                  </a:tcPr>
+                </a:tc>
+                <a:tc>
+                  <a:txBody>
+                    <a:bodyPr/>
+                    <a:lstStyle/>
+                    <a:p>
+                      <a:pPr algn="l" indent="0" marL="0">
+                        <a:buNone/>
+                      </a:pPr>
+                      <a:r>
+                        <a:rPr lang="en-US" sz="950" dirty="0">
+                          <a:solidFill>
+                            <a:srgbClr val="5E6B75"/>
+                          </a:solidFill>
+                          <a:latin typeface="Consolas" pitchFamily="34" charset="0"/>
+                          <a:ea typeface="Consolas" pitchFamily="34" charset="-122"/>
+                          <a:cs typeface="Consolas" pitchFamily="34" charset="-120"/>
+                        </a:rPr>
+                        <a:t>15.5</a:t>
+                      </a:r>
+                      <a:endParaRPr lang="en-US" sz="950" dirty="0">
+                        <a:latin typeface="Consolas" charset="0"/>
+                        <a:ea typeface="Consolas" charset="0"/>
+                        <a:cs typeface="Consolas" charset="0"/>
+                      </a:endParaRPr>
+                    </a:p>
+                  </a:txBody>
+                  <a:tcPr marL="64008" marR="64008" marT="64008" marB="64008" anchor="ctr">
+                    <a:lnL w="9525" cap="flat" cmpd="sng" algn="ctr">
+                      <a:solidFill>
+                        <a:srgbClr val="C9D1D8"/>
+                      </a:solidFill>
+                      <a:prstDash val="solid"/>
+                      <a:round/>
+                      <a:headEnd type="none" w="med" len="med"/>
+                      <a:tailEnd type="none" w="med" len="med"/>
+                    </a:lnL>
+                    <a:lnR w="9525" cap="flat" cmpd="sng" algn="ctr">
+                      <a:solidFill>
+                        <a:srgbClr val="C9D1D8"/>
+                      </a:solidFill>
+                      <a:prstDash val="solid"/>
+                      <a:round/>
+                      <a:headEnd type="none" w="med" len="med"/>
+                      <a:tailEnd type="none" w="med" len="med"/>
+                    </a:lnR>
+                    <a:lnT w="9525" cap="flat" cmpd="sng" algn="ctr">
+                      <a:solidFill>
+                        <a:srgbClr val="C9D1D8"/>
+                      </a:solidFill>
+                      <a:prstDash val="solid"/>
+                      <a:round/>
+                      <a:headEnd type="none" w="med" len="med"/>
+                      <a:tailEnd type="none" w="med" len="med"/>
+                    </a:lnT>
+                    <a:lnB w="9525" cap="flat" cmpd="sng" algn="ctr">
+                      <a:solidFill>
+                        <a:srgbClr val="C9D1D8"/>
+                      </a:solidFill>
+                      <a:prstDash val="solid"/>
+                      <a:round/>
+                      <a:headEnd type="none" w="med" len="med"/>
+                      <a:tailEnd type="none" w="med" len="med"/>
+                    </a:lnB>
+                    <a:solidFill>
+                      <a:srgbClr val="FFFFFF"/>
+                    </a:solidFill>
+                  </a:tcPr>
+                </a:tc>
+                <a:tc>
+                  <a:txBody>
+                    <a:bodyPr/>
+                    <a:lstStyle/>
+                    <a:p>
+                      <a:pPr algn="l" indent="0" marL="0">
+                        <a:buNone/>
+                      </a:pPr>
+                      <a:r>
+                        <a:rPr lang="en-US" sz="950" dirty="0">
+                          <a:solidFill>
+                            <a:srgbClr val="5E6B75"/>
+                          </a:solidFill>
+                          <a:latin typeface="Consolas" pitchFamily="34" charset="0"/>
+                          <a:ea typeface="Consolas" pitchFamily="34" charset="-122"/>
+                          <a:cs typeface="Consolas" pitchFamily="34" charset="-120"/>
+                        </a:rPr>
+                        <a:t>16.2</a:t>
+                      </a:r>
+                      <a:endParaRPr lang="en-US" sz="950" dirty="0">
+                        <a:latin typeface="Consolas" charset="0"/>
+                        <a:ea typeface="Consolas" charset="0"/>
+                        <a:cs typeface="Consolas" charset="0"/>
+                      </a:endParaRPr>
+                    </a:p>
+                  </a:txBody>
+                  <a:tcPr marL="64008" marR="64008" marT="64008" marB="64008" anchor="ctr">
+                    <a:lnL w="9525" cap="flat" cmpd="sng" algn="ctr">
+                      <a:solidFill>
+                        <a:srgbClr val="C9D1D8"/>
+                      </a:solidFill>
+                      <a:prstDash val="solid"/>
+                      <a:round/>
+                      <a:headEnd type="none" w="med" len="med"/>
+                      <a:tailEnd type="none" w="med" len="med"/>
+                    </a:lnL>
+                    <a:lnR w="9525" cap="flat" cmpd="sng" algn="ctr">
+                      <a:solidFill>
+                        <a:srgbClr val="C9D1D8"/>
+                      </a:solidFill>
+                      <a:prstDash val="solid"/>
+                      <a:round/>
+                      <a:headEnd type="none" w="med" len="med"/>
+                      <a:tailEnd type="none" w="med" len="med"/>
+                    </a:lnR>
+                    <a:lnT w="9525" cap="flat" cmpd="sng" algn="ctr">
+                      <a:solidFill>
+                        <a:srgbClr val="C9D1D8"/>
+                      </a:solidFill>
+                      <a:prstDash val="solid"/>
+                      <a:round/>
+                      <a:headEnd type="none" w="med" len="med"/>
+                      <a:tailEnd type="none" w="med" len="med"/>
+                    </a:lnT>
+                    <a:lnB w="9525" cap="flat" cmpd="sng" algn="ctr">
+                      <a:solidFill>
+                        <a:srgbClr val="C9D1D8"/>
+                      </a:solidFill>
+                      <a:prstDash val="solid"/>
+                      <a:round/>
+                      <a:headEnd type="none" w="med" len="med"/>
+                      <a:tailEnd type="none" w="med" len="med"/>
+                    </a:lnB>
+                    <a:solidFill>
+                      <a:srgbClr val="FFFFFF"/>
+                    </a:solidFill>
+                  </a:tcPr>
+                </a:tc>
+              </a:tr>
+              <a:tr h="274320">
+                <a:tc>
+                  <a:txBody>
+                    <a:bodyPr/>
+                    <a:lstStyle/>
+                    <a:p>
+                      <a:pPr algn="l" indent="0" marL="0">
+                        <a:buNone/>
+                      </a:pPr>
+                      <a:r>
+                        <a:rPr lang="en-US" sz="1050" b="1" dirty="0">
+                          <a:solidFill>
+                            <a:srgbClr val="22303C"/>
+                          </a:solidFill>
+                          <a:latin typeface="Calibri" pitchFamily="34" charset="0"/>
+                          <a:ea typeface="Calibri" pitchFamily="34" charset="-122"/>
+                          <a:cs typeface="Calibri" pitchFamily="34" charset="-120"/>
+                        </a:rPr>
+                        <a:t>distinct passing designs</a:t>
+                      </a:r>
+                      <a:endParaRPr lang="en-US" sz="1050" dirty="0">
+                        <a:latin typeface="Calibri" charset="0"/>
+                        <a:ea typeface="Calibri" charset="0"/>
+                        <a:cs typeface="Calibri" charset="0"/>
+                      </a:endParaRPr>
+                    </a:p>
+                  </a:txBody>
+                  <a:tcPr marL="64008" marR="64008" marT="64008" marB="64008" anchor="ctr">
+                    <a:lnL w="9525" cap="flat" cmpd="sng" algn="ctr">
+                      <a:solidFill>
+                        <a:srgbClr val="C9D1D8"/>
+                      </a:solidFill>
+                      <a:prstDash val="solid"/>
+                      <a:round/>
+                      <a:headEnd type="none" w="med" len="med"/>
+                      <a:tailEnd type="none" w="med" len="med"/>
+                    </a:lnL>
+                    <a:lnR w="9525" cap="flat" cmpd="sng" algn="ctr">
+                      <a:solidFill>
+                        <a:srgbClr val="C9D1D8"/>
+                      </a:solidFill>
+                      <a:prstDash val="solid"/>
+                      <a:round/>
+                      <a:headEnd type="none" w="med" len="med"/>
+                      <a:tailEnd type="none" w="med" len="med"/>
+                    </a:lnR>
+                    <a:lnT w="9525" cap="flat" cmpd="sng" algn="ctr">
+                      <a:solidFill>
+                        <a:srgbClr val="C9D1D8"/>
+                      </a:solidFill>
+                      <a:prstDash val="solid"/>
+                      <a:round/>
+                      <a:headEnd type="none" w="med" len="med"/>
+                      <a:tailEnd type="none" w="med" len="med"/>
+                    </a:lnT>
+                    <a:lnB w="9525" cap="flat" cmpd="sng" algn="ctr">
+                      <a:solidFill>
+                        <a:srgbClr val="C9D1D8"/>
+                      </a:solidFill>
+                      <a:prstDash val="solid"/>
+                      <a:round/>
+                      <a:headEnd type="none" w="med" len="med"/>
+                      <a:tailEnd type="none" w="med" len="med"/>
+                    </a:lnB>
+                    <a:solidFill>
+                      <a:srgbClr val="EEF2F5"/>
+                    </a:solidFill>
+                  </a:tcPr>
+                </a:tc>
+                <a:tc>
+                  <a:txBody>
+                    <a:bodyPr/>
+                    <a:lstStyle/>
+                    <a:p>
+                      <a:pPr algn="l" indent="0" marL="0">
+                        <a:buNone/>
+                      </a:pPr>
+                      <a:r>
+                        <a:rPr lang="en-US" sz="950" dirty="0">
+                          <a:solidFill>
+                            <a:srgbClr val="5E6B75"/>
+                          </a:solidFill>
+                          <a:latin typeface="Consolas" pitchFamily="34" charset="0"/>
+                          <a:ea typeface="Consolas" pitchFamily="34" charset="-122"/>
+                          <a:cs typeface="Consolas" pitchFamily="34" charset="-120"/>
+                        </a:rPr>
+                        <a:t>53</a:t>
+                      </a:r>
+                      <a:endParaRPr lang="en-US" sz="950" dirty="0">
+                        <a:latin typeface="Consolas" charset="0"/>
+                        <a:ea typeface="Consolas" charset="0"/>
+                        <a:cs typeface="Consolas" charset="0"/>
+                      </a:endParaRPr>
+                    </a:p>
+                  </a:txBody>
+                  <a:tcPr marL="64008" marR="64008" marT="64008" marB="64008" anchor="ctr">
+                    <a:lnL w="9525" cap="flat" cmpd="sng" algn="ctr">
+                      <a:solidFill>
+                        <a:srgbClr val="C9D1D8"/>
+                      </a:solidFill>
+                      <a:prstDash val="solid"/>
+                      <a:round/>
+                      <a:headEnd type="none" w="med" len="med"/>
+                      <a:tailEnd type="none" w="med" len="med"/>
+                    </a:lnL>
+                    <a:lnR w="9525" cap="flat" cmpd="sng" algn="ctr">
+                      <a:solidFill>
+                        <a:srgbClr val="C9D1D8"/>
+                      </a:solidFill>
+                      <a:prstDash val="solid"/>
+                      <a:round/>
+                      <a:headEnd type="none" w="med" len="med"/>
+                      <a:tailEnd type="none" w="med" len="med"/>
+                    </a:lnR>
+                    <a:lnT w="9525" cap="flat" cmpd="sng" algn="ctr">
+                      <a:solidFill>
+                        <a:srgbClr val="C9D1D8"/>
+                      </a:solidFill>
+                      <a:prstDash val="solid"/>
+                      <a:round/>
+                      <a:headEnd type="none" w="med" len="med"/>
+                      <a:tailEnd type="none" w="med" len="med"/>
+                    </a:lnT>
+                    <a:lnB w="9525" cap="flat" cmpd="sng" algn="ctr">
+                      <a:solidFill>
+                        <a:srgbClr val="C9D1D8"/>
+                      </a:solidFill>
+                      <a:prstDash val="solid"/>
+                      <a:round/>
+                      <a:headEnd type="none" w="med" len="med"/>
+                      <a:tailEnd type="none" w="med" len="med"/>
+                    </a:lnB>
+                    <a:solidFill>
+                      <a:srgbClr val="EEF2F5"/>
+                    </a:solidFill>
+                  </a:tcPr>
+                </a:tc>
+                <a:tc>
+                  <a:txBody>
+                    <a:bodyPr/>
+                    <a:lstStyle/>
+                    <a:p>
+                      <a:pPr algn="l" indent="0" marL="0">
+                        <a:buNone/>
+                      </a:pPr>
+                      <a:r>
+                        <a:rPr lang="en-US" sz="950" dirty="0">
+                          <a:solidFill>
+                            <a:srgbClr val="5E6B75"/>
+                          </a:solidFill>
+                          <a:latin typeface="Consolas" pitchFamily="34" charset="0"/>
+                          <a:ea typeface="Consolas" pitchFamily="34" charset="-122"/>
+                          <a:cs typeface="Consolas" pitchFamily="34" charset="-120"/>
+                        </a:rPr>
+                        <a:t>176</a:t>
+                      </a:r>
+                      <a:endParaRPr lang="en-US" sz="950" dirty="0">
+                        <a:latin typeface="Consolas" charset="0"/>
+                        <a:ea typeface="Consolas" charset="0"/>
+                        <a:cs typeface="Consolas" charset="0"/>
+                      </a:endParaRPr>
+                    </a:p>
+                  </a:txBody>
+                  <a:tcPr marL="64008" marR="64008" marT="64008" marB="64008" anchor="ctr">
+                    <a:lnL w="9525" cap="flat" cmpd="sng" algn="ctr">
+                      <a:solidFill>
+                        <a:srgbClr val="C9D1D8"/>
+                      </a:solidFill>
+                      <a:prstDash val="solid"/>
+                      <a:round/>
+                      <a:headEnd type="none" w="med" len="med"/>
+                      <a:tailEnd type="none" w="med" len="med"/>
+                    </a:lnL>
+                    <a:lnR w="9525" cap="flat" cmpd="sng" algn="ctr">
+                      <a:solidFill>
+                        <a:srgbClr val="C9D1D8"/>
+                      </a:solidFill>
+                      <a:prstDash val="solid"/>
+                      <a:round/>
+                      <a:headEnd type="none" w="med" len="med"/>
+                      <a:tailEnd type="none" w="med" len="med"/>
+                    </a:lnR>
+                    <a:lnT w="9525" cap="flat" cmpd="sng" algn="ctr">
+                      <a:solidFill>
+                        <a:srgbClr val="C9D1D8"/>
+                      </a:solidFill>
+                      <a:prstDash val="solid"/>
+                      <a:round/>
+                      <a:headEnd type="none" w="med" len="med"/>
+                      <a:tailEnd type="none" w="med" len="med"/>
+                    </a:lnT>
+                    <a:lnB w="9525" cap="flat" cmpd="sng" algn="ctr">
+                      <a:solidFill>
+                        <a:srgbClr val="C9D1D8"/>
+                      </a:solidFill>
+                      <a:prstDash val="solid"/>
+                      <a:round/>
+                      <a:headEnd type="none" w="med" len="med"/>
+                      <a:tailEnd type="none" w="med" len="med"/>
+                    </a:lnB>
+                    <a:solidFill>
+                      <a:srgbClr val="EEF2F5"/>
+                    </a:solidFill>
+                  </a:tcPr>
+                </a:tc>
+              </a:tr>
+              <a:tr h="274320">
+                <a:tc>
+                  <a:txBody>
+                    <a:bodyPr/>
+                    <a:lstStyle/>
+                    <a:p>
+                      <a:pPr algn="l" indent="0" marL="0">
+                        <a:buNone/>
+                      </a:pPr>
+                      <a:r>
+                        <a:rPr lang="en-US" sz="1050" b="1" dirty="0">
+                          <a:solidFill>
+                            <a:srgbClr val="22303C"/>
+                          </a:solidFill>
+                          <a:latin typeface="Calibri" pitchFamily="34" charset="0"/>
+                          <a:ea typeface="Calibri" pitchFamily="34" charset="-122"/>
+                          <a:cs typeface="Calibri" pitchFamily="34" charset="-120"/>
+                        </a:rPr>
+                        <a:t>GPU-hours per passing design</a:t>
+                      </a:r>
+                      <a:endParaRPr lang="en-US" sz="1050" dirty="0">
+                        <a:latin typeface="Calibri" charset="0"/>
+                        <a:ea typeface="Calibri" charset="0"/>
+                        <a:cs typeface="Calibri" charset="0"/>
+                      </a:endParaRPr>
+                    </a:p>
+                  </a:txBody>
+                  <a:tcPr marL="64008" marR="64008" marT="64008" marB="64008" anchor="ctr">
+                    <a:lnL w="9525" cap="flat" cmpd="sng" algn="ctr">
+                      <a:solidFill>
+                        <a:srgbClr val="C9D1D8"/>
+                      </a:solidFill>
+                      <a:prstDash val="solid"/>
+                      <a:round/>
+                      <a:headEnd type="none" w="med" len="med"/>
+                      <a:tailEnd type="none" w="med" len="med"/>
+                    </a:lnL>
+                    <a:lnR w="9525" cap="flat" cmpd="sng" algn="ctr">
+                      <a:solidFill>
+                        <a:srgbClr val="C9D1D8"/>
+                      </a:solidFill>
+                      <a:prstDash val="solid"/>
+                      <a:round/>
+                      <a:headEnd type="none" w="med" len="med"/>
+                      <a:tailEnd type="none" w="med" len="med"/>
+                    </a:lnR>
+                    <a:lnT w="9525" cap="flat" cmpd="sng" algn="ctr">
+                      <a:solidFill>
+                        <a:srgbClr val="C9D1D8"/>
+                      </a:solidFill>
+                      <a:prstDash val="solid"/>
+                      <a:round/>
+                      <a:headEnd type="none" w="med" len="med"/>
+                      <a:tailEnd type="none" w="med" len="med"/>
+                    </a:lnT>
+                    <a:lnB w="9525" cap="flat" cmpd="sng" algn="ctr">
+                      <a:solidFill>
+                        <a:srgbClr val="C9D1D8"/>
+                      </a:solidFill>
+                      <a:prstDash val="solid"/>
+                      <a:round/>
+                      <a:headEnd type="none" w="med" len="med"/>
+                      <a:tailEnd type="none" w="med" len="med"/>
+                    </a:lnB>
+                    <a:solidFill>
+                      <a:srgbClr val="FFFFFF"/>
+                    </a:solidFill>
+                  </a:tcPr>
+                </a:tc>
+                <a:tc>
+                  <a:txBody>
+                    <a:bodyPr/>
+                    <a:lstStyle/>
+                    <a:p>
+                      <a:pPr algn="l" indent="0" marL="0">
+                        <a:buNone/>
+                      </a:pPr>
+                      <a:r>
+                        <a:rPr lang="en-US" sz="950" dirty="0">
+                          <a:solidFill>
+                            <a:srgbClr val="5E6B75"/>
+                          </a:solidFill>
+                          <a:latin typeface="Consolas" pitchFamily="34" charset="0"/>
+                          <a:ea typeface="Consolas" pitchFamily="34" charset="-122"/>
+                          <a:cs typeface="Consolas" pitchFamily="34" charset="-120"/>
+                        </a:rPr>
+                        <a:t>0.302</a:t>
+                      </a:r>
+                      <a:endParaRPr lang="en-US" sz="950" dirty="0">
+                        <a:latin typeface="Consolas" charset="0"/>
+                        <a:ea typeface="Consolas" charset="0"/>
+                        <a:cs typeface="Consolas" charset="0"/>
+                      </a:endParaRPr>
+                    </a:p>
+                  </a:txBody>
+                  <a:tcPr marL="64008" marR="64008" marT="64008" marB="64008" anchor="ctr">
+                    <a:lnL w="9525" cap="flat" cmpd="sng" algn="ctr">
+                      <a:solidFill>
+                        <a:srgbClr val="C9D1D8"/>
+                      </a:solidFill>
+                      <a:prstDash val="solid"/>
+                      <a:round/>
+                      <a:headEnd type="none" w="med" len="med"/>
+                      <a:tailEnd type="none" w="med" len="med"/>
+                    </a:lnL>
+                    <a:lnR w="9525" cap="flat" cmpd="sng" algn="ctr">
+                      <a:solidFill>
+                        <a:srgbClr val="C9D1D8"/>
+                      </a:solidFill>
+                      <a:prstDash val="solid"/>
+                      <a:round/>
+                      <a:headEnd type="none" w="med" len="med"/>
+                      <a:tailEnd type="none" w="med" len="med"/>
+                    </a:lnR>
+                    <a:lnT w="9525" cap="flat" cmpd="sng" algn="ctr">
+                      <a:solidFill>
+                        <a:srgbClr val="C9D1D8"/>
+                      </a:solidFill>
+                      <a:prstDash val="solid"/>
+                      <a:round/>
+                      <a:headEnd type="none" w="med" len="med"/>
+                      <a:tailEnd type="none" w="med" len="med"/>
+                    </a:lnT>
+                    <a:lnB w="9525" cap="flat" cmpd="sng" algn="ctr">
+                      <a:solidFill>
+                        <a:srgbClr val="C9D1D8"/>
+                      </a:solidFill>
+                      <a:prstDash val="solid"/>
+                      <a:round/>
+                      <a:headEnd type="none" w="med" len="med"/>
+                      <a:tailEnd type="none" w="med" len="med"/>
+                    </a:lnB>
+                    <a:solidFill>
+                      <a:srgbClr val="FFFFFF"/>
+                    </a:solidFill>
+                  </a:tcPr>
+                </a:tc>
+                <a:tc>
+                  <a:txBody>
+                    <a:bodyPr/>
+                    <a:lstStyle/>
+                    <a:p>
+                      <a:pPr algn="l" indent="0" marL="0">
+                        <a:buNone/>
+                      </a:pPr>
+                      <a:r>
+                        <a:rPr lang="en-US" sz="950" dirty="0">
+                          <a:solidFill>
+                            <a:srgbClr val="5E6B75"/>
+                          </a:solidFill>
+                          <a:latin typeface="Consolas" pitchFamily="34" charset="0"/>
+                          <a:ea typeface="Consolas" pitchFamily="34" charset="-122"/>
+                          <a:cs typeface="Consolas" pitchFamily="34" charset="-120"/>
+                        </a:rPr>
+                        <a:t>0.083</a:t>
+                      </a:r>
+                      <a:endParaRPr lang="en-US" sz="950" dirty="0">
+                        <a:latin typeface="Consolas" charset="0"/>
+                        <a:ea typeface="Consolas" charset="0"/>
+                        <a:cs typeface="Consolas" charset="0"/>
+                      </a:endParaRPr>
+                    </a:p>
+                  </a:txBody>
+                  <a:tcPr marL="64008" marR="64008" marT="64008" marB="64008" anchor="ctr">
+                    <a:lnL w="9525" cap="flat" cmpd="sng" algn="ctr">
+                      <a:solidFill>
+                        <a:srgbClr val="C9D1D8"/>
+                      </a:solidFill>
+                      <a:prstDash val="solid"/>
+                      <a:round/>
+                      <a:headEnd type="none" w="med" len="med"/>
+                      <a:tailEnd type="none" w="med" len="med"/>
+                    </a:lnL>
+                    <a:lnR w="9525" cap="flat" cmpd="sng" algn="ctr">
+                      <a:solidFill>
+                        <a:srgbClr val="C9D1D8"/>
+                      </a:solidFill>
+                      <a:prstDash val="solid"/>
+                      <a:round/>
+                      <a:headEnd type="none" w="med" len="med"/>
+                      <a:tailEnd type="none" w="med" len="med"/>
+                    </a:lnR>
+                    <a:lnT w="9525" cap="flat" cmpd="sng" algn="ctr">
+                      <a:solidFill>
+                        <a:srgbClr val="C9D1D8"/>
+                      </a:solidFill>
+                      <a:prstDash val="solid"/>
+                      <a:round/>
+                      <a:headEnd type="none" w="med" len="med"/>
+                      <a:tailEnd type="none" w="med" len="med"/>
+                    </a:lnT>
+                    <a:lnB w="9525" cap="flat" cmpd="sng" algn="ctr">
+                      <a:solidFill>
+                        <a:srgbClr val="C9D1D8"/>
+                      </a:solidFill>
+                      <a:prstDash val="solid"/>
+                      <a:round/>
+                      <a:headEnd type="none" w="med" len="med"/>
+                      <a:tailEnd type="none" w="med" len="med"/>
+                    </a:lnB>
+                    <a:solidFill>
+                      <a:srgbClr val="FFFFFF"/>
+                    </a:solidFill>
+                  </a:tcPr>
+                </a:tc>
+              </a:tr>
+              <a:tr h="274320">
+                <a:tc>
+                  <a:txBody>
+                    <a:bodyPr/>
+                    <a:lstStyle/>
+                    <a:p>
+                      <a:pPr algn="l" indent="0" marL="0">
+                        <a:buNone/>
+                      </a:pPr>
+                      <a:r>
+                        <a:rPr lang="en-US" sz="1050" b="1" dirty="0">
+                          <a:solidFill>
+                            <a:srgbClr val="22303C"/>
+                          </a:solidFill>
+                          <a:latin typeface="Calibri" pitchFamily="34" charset="0"/>
+                          <a:ea typeface="Calibri" pitchFamily="34" charset="-122"/>
+                          <a:cs typeface="Calibri" pitchFamily="34" charset="-120"/>
+                        </a:rPr>
+                        <a:t>backbones that yielded a fold</a:t>
+                      </a:r>
+                      <a:endParaRPr lang="en-US" sz="1050" dirty="0">
+                        <a:latin typeface="Calibri" charset="0"/>
+                        <a:ea typeface="Calibri" charset="0"/>
+                        <a:cs typeface="Calibri" charset="0"/>
+                      </a:endParaRPr>
+                    </a:p>
+                  </a:txBody>
+                  <a:tcPr marL="64008" marR="64008" marT="64008" marB="64008" anchor="ctr">
+                    <a:lnL w="9525" cap="flat" cmpd="sng" algn="ctr">
+                      <a:solidFill>
+                        <a:srgbClr val="C9D1D8"/>
+                      </a:solidFill>
+                      <a:prstDash val="solid"/>
+                      <a:round/>
+                      <a:headEnd type="none" w="med" len="med"/>
+                      <a:tailEnd type="none" w="med" len="med"/>
+                    </a:lnL>
+                    <a:lnR w="9525" cap="flat" cmpd="sng" algn="ctr">
+                      <a:solidFill>
+                        <a:srgbClr val="C9D1D8"/>
+                      </a:solidFill>
+                      <a:prstDash val="solid"/>
+                      <a:round/>
+                      <a:headEnd type="none" w="med" len="med"/>
+                      <a:tailEnd type="none" w="med" len="med"/>
+                    </a:lnR>
+                    <a:lnT w="9525" cap="flat" cmpd="sng" algn="ctr">
+                      <a:solidFill>
+                        <a:srgbClr val="C9D1D8"/>
+                      </a:solidFill>
+                      <a:prstDash val="solid"/>
+                      <a:round/>
+                      <a:headEnd type="none" w="med" len="med"/>
+                      <a:tailEnd type="none" w="med" len="med"/>
+                    </a:lnT>
+                    <a:lnB w="9525" cap="flat" cmpd="sng" algn="ctr">
+                      <a:solidFill>
+                        <a:srgbClr val="C9D1D8"/>
+                      </a:solidFill>
+                      <a:prstDash val="solid"/>
+                      <a:round/>
+                      <a:headEnd type="none" w="med" len="med"/>
+                      <a:tailEnd type="none" w="med" len="med"/>
+                    </a:lnB>
+                    <a:solidFill>
+                      <a:srgbClr val="EEF2F5"/>
+                    </a:solidFill>
+                  </a:tcPr>
+                </a:tc>
+                <a:tc>
+                  <a:txBody>
+                    <a:bodyPr/>
+                    <a:lstStyle/>
+                    <a:p>
+                      <a:pPr algn="l" indent="0" marL="0">
+                        <a:buNone/>
+                      </a:pPr>
+                      <a:r>
+                        <a:rPr lang="en-US" sz="950" dirty="0">
+                          <a:solidFill>
+                            <a:srgbClr val="5E6B75"/>
+                          </a:solidFill>
+                          <a:latin typeface="Consolas" pitchFamily="34" charset="0"/>
+                          <a:ea typeface="Consolas" pitchFamily="34" charset="-122"/>
+                          <a:cs typeface="Consolas" pitchFamily="34" charset="-120"/>
+                        </a:rPr>
+                        <a:t>21%</a:t>
+                      </a:r>
+                      <a:endParaRPr lang="en-US" sz="950" dirty="0">
+                        <a:latin typeface="Consolas" charset="0"/>
+                        <a:ea typeface="Consolas" charset="0"/>
+                        <a:cs typeface="Consolas" charset="0"/>
+                      </a:endParaRPr>
+                    </a:p>
+                  </a:txBody>
+                  <a:tcPr marL="64008" marR="64008" marT="64008" marB="64008" anchor="ctr">
+                    <a:lnL w="9525" cap="flat" cmpd="sng" algn="ctr">
+                      <a:solidFill>
+                        <a:srgbClr val="C9D1D8"/>
+                      </a:solidFill>
+                      <a:prstDash val="solid"/>
+                      <a:round/>
+                      <a:headEnd type="none" w="med" len="med"/>
+                      <a:tailEnd type="none" w="med" len="med"/>
+                    </a:lnL>
+                    <a:lnR w="9525" cap="flat" cmpd="sng" algn="ctr">
+                      <a:solidFill>
+                        <a:srgbClr val="C9D1D8"/>
+                      </a:solidFill>
+                      <a:prstDash val="solid"/>
+                      <a:round/>
+                      <a:headEnd type="none" w="med" len="med"/>
+                      <a:tailEnd type="none" w="med" len="med"/>
+                    </a:lnR>
+                    <a:lnT w="9525" cap="flat" cmpd="sng" algn="ctr">
+                      <a:solidFill>
+                        <a:srgbClr val="C9D1D8"/>
+                      </a:solidFill>
+                      <a:prstDash val="solid"/>
+                      <a:round/>
+                      <a:headEnd type="none" w="med" len="med"/>
+                      <a:tailEnd type="none" w="med" len="med"/>
+                    </a:lnT>
+                    <a:lnB w="9525" cap="flat" cmpd="sng" algn="ctr">
+                      <a:solidFill>
+                        <a:srgbClr val="C9D1D8"/>
+                      </a:solidFill>
+                      <a:prstDash val="solid"/>
+                      <a:round/>
+                      <a:headEnd type="none" w="med" len="med"/>
+                      <a:tailEnd type="none" w="med" len="med"/>
+                    </a:lnB>
+                    <a:solidFill>
+                      <a:srgbClr val="EEF2F5"/>
+                    </a:solidFill>
+                  </a:tcPr>
+                </a:tc>
+                <a:tc>
+                  <a:txBody>
+                    <a:bodyPr/>
+                    <a:lstStyle/>
+                    <a:p>
+                      <a:pPr algn="l" indent="0" marL="0">
+                        <a:buNone/>
+                      </a:pPr>
+                      <a:r>
+                        <a:rPr lang="en-US" sz="950" dirty="0">
+                          <a:solidFill>
+                            <a:srgbClr val="5E6B75"/>
+                          </a:solidFill>
+                          <a:latin typeface="Consolas" pitchFamily="34" charset="0"/>
+                          <a:ea typeface="Consolas" pitchFamily="34" charset="-122"/>
+                          <a:cs typeface="Consolas" pitchFamily="34" charset="-120"/>
+                        </a:rPr>
+                        <a:t>74%</a:t>
+                      </a:r>
+                      <a:endParaRPr lang="en-US" sz="950" dirty="0">
+                        <a:latin typeface="Consolas" charset="0"/>
+                        <a:ea typeface="Consolas" charset="0"/>
+                        <a:cs typeface="Consolas" charset="0"/>
+                      </a:endParaRPr>
+                    </a:p>
+                  </a:txBody>
+                  <a:tcPr marL="64008" marR="64008" marT="64008" marB="64008" anchor="ctr">
+                    <a:lnL w="9525" cap="flat" cmpd="sng" algn="ctr">
+                      <a:solidFill>
+                        <a:srgbClr val="C9D1D8"/>
+                      </a:solidFill>
+                      <a:prstDash val="solid"/>
+                      <a:round/>
+                      <a:headEnd type="none" w="med" len="med"/>
+                      <a:tailEnd type="none" w="med" len="med"/>
+                    </a:lnL>
+                    <a:lnR w="9525" cap="flat" cmpd="sng" algn="ctr">
+                      <a:solidFill>
+                        <a:srgbClr val="C9D1D8"/>
+                      </a:solidFill>
+                      <a:prstDash val="solid"/>
+                      <a:round/>
+                      <a:headEnd type="none" w="med" len="med"/>
+                      <a:tailEnd type="none" w="med" len="med"/>
+                    </a:lnR>
+                    <a:lnT w="9525" cap="flat" cmpd="sng" algn="ctr">
+                      <a:solidFill>
+                        <a:srgbClr val="C9D1D8"/>
+                      </a:solidFill>
+                      <a:prstDash val="solid"/>
+                      <a:round/>
+                      <a:headEnd type="none" w="med" len="med"/>
+                      <a:tailEnd type="none" w="med" len="med"/>
+                    </a:lnT>
+                    <a:lnB w="9525" cap="flat" cmpd="sng" algn="ctr">
+                      <a:solidFill>
+                        <a:srgbClr val="C9D1D8"/>
+                      </a:solidFill>
+                      <a:prstDash val="solid"/>
+                      <a:round/>
+                      <a:headEnd type="none" w="med" len="med"/>
+                      <a:tailEnd type="none" w="med" len="med"/>
+                    </a:lnB>
+                    <a:solidFill>
+                      <a:srgbClr val="EEF2F5"/>
+                    </a:solidFill>
+                  </a:tcPr>
+                </a:tc>
+              </a:tr>
+              <a:tr h="274320">
+                <a:tc>
+                  <a:txBody>
+                    <a:bodyPr/>
+                    <a:lstStyle/>
+                    <a:p>
+                      <a:pPr algn="l" indent="0" marL="0">
+                        <a:buNone/>
+                      </a:pPr>
+                      <a:r>
+                        <a:rPr lang="en-US" sz="1050" b="1" dirty="0">
+                          <a:solidFill>
+                            <a:srgbClr val="22303C"/>
+                          </a:solidFill>
+                          <a:latin typeface="Calibri" pitchFamily="34" charset="0"/>
+                          <a:ea typeface="Calibri" pitchFamily="34" charset="-122"/>
+                          <a:cs typeface="Calibri" pitchFamily="34" charset="-120"/>
+                        </a:rPr>
+                        <a:t>fastrelax pass rate</a:t>
+                      </a:r>
+                      <a:endParaRPr lang="en-US" sz="1050" dirty="0">
+                        <a:latin typeface="Calibri" charset="0"/>
+                        <a:ea typeface="Calibri" charset="0"/>
+                        <a:cs typeface="Calibri" charset="0"/>
+                      </a:endParaRPr>
+                    </a:p>
+                  </a:txBody>
+                  <a:tcPr marL="64008" marR="64008" marT="64008" marB="64008" anchor="ctr">
+                    <a:lnL w="9525" cap="flat" cmpd="sng" algn="ctr">
+                      <a:solidFill>
+                        <a:srgbClr val="C9D1D8"/>
+                      </a:solidFill>
+                      <a:prstDash val="solid"/>
+                      <a:round/>
+                      <a:headEnd type="none" w="med" len="med"/>
+                      <a:tailEnd type="none" w="med" len="med"/>
+                    </a:lnL>
+                    <a:lnR w="9525" cap="flat" cmpd="sng" algn="ctr">
+                      <a:solidFill>
+                        <a:srgbClr val="C9D1D8"/>
+                      </a:solidFill>
+                      <a:prstDash val="solid"/>
+                      <a:round/>
+                      <a:headEnd type="none" w="med" len="med"/>
+                      <a:tailEnd type="none" w="med" len="med"/>
+                    </a:lnR>
+                    <a:lnT w="9525" cap="flat" cmpd="sng" algn="ctr">
+                      <a:solidFill>
+                        <a:srgbClr val="C9D1D8"/>
+                      </a:solidFill>
+                      <a:prstDash val="solid"/>
+                      <a:round/>
+                      <a:headEnd type="none" w="med" len="med"/>
+                      <a:tailEnd type="none" w="med" len="med"/>
+                    </a:lnT>
+                    <a:lnB w="9525" cap="flat" cmpd="sng" algn="ctr">
+                      <a:solidFill>
+                        <a:srgbClr val="C9D1D8"/>
+                      </a:solidFill>
+                      <a:prstDash val="solid"/>
+                      <a:round/>
+                      <a:headEnd type="none" w="med" len="med"/>
+                      <a:tailEnd type="none" w="med" len="med"/>
+                    </a:lnB>
+                    <a:solidFill>
+                      <a:srgbClr val="FFFFFF"/>
+                    </a:solidFill>
+                  </a:tcPr>
+                </a:tc>
+                <a:tc>
+                  <a:txBody>
+                    <a:bodyPr/>
+                    <a:lstStyle/>
+                    <a:p>
+                      <a:pPr algn="l" indent="0" marL="0">
+                        <a:buNone/>
+                      </a:pPr>
+                      <a:r>
+                        <a:rPr lang="en-US" sz="950" dirty="0">
+                          <a:solidFill>
+                            <a:srgbClr val="5E6B75"/>
+                          </a:solidFill>
+                          <a:latin typeface="Consolas" pitchFamily="34" charset="0"/>
+                          <a:ea typeface="Consolas" pitchFamily="34" charset="-122"/>
+                          <a:cs typeface="Consolas" pitchFamily="34" charset="-120"/>
+                        </a:rPr>
+                        <a:t>49%</a:t>
+                      </a:r>
+                      <a:endParaRPr lang="en-US" sz="950" dirty="0">
+                        <a:latin typeface="Consolas" charset="0"/>
+                        <a:ea typeface="Consolas" charset="0"/>
+                        <a:cs typeface="Consolas" charset="0"/>
+                      </a:endParaRPr>
+                    </a:p>
+                  </a:txBody>
+                  <a:tcPr marL="64008" marR="64008" marT="64008" marB="64008" anchor="ctr">
+                    <a:lnL w="9525" cap="flat" cmpd="sng" algn="ctr">
+                      <a:solidFill>
+                        <a:srgbClr val="C9D1D8"/>
+                      </a:solidFill>
+                      <a:prstDash val="solid"/>
+                      <a:round/>
+                      <a:headEnd type="none" w="med" len="med"/>
+                      <a:tailEnd type="none" w="med" len="med"/>
+                    </a:lnL>
+                    <a:lnR w="9525" cap="flat" cmpd="sng" algn="ctr">
+                      <a:solidFill>
+                        <a:srgbClr val="C9D1D8"/>
+                      </a:solidFill>
+                      <a:prstDash val="solid"/>
+                      <a:round/>
+                      <a:headEnd type="none" w="med" len="med"/>
+                      <a:tailEnd type="none" w="med" len="med"/>
+                    </a:lnR>
+                    <a:lnT w="9525" cap="flat" cmpd="sng" algn="ctr">
+                      <a:solidFill>
+                        <a:srgbClr val="C9D1D8"/>
+                      </a:solidFill>
+                      <a:prstDash val="solid"/>
+                      <a:round/>
+                      <a:headEnd type="none" w="med" len="med"/>
+                      <a:tailEnd type="none" w="med" len="med"/>
+                    </a:lnT>
+                    <a:lnB w="9525" cap="flat" cmpd="sng" algn="ctr">
+                      <a:solidFill>
+                        <a:srgbClr val="C9D1D8"/>
+                      </a:solidFill>
+                      <a:prstDash val="solid"/>
+                      <a:round/>
+                      <a:headEnd type="none" w="med" len="med"/>
+                      <a:tailEnd type="none" w="med" len="med"/>
+                    </a:lnB>
+                    <a:solidFill>
+                      <a:srgbClr val="FFFFFF"/>
+                    </a:solidFill>
+                  </a:tcPr>
+                </a:tc>
+                <a:tc>
+                  <a:txBody>
+                    <a:bodyPr/>
+                    <a:lstStyle/>
+                    <a:p>
+                      <a:pPr algn="l" indent="0" marL="0">
+                        <a:buNone/>
+                      </a:pPr>
+                      <a:r>
+                        <a:rPr lang="en-US" sz="950" dirty="0">
+                          <a:solidFill>
+                            <a:srgbClr val="5E6B75"/>
+                          </a:solidFill>
+                          <a:latin typeface="Consolas" pitchFamily="34" charset="0"/>
+                          <a:ea typeface="Consolas" pitchFamily="34" charset="-122"/>
+                          <a:cs typeface="Consolas" pitchFamily="34" charset="-120"/>
+                        </a:rPr>
+                        <a:t>88%</a:t>
+                      </a:r>
+                      <a:endParaRPr lang="en-US" sz="950" dirty="0">
+                        <a:latin typeface="Consolas" charset="0"/>
+                        <a:ea typeface="Consolas" charset="0"/>
+                        <a:cs typeface="Consolas" charset="0"/>
+                      </a:endParaRPr>
+                    </a:p>
+                  </a:txBody>
+                  <a:tcPr marL="64008" marR="64008" marT="64008" marB="64008" anchor="ctr">
+                    <a:lnL w="9525" cap="flat" cmpd="sng" algn="ctr">
+                      <a:solidFill>
+                        <a:srgbClr val="C9D1D8"/>
+                      </a:solidFill>
+                      <a:prstDash val="solid"/>
+                      <a:round/>
+                      <a:headEnd type="none" w="med" len="med"/>
+                      <a:tailEnd type="none" w="med" len="med"/>
+                    </a:lnL>
+                    <a:lnR w="9525" cap="flat" cmpd="sng" algn="ctr">
+                      <a:solidFill>
+                        <a:srgbClr val="C9D1D8"/>
+                      </a:solidFill>
+                      <a:prstDash val="solid"/>
+                      <a:round/>
+                      <a:headEnd type="none" w="med" len="med"/>
+                      <a:tailEnd type="none" w="med" len="med"/>
+                    </a:lnR>
+                    <a:lnT w="9525" cap="flat" cmpd="sng" algn="ctr">
+                      <a:solidFill>
+                        <a:srgbClr val="C9D1D8"/>
+                      </a:solidFill>
+                      <a:prstDash val="solid"/>
+                      <a:round/>
+                      <a:headEnd type="none" w="med" len="med"/>
+                      <a:tailEnd type="none" w="med" len="med"/>
+                    </a:lnT>
+                    <a:lnB w="9525" cap="flat" cmpd="sng" algn="ctr">
+                      <a:solidFill>
+                        <a:srgbClr val="C9D1D8"/>
+                      </a:solidFill>
+                      <a:prstDash val="solid"/>
+                      <a:round/>
+                      <a:headEnd type="none" w="med" len="med"/>
+                      <a:tailEnd type="none" w="med" len="med"/>
+                    </a:lnB>
+                    <a:solidFill>
+                      <a:srgbClr val="FFFFFF"/>
+                    </a:solidFill>
+                  </a:tcPr>
+                </a:tc>
+              </a:tr>
+              <a:tr h="274320">
+                <a:tc>
+                  <a:txBody>
+                    <a:bodyPr/>
+                    <a:lstStyle/>
+                    <a:p>
+                      <a:pPr algn="l" indent="0" marL="0">
+                        <a:buNone/>
+                      </a:pPr>
+                      <a:r>
+                        <a:rPr lang="en-US" sz="1050" b="1" dirty="0">
+                          <a:solidFill>
+                            <a:srgbClr val="22303C"/>
+                          </a:solidFill>
+                          <a:latin typeface="Calibri" pitchFamily="34" charset="0"/>
+                          <a:ea typeface="Calibri" pitchFamily="34" charset="-122"/>
+                          <a:cs typeface="Calibri" pitchFamily="34" charset="-120"/>
+                        </a:rPr>
+                        <a:t>mpnn tasks spent</a:t>
+                      </a:r>
+                      <a:endParaRPr lang="en-US" sz="1050" dirty="0">
+                        <a:latin typeface="Calibri" charset="0"/>
+                        <a:ea typeface="Calibri" charset="0"/>
+                        <a:cs typeface="Calibri" charset="0"/>
+                      </a:endParaRPr>
+                    </a:p>
+                  </a:txBody>
+                  <a:tcPr marL="64008" marR="64008" marT="64008" marB="64008" anchor="ctr">
+                    <a:lnL w="9525" cap="flat" cmpd="sng" algn="ctr">
+                      <a:solidFill>
+                        <a:srgbClr val="C9D1D8"/>
+                      </a:solidFill>
+                      <a:prstDash val="solid"/>
+                      <a:round/>
+                      <a:headEnd type="none" w="med" len="med"/>
+                      <a:tailEnd type="none" w="med" len="med"/>
+                    </a:lnL>
+                    <a:lnR w="9525" cap="flat" cmpd="sng" algn="ctr">
+                      <a:solidFill>
+                        <a:srgbClr val="C9D1D8"/>
+                      </a:solidFill>
+                      <a:prstDash val="solid"/>
+                      <a:round/>
+                      <a:headEnd type="none" w="med" len="med"/>
+                      <a:tailEnd type="none" w="med" len="med"/>
+                    </a:lnR>
+                    <a:lnT w="9525" cap="flat" cmpd="sng" algn="ctr">
+                      <a:solidFill>
+                        <a:srgbClr val="C9D1D8"/>
+                      </a:solidFill>
+                      <a:prstDash val="solid"/>
+                      <a:round/>
+                      <a:headEnd type="none" w="med" len="med"/>
+                      <a:tailEnd type="none" w="med" len="med"/>
+                    </a:lnT>
+                    <a:lnB w="9525" cap="flat" cmpd="sng" algn="ctr">
+                      <a:solidFill>
+                        <a:srgbClr val="C9D1D8"/>
+                      </a:solidFill>
+                      <a:prstDash val="solid"/>
+                      <a:round/>
+                      <a:headEnd type="none" w="med" len="med"/>
+                      <a:tailEnd type="none" w="med" len="med"/>
+                    </a:lnB>
+                    <a:solidFill>
+                      <a:srgbClr val="EEF2F5"/>
+                    </a:solidFill>
+                  </a:tcPr>
+                </a:tc>
+                <a:tc>
+                  <a:txBody>
+                    <a:bodyPr/>
+                    <a:lstStyle/>
+                    <a:p>
+                      <a:pPr algn="l" indent="0" marL="0">
+                        <a:buNone/>
+                      </a:pPr>
+                      <a:r>
+                        <a:rPr lang="en-US" sz="950" dirty="0">
+                          <a:solidFill>
+                            <a:srgbClr val="5E6B75"/>
+                          </a:solidFill>
+                          <a:latin typeface="Consolas" pitchFamily="34" charset="0"/>
+                          <a:ea typeface="Consolas" pitchFamily="34" charset="-122"/>
+                          <a:cs typeface="Consolas" pitchFamily="34" charset="-120"/>
+                        </a:rPr>
+                        <a:t>858</a:t>
+                      </a:r>
+                      <a:endParaRPr lang="en-US" sz="950" dirty="0">
+                        <a:latin typeface="Consolas" charset="0"/>
+                        <a:ea typeface="Consolas" charset="0"/>
+                        <a:cs typeface="Consolas" charset="0"/>
+                      </a:endParaRPr>
+                    </a:p>
+                  </a:txBody>
+                  <a:tcPr marL="64008" marR="64008" marT="64008" marB="64008" anchor="ctr">
+                    <a:lnL w="9525" cap="flat" cmpd="sng" algn="ctr">
+                      <a:solidFill>
+                        <a:srgbClr val="C9D1D8"/>
+                      </a:solidFill>
+                      <a:prstDash val="solid"/>
+                      <a:round/>
+                      <a:headEnd type="none" w="med" len="med"/>
+                      <a:tailEnd type="none" w="med" len="med"/>
+                    </a:lnL>
+                    <a:lnR w="9525" cap="flat" cmpd="sng" algn="ctr">
+                      <a:solidFill>
+                        <a:srgbClr val="C9D1D8"/>
+                      </a:solidFill>
+                      <a:prstDash val="solid"/>
+                      <a:round/>
+                      <a:headEnd type="none" w="med" len="med"/>
+                      <a:tailEnd type="none" w="med" len="med"/>
+                    </a:lnR>
+                    <a:lnT w="9525" cap="flat" cmpd="sng" algn="ctr">
+                      <a:solidFill>
+                        <a:srgbClr val="C9D1D8"/>
+                      </a:solidFill>
+                      <a:prstDash val="solid"/>
+                      <a:round/>
+                      <a:headEnd type="none" w="med" len="med"/>
+                      <a:tailEnd type="none" w="med" len="med"/>
+                    </a:lnT>
+                    <a:lnB w="9525" cap="flat" cmpd="sng" algn="ctr">
+                      <a:solidFill>
+                        <a:srgbClr val="C9D1D8"/>
+                      </a:solidFill>
+                      <a:prstDash val="solid"/>
+                      <a:round/>
+                      <a:headEnd type="none" w="med" len="med"/>
+                      <a:tailEnd type="none" w="med" len="med"/>
+                    </a:lnB>
+                    <a:solidFill>
+                      <a:srgbClr val="EEF2F5"/>
+                    </a:solidFill>
+                  </a:tcPr>
+                </a:tc>
+                <a:tc>
+                  <a:txBody>
+                    <a:bodyPr/>
+                    <a:lstStyle/>
+                    <a:p>
+                      <a:pPr algn="l" indent="0" marL="0">
+                        <a:buNone/>
+                      </a:pPr>
+                      <a:r>
+                        <a:rPr lang="en-US" sz="950" dirty="0">
+                          <a:solidFill>
+                            <a:srgbClr val="5E6B75"/>
+                          </a:solidFill>
+                          <a:latin typeface="Consolas" pitchFamily="34" charset="0"/>
+                          <a:ea typeface="Consolas" pitchFamily="34" charset="-122"/>
+                          <a:cs typeface="Consolas" pitchFamily="34" charset="-120"/>
+                        </a:rPr>
+                        <a:t>349</a:t>
+                      </a:r>
+                      <a:endParaRPr lang="en-US" sz="950" dirty="0">
+                        <a:latin typeface="Consolas" charset="0"/>
+                        <a:ea typeface="Consolas" charset="0"/>
+                        <a:cs typeface="Consolas" charset="0"/>
+                      </a:endParaRPr>
+                    </a:p>
+                  </a:txBody>
+                  <a:tcPr marL="64008" marR="64008" marT="64008" marB="64008" anchor="ctr">
+                    <a:lnL w="9525" cap="flat" cmpd="sng" algn="ctr">
+                      <a:solidFill>
+                        <a:srgbClr val="C9D1D8"/>
+                      </a:solidFill>
+                      <a:prstDash val="solid"/>
+                      <a:round/>
+                      <a:headEnd type="none" w="med" len="med"/>
+                      <a:tailEnd type="none" w="med" len="med"/>
+                    </a:lnL>
+                    <a:lnR w="9525" cap="flat" cmpd="sng" algn="ctr">
+                      <a:solidFill>
+                        <a:srgbClr val="C9D1D8"/>
+                      </a:solidFill>
+                      <a:prstDash val="solid"/>
+                      <a:round/>
+                      <a:headEnd type="none" w="med" len="med"/>
+                      <a:tailEnd type="none" w="med" len="med"/>
+                    </a:lnR>
+                    <a:lnT w="9525" cap="flat" cmpd="sng" algn="ctr">
+                      <a:solidFill>
+                        <a:srgbClr val="C9D1D8"/>
+                      </a:solidFill>
+                      <a:prstDash val="solid"/>
+                      <a:round/>
+                      <a:headEnd type="none" w="med" len="med"/>
+                      <a:tailEnd type="none" w="med" len="med"/>
+                    </a:lnT>
+                    <a:lnB w="9525" cap="flat" cmpd="sng" algn="ctr">
+                      <a:solidFill>
+                        <a:srgbClr val="C9D1D8"/>
+                      </a:solidFill>
+                      <a:prstDash val="solid"/>
+                      <a:round/>
+                      <a:headEnd type="none" w="med" len="med"/>
+                      <a:tailEnd type="none" w="med" len="med"/>
+                    </a:lnB>
+                    <a:solidFill>
+                      <a:srgbClr val="EEF2F5"/>
+                    </a:solidFill>
+                  </a:tcPr>
+                </a:tc>
+              </a:tr>
+              <a:tr h="274320">
+                <a:tc>
+                  <a:txBody>
+                    <a:bodyPr/>
+                    <a:lstStyle/>
+                    <a:p>
+                      <a:pPr algn="l" indent="0" marL="0">
+                        <a:buNone/>
+                      </a:pPr>
+                      <a:r>
+                        <a:rPr lang="en-US" sz="1050" b="1" dirty="0">
+                          <a:solidFill>
+                            <a:srgbClr val="22303C"/>
+                          </a:solidFill>
+                          <a:latin typeface="Calibri" pitchFamily="34" charset="0"/>
+                          <a:ea typeface="Calibri" pitchFamily="34" charset="-122"/>
+                          <a:cs typeface="Calibri" pitchFamily="34" charset="-120"/>
+                        </a:rPr>
+                        <a:t>model cost</a:t>
+                      </a:r>
+                      <a:endParaRPr lang="en-US" sz="1050" dirty="0">
+                        <a:latin typeface="Calibri" charset="0"/>
+                        <a:ea typeface="Calibri" charset="0"/>
+                        <a:cs typeface="Calibri" charset="0"/>
+                      </a:endParaRPr>
+                    </a:p>
+                  </a:txBody>
+                  <a:tcPr marL="64008" marR="64008" marT="64008" marB="64008" anchor="ctr">
+                    <a:lnL w="9525" cap="flat" cmpd="sng" algn="ctr">
+                      <a:solidFill>
+                        <a:srgbClr val="C9D1D8"/>
+                      </a:solidFill>
+                      <a:prstDash val="solid"/>
+                      <a:round/>
+                      <a:headEnd type="none" w="med" len="med"/>
+                      <a:tailEnd type="none" w="med" len="med"/>
+                    </a:lnL>
+                    <a:lnR w="9525" cap="flat" cmpd="sng" algn="ctr">
+                      <a:solidFill>
+                        <a:srgbClr val="C9D1D8"/>
+                      </a:solidFill>
+                      <a:prstDash val="solid"/>
+                      <a:round/>
+                      <a:headEnd type="none" w="med" len="med"/>
+                      <a:tailEnd type="none" w="med" len="med"/>
+                    </a:lnR>
+                    <a:lnT w="9525" cap="flat" cmpd="sng" algn="ctr">
+                      <a:solidFill>
+                        <a:srgbClr val="C9D1D8"/>
+                      </a:solidFill>
+                      <a:prstDash val="solid"/>
+                      <a:round/>
+                      <a:headEnd type="none" w="med" len="med"/>
+                      <a:tailEnd type="none" w="med" len="med"/>
+                    </a:lnT>
+                    <a:lnB w="9525" cap="flat" cmpd="sng" algn="ctr">
+                      <a:solidFill>
+                        <a:srgbClr val="C9D1D8"/>
+                      </a:solidFill>
+                      <a:prstDash val="solid"/>
+                      <a:round/>
+                      <a:headEnd type="none" w="med" len="med"/>
+                      <a:tailEnd type="none" w="med" len="med"/>
+                    </a:lnB>
+                    <a:solidFill>
+                      <a:srgbClr val="FFFFFF"/>
+                    </a:solidFill>
+                  </a:tcPr>
+                </a:tc>
+                <a:tc>
+                  <a:txBody>
+                    <a:bodyPr/>
+                    <a:lstStyle/>
+                    <a:p>
+                      <a:pPr algn="l" indent="0" marL="0">
+                        <a:buNone/>
+                      </a:pPr>
+                      <a:r>
+                        <a:rPr lang="en-US" sz="950" dirty="0">
+                          <a:solidFill>
+                            <a:srgbClr val="5E6B75"/>
+                          </a:solidFill>
+                          <a:latin typeface="Consolas" pitchFamily="34" charset="0"/>
+                          <a:ea typeface="Consolas" pitchFamily="34" charset="-122"/>
+                          <a:cs typeface="Consolas" pitchFamily="34" charset="-120"/>
+                        </a:rPr>
+                        <a:t>—</a:t>
+                      </a:r>
+                      <a:endParaRPr lang="en-US" sz="950" dirty="0">
+                        <a:latin typeface="Consolas" charset="0"/>
+                        <a:ea typeface="Consolas" charset="0"/>
+                        <a:cs typeface="Consolas" charset="0"/>
+                      </a:endParaRPr>
+                    </a:p>
+                  </a:txBody>
+                  <a:tcPr marL="64008" marR="64008" marT="64008" marB="64008" anchor="ctr">
+                    <a:lnL w="9525" cap="flat" cmpd="sng" algn="ctr">
+                      <a:solidFill>
+                        <a:srgbClr val="C9D1D8"/>
+                      </a:solidFill>
+                      <a:prstDash val="solid"/>
+                      <a:round/>
+                      <a:headEnd type="none" w="med" len="med"/>
+                      <a:tailEnd type="none" w="med" len="med"/>
+                    </a:lnL>
+                    <a:lnR w="9525" cap="flat" cmpd="sng" algn="ctr">
+                      <a:solidFill>
+                        <a:srgbClr val="C9D1D8"/>
+                      </a:solidFill>
+                      <a:prstDash val="solid"/>
+                      <a:round/>
+                      <a:headEnd type="none" w="med" len="med"/>
+                      <a:tailEnd type="none" w="med" len="med"/>
+                    </a:lnR>
+                    <a:lnT w="9525" cap="flat" cmpd="sng" algn="ctr">
+                      <a:solidFill>
+                        <a:srgbClr val="C9D1D8"/>
+                      </a:solidFill>
+                      <a:prstDash val="solid"/>
+                      <a:round/>
+                      <a:headEnd type="none" w="med" len="med"/>
+                      <a:tailEnd type="none" w="med" len="med"/>
+                    </a:lnT>
+                    <a:lnB w="9525" cap="flat" cmpd="sng" algn="ctr">
+                      <a:solidFill>
+                        <a:srgbClr val="C9D1D8"/>
+                      </a:solidFill>
+                      <a:prstDash val="solid"/>
+                      <a:round/>
+                      <a:headEnd type="none" w="med" len="med"/>
+                      <a:tailEnd type="none" w="med" len="med"/>
+                    </a:lnB>
+                    <a:solidFill>
+                      <a:srgbClr val="FFFFFF"/>
+                    </a:solidFill>
+                  </a:tcPr>
+                </a:tc>
+                <a:tc>
+                  <a:txBody>
+                    <a:bodyPr/>
+                    <a:lstStyle/>
+                    <a:p>
+                      <a:pPr algn="l" indent="0" marL="0">
+                        <a:buNone/>
+                      </a:pPr>
+                      <a:r>
+                        <a:rPr lang="en-US" sz="950" dirty="0">
+                          <a:solidFill>
+                            <a:srgbClr val="5E6B75"/>
+                          </a:solidFill>
+                          <a:latin typeface="Consolas" pitchFamily="34" charset="0"/>
+                          <a:ea typeface="Consolas" pitchFamily="34" charset="-122"/>
+                          <a:cs typeface="Consolas" pitchFamily="34" charset="-120"/>
+                        </a:rPr>
+                        <a:t>$25.40 ($0.14/design)</a:t>
+                      </a:r>
+                      <a:endParaRPr lang="en-US" sz="950" dirty="0">
+                        <a:latin typeface="Consolas" charset="0"/>
+                        <a:ea typeface="Consolas" charset="0"/>
+                        <a:cs typeface="Consolas" charset="0"/>
+                      </a:endParaRPr>
+                    </a:p>
+                  </a:txBody>
+                  <a:tcPr marL="64008" marR="64008" marT="64008" marB="64008" anchor="ctr">
+                    <a:lnL w="9525" cap="flat" cmpd="sng" algn="ctr">
+                      <a:solidFill>
+                        <a:srgbClr val="C9D1D8"/>
+                      </a:solidFill>
+                      <a:prstDash val="solid"/>
+                      <a:round/>
+                      <a:headEnd type="none" w="med" len="med"/>
+                      <a:tailEnd type="none" w="med" len="med"/>
+                    </a:lnL>
+                    <a:lnR w="9525" cap="flat" cmpd="sng" algn="ctr">
+                      <a:solidFill>
+                        <a:srgbClr val="C9D1D8"/>
+                      </a:solidFill>
+                      <a:prstDash val="solid"/>
+                      <a:round/>
+                      <a:headEnd type="none" w="med" len="med"/>
+                      <a:tailEnd type="none" w="med" len="med"/>
+                    </a:lnR>
+                    <a:lnT w="9525" cap="flat" cmpd="sng" algn="ctr">
+                      <a:solidFill>
+                        <a:srgbClr val="C9D1D8"/>
+                      </a:solidFill>
+                      <a:prstDash val="solid"/>
+                      <a:round/>
+                      <a:headEnd type="none" w="med" len="med"/>
+                      <a:tailEnd type="none" w="med" len="med"/>
+                    </a:lnT>
+                    <a:lnB w="9525" cap="flat" cmpd="sng" algn="ctr">
+                      <a:solidFill>
+                        <a:srgbClr val="C9D1D8"/>
+                      </a:solidFill>
+                      <a:prstDash val="solid"/>
+                      <a:round/>
+                      <a:headEnd type="none" w="med" len="med"/>
+                      <a:tailEnd type="none" w="med" len="med"/>
+                    </a:lnB>
+                    <a:solidFill>
+                      <a:srgbClr val="FFFFFF"/>
+                    </a:solidFill>
+                  </a:tcPr>
+                </a:tc>
+              </a:tr>
+            </a:tbl>
+          </a:graphicData>
+        </a:graphic>
+      </p:graphicFrame>
+      <p:sp>
+        <p:nvSpPr>
+          <p:cNvPr id="5" name="Shape 2"/>
+          <p:cNvSpPr/>
+          <p:nvPr/>
+        </p:nvSpPr>
+        <p:spPr>
+          <a:xfrm>
+            <a:off x="8001000" y="1481328"/>
+            <a:ext cx="3730752" cy="2194560"/>
+          </a:xfrm>
+          <a:prstGeom prst="rect">
+            <a:avLst/>
+          </a:prstGeom>
+          <a:solidFill>
+            <a:srgbClr val="E9EDF7"/>
+          </a:solidFill>
+          <a:ln w="12700">
+            <a:solidFill>
+              <a:srgbClr val="E9EDF7"/>
+            </a:solidFill>
+            <a:prstDash val="solid"/>
+          </a:ln>
+        </p:spPr>
+      </p:sp>
+      <p:sp>
+        <p:nvSpPr>
+          <p:cNvPr id="6" name="Text 3"/>
+          <p:cNvSpPr txBox="1"/>
+          <p:nvPr/>
+        </p:nvSpPr>
+        <p:spPr>
+          <a:xfrm>
+            <a:off x="8129016" y="1563624"/>
+            <a:ext cx="3474720" cy="274320"/>
+          </a:xfrm>
+          <a:prstGeom prst="rect">
+            <a:avLst/>
+          </a:prstGeom>
+          <a:noFill/>
+          <a:ln/>
+        </p:spPr>
+        <p:txBody>
+          <a:bodyPr wrap="square" lIns="0" tIns="0" rIns="0" bIns="0" rtlCol="0" anchor="t"/>
+          <a:lstStyle/>
+          <a:p>
+            <a:pPr indent="0" marL="0">
+              <a:buNone/>
+            </a:pPr>
+            <a:r>
+              <a:rPr lang="en-US" sz="1300" b="1" dirty="0">
+                <a:solidFill>
+                  <a:srgbClr val="3B4E8C"/>
+                </a:solidFill>
+                <a:latin typeface="Calibri" pitchFamily="34" charset="0"/>
+                <a:ea typeface="Calibri" pitchFamily="34" charset="-122"/>
+                <a:cs typeface="Calibri" pitchFamily="34" charset="-120"/>
+              </a:rPr>
+              <a:t>What it did unprompted</a:t>
+            </a:r>
+            <a:endParaRPr lang="en-US" sz="1300" dirty="0"/>
+          </a:p>
+        </p:txBody>
+      </p:sp>
+      <p:sp>
+        <p:nvSpPr>
+          <p:cNvPr id="7" name="Text 4"/>
+          <p:cNvSpPr txBox="1"/>
+          <p:nvPr/>
+        </p:nvSpPr>
+        <p:spPr>
+          <a:xfrm>
+            <a:off x="8129016" y="1874520"/>
+            <a:ext cx="3474720" cy="1719072"/>
+          </a:xfrm>
+          <a:prstGeom prst="rect">
+            <a:avLst/>
+          </a:prstGeom>
+          <a:noFill/>
+          <a:ln/>
+        </p:spPr>
+        <p:txBody>
+          <a:bodyPr wrap="square" lIns="0" tIns="0" rIns="0" bIns="0" rtlCol="0" anchor="t"/>
+          <a:lstStyle/>
+          <a:p>
+            <a:pPr marL="342900" indent="-342900">
+              <a:spcAft>
+                <a:spcPts val="400"/>
+              </a:spcAft>
+              <a:buSzPct val="100000"/>
+              <a:buChar char="•"/>
+            </a:pPr>
+            <a:r>
+              <a:rPr lang="en-US" sz="1050" dirty="0">
+                <a:solidFill>
+                  <a:srgbClr val="22303C"/>
+                </a:solidFill>
+                <a:latin typeface="Calibri" pitchFamily="34" charset="0"/>
+                <a:ea typeface="Calibri" pitchFamily="34" charset="-122"/>
+                <a:cs typeface="Calibri" pitchFamily="34" charset="-120"/>
+              </a:rPr>
+              <a:t>3 of 4 pipelines called finish deliberately, with an accurate account of what they had produced.</a:t>
+            </a:r>
+            <a:endParaRPr lang="en-US" sz="1050" dirty="0"/>
+          </a:p>
+          <a:p>
+            <a:pPr marL="342900" indent="-342900">
+              <a:spcAft>
+                <a:spcPts val="400"/>
+              </a:spcAft>
+              <a:buSzPct val="100000"/>
+              <a:buChar char="•"/>
+            </a:pPr>
+            <a:r>
+              <a:rPr lang="en-US" sz="1050" dirty="0">
+                <a:solidFill>
+                  <a:srgbClr val="22303C"/>
+                </a:solidFill>
+                <a:latin typeface="Calibri" pitchFamily="34" charset="0"/>
+                <a:ea typeface="Calibri" pitchFamily="34" charset="-122"/>
+                <a:cs typeface="Calibri" pitchFamily="34" charset="-120"/>
+              </a:rPr>
+              <a:t>And one pipeline diagnosed the fa_rep relax bottleneck unprompted — a bottleneck that was already an open backlog item next door.</a:t>
+            </a:r>
+            <a:endParaRPr lang="en-US" sz="1050" dirty="0"/>
+          </a:p>
+        </p:txBody>
+      </p:sp>
+      <p:sp>
+        <p:nvSpPr>
+          <p:cNvPr id="8" name="Shape 5"/>
+          <p:cNvSpPr/>
+          <p:nvPr/>
+        </p:nvSpPr>
+        <p:spPr>
+          <a:xfrm>
+            <a:off x="8001000" y="3767328"/>
+            <a:ext cx="3730752" cy="1371600"/>
+          </a:xfrm>
+          <a:prstGeom prst="rect">
+            <a:avLst/>
+          </a:prstGeom>
+          <a:solidFill>
+            <a:srgbClr val="EEF2F5"/>
+          </a:solidFill>
+          <a:ln w="12700">
+            <a:solidFill>
+              <a:srgbClr val="EEF2F5"/>
+            </a:solidFill>
+            <a:prstDash val="solid"/>
+          </a:ln>
+        </p:spPr>
+      </p:sp>
+      <p:sp>
+        <p:nvSpPr>
+          <p:cNvPr id="9" name="Text 6"/>
+          <p:cNvSpPr txBox="1"/>
+          <p:nvPr/>
+        </p:nvSpPr>
+        <p:spPr>
+          <a:xfrm>
+            <a:off x="8129016" y="3849624"/>
+            <a:ext cx="3474720" cy="274320"/>
+          </a:xfrm>
+          <a:prstGeom prst="rect">
+            <a:avLst/>
+          </a:prstGeom>
+          <a:noFill/>
+          <a:ln/>
+        </p:spPr>
+        <p:txBody>
+          <a:bodyPr wrap="square" lIns="0" tIns="0" rIns="0" bIns="0" rtlCol="0" anchor="t"/>
+          <a:lstStyle/>
+          <a:p>
+            <a:pPr indent="0" marL="0">
+              <a:buNone/>
+            </a:pPr>
+            <a:r>
+              <a:rPr lang="en-US" sz="1300" b="1" dirty="0">
+                <a:solidFill>
+                  <a:srgbClr val="16222B"/>
+                </a:solidFill>
+                <a:latin typeface="Calibri" pitchFamily="34" charset="0"/>
+                <a:ea typeface="Calibri" pitchFamily="34" charset="-122"/>
+                <a:cs typeface="Calibri" pitchFamily="34" charset="-120"/>
+              </a:rPr>
+              <a:t>And what it did badly</a:t>
+            </a:r>
+            <a:endParaRPr lang="en-US" sz="1300" dirty="0"/>
+          </a:p>
+        </p:txBody>
+      </p:sp>
+      <p:sp>
+        <p:nvSpPr>
+          <p:cNvPr id="10" name="Text 7"/>
+          <p:cNvSpPr txBox="1"/>
+          <p:nvPr/>
+        </p:nvSpPr>
+        <p:spPr>
+          <a:xfrm>
+            <a:off x="8129016" y="4160520"/>
+            <a:ext cx="3474720" cy="896112"/>
+          </a:xfrm>
+          <a:prstGeom prst="rect">
+            <a:avLst/>
+          </a:prstGeom>
+          <a:noFill/>
+          <a:ln/>
+        </p:spPr>
+        <p:txBody>
+          <a:bodyPr wrap="square" lIns="0" tIns="0" rIns="0" bIns="0" rtlCol="0" anchor="t"/>
+          <a:lstStyle/>
+          <a:p>
+            <a:pPr marL="342900" indent="-342900">
+              <a:spcAft>
+                <a:spcPts val="400"/>
+              </a:spcAft>
+              <a:buSzPct val="100000"/>
+              <a:buChar char="•"/>
+            </a:pPr>
+            <a:r>
+              <a:rPr lang="en-US" sz="1000" dirty="0">
+                <a:solidFill>
+                  <a:srgbClr val="22303C"/>
+                </a:solidFill>
+                <a:latin typeface="Calibri" pitchFamily="34" charset="0"/>
+                <a:ea typeface="Calibri" pitchFamily="34" charset="-122"/>
+                <a:cs typeface="Calibri" pitchFamily="34" charset="-120"/>
+              </a:rPr>
+              <a:t>score_interface called 13x against 27 relaxes - the cheap CPU gate before an expensive fold is being skipped</a:t>
+            </a:r>
+            <a:endParaRPr lang="en-US" sz="1000" dirty="0"/>
+          </a:p>
+          <a:p>
+            <a:pPr marL="342900" indent="-342900">
+              <a:spcAft>
+                <a:spcPts val="400"/>
+              </a:spcAft>
+              <a:buSzPct val="100000"/>
+              <a:buChar char="•"/>
+            </a:pPr>
+            <a:r>
+              <a:rPr lang="en-US" sz="1000" dirty="0">
+                <a:solidFill>
+                  <a:srgbClr val="22303C"/>
+                </a:solidFill>
+                <a:latin typeface="Calibri" pitchFamily="34" charset="0"/>
+                <a:ea typeface="Calibri" pitchFamily="34" charset="-122"/>
+                <a:cs typeface="Calibri" pitchFamily="34" charset="-120"/>
+              </a:rPr>
+              <a:t>inspect_ensemble called once in 137 turns</a:t>
+            </a:r>
+            <a:endParaRPr lang="en-US" sz="1000" dirty="0"/>
+          </a:p>
+        </p:txBody>
+      </p:sp>
+      <p:sp>
+        <p:nvSpPr>
+          <p:cNvPr id="11" name="Shape 8"/>
+          <p:cNvSpPr/>
+          <p:nvPr/>
+        </p:nvSpPr>
+        <p:spPr>
+          <a:xfrm>
+            <a:off x="457200" y="4041648"/>
+            <a:ext cx="7223760" cy="1097280"/>
+          </a:xfrm>
+          <a:prstGeom prst="rect">
+            <a:avLst/>
+          </a:prstGeom>
+          <a:solidFill>
+            <a:srgbClr val="F9E0DD"/>
+          </a:solidFill>
+          <a:ln w="19050">
+            <a:solidFill>
+              <a:srgbClr val="C0392B"/>
+            </a:solidFill>
+            <a:prstDash val="solid"/>
+          </a:ln>
+        </p:spPr>
+      </p:sp>
+      <p:sp>
+        <p:nvSpPr>
+          <p:cNvPr id="12" name="Text 9"/>
+          <p:cNvSpPr txBox="1"/>
+          <p:nvPr/>
+        </p:nvSpPr>
+        <p:spPr>
+          <a:xfrm>
+            <a:off x="585216" y="4133088"/>
+            <a:ext cx="6967728" cy="914400"/>
+          </a:xfrm>
+          <a:prstGeom prst="rect">
+            <a:avLst/>
+          </a:prstGeom>
+          <a:noFill/>
+          <a:ln/>
+        </p:spPr>
+        <p:txBody>
+          <a:bodyPr wrap="square" lIns="0" tIns="0" rIns="0" bIns="0" rtlCol="0" anchor="t"/>
+          <a:lstStyle/>
+          <a:p>
+            <a:pPr indent="0" marL="0">
+              <a:buNone/>
+            </a:pPr>
+            <a:r>
+              <a:rPr lang="en-US" sz="1000" b="1" dirty="0">
+                <a:solidFill>
+                  <a:srgbClr val="C0392B"/>
+                </a:solidFill>
+                <a:latin typeface="Calibri" pitchFamily="34" charset="0"/>
+                <a:ea typeface="Calibri" pitchFamily="34" charset="-122"/>
+                <a:cs typeface="Calibri" pitchFamily="34" charset="-120"/>
+              </a:rPr>
+              <a:t>Two caveats, and they are load-bearing.  </a:t>
+            </a:r>
+            <a:pPr indent="0" marL="0">
+              <a:buNone/>
+            </a:pPr>
+            <a:r>
+              <a:rPr lang="en-US" sz="1000" dirty="0">
+                <a:solidFill>
+                  <a:srgbClr val="22303C"/>
+                </a:solidFill>
+                <a:latin typeface="Calibri" pitchFamily="34" charset="0"/>
+                <a:ea typeface="Calibri" pitchFamily="34" charset="-122"/>
+                <a:cs typeface="Calibri" pitchFamily="34" charset="-120"/>
+              </a:rPr>
+              <a:t>The reference arm came in about 2x worse than its own record (22701168: 0.160 GPU-h per passing fold), so an unknown part of the gap is a weak baseline rather than agent skill. Do not quote the 3.3x.  The fastrelax gap - 88% against 49% on the same tool with the same thresholds - is unexplained, and it is where the funnel difference actually originates.</a:t>
+            </a:r>
+            <a:endParaRPr lang="en-US" sz="1000" dirty="0"/>
+          </a:p>
+        </p:txBody>
+      </p:sp>
+      <p:sp>
+        <p:nvSpPr>
+          <p:cNvPr id="13" name="Text 10"/>
+          <p:cNvSpPr txBox="1"/>
+          <p:nvPr/>
+        </p:nvSpPr>
+        <p:spPr>
+          <a:xfrm>
+            <a:off x="457200" y="5349240"/>
+            <a:ext cx="11277295" cy="640080"/>
+          </a:xfrm>
+          <a:prstGeom prst="rect">
+            <a:avLst/>
+          </a:prstGeom>
+          <a:noFill/>
+          <a:ln/>
+        </p:spPr>
+        <p:txBody>
+          <a:bodyPr wrap="square" lIns="0" tIns="0" rIns="0" bIns="0" rtlCol="0" anchor="t"/>
+          <a:lstStyle/>
+          <a:p>
+            <a:pPr indent="0" marL="0">
+              <a:buNone/>
+            </a:pPr>
+            <a:r>
+              <a:rPr lang="en-US" sz="1150" b="1" dirty="0">
+                <a:solidFill>
+                  <a:srgbClr val="16222B"/>
+                </a:solidFill>
+                <a:latin typeface="Calibri" pitchFamily="34" charset="0"/>
+                <a:ea typeface="Calibri" pitchFamily="34" charset="-122"/>
+                <a:cs typeface="Calibri" pitchFamily="34" charset="-120"/>
+              </a:rPr>
+              <a:t>Both arms ran the full four hours with zero task failures. </a:t>
+            </a:r>
+            <a:pPr indent="0" marL="0">
+              <a:buNone/>
+            </a:pPr>
+            <a:r>
+              <a:rPr lang="en-US" sz="1150" dirty="0">
+                <a:solidFill>
+                  <a:srgbClr val="22303C"/>
+                </a:solidFill>
+                <a:latin typeface="Calibri" pitchFamily="34" charset="0"/>
+                <a:ea typeface="Calibri" pitchFamily="34" charset="-122"/>
+                <a:cs typeface="Calibri" pitchFamily="34" charset="-120"/>
+              </a:rPr>
+              <a:t>Throughput is equal, so the round trip costs nothing measurable — the difference is entirely in which work the funnel chose to do. This is not IMPRESS-A: no campaign engine, no gates, no interlock, no trust. It is the idea, on hardware, without them.</a:t>
+            </a:r>
+            <a:endParaRPr lang="en-US" sz="1150" dirty="0"/>
+          </a:p>
+        </p:txBody>
+      </p:sp>
+      <p:sp>
+        <p:nvSpPr>
+          <p:cNvPr id="15" name="Text 11"/>
+          <p:cNvSpPr txBox="1"/>
+          <p:nvPr/>
+        </p:nvSpPr>
+        <p:spPr>
+          <a:xfrm>
+            <a:off x="457200" y="6492240"/>
+            <a:ext cx="11277295" cy="228600"/>
+          </a:xfrm>
+          <a:prstGeom prst="rect">
+            <a:avLst/>
+          </a:prstGeom>
+          <a:noFill/>
+          <a:ln/>
+        </p:spPr>
+        <p:txBody>
+          <a:bodyPr wrap="square" lIns="0" tIns="0" rIns="0" bIns="0" rtlCol="0" anchor="t"/>
+          <a:lstStyle/>
+          <a:p>
+            <a:pPr indent="0" marL="0">
+              <a:buNone/>
+            </a:pPr>
+            <a:r>
+              <a:rPr lang="en-US" sz="1000" i="1" dirty="0">
+                <a:solidFill>
+                  <a:srgbClr val="5E6B75"/>
+                </a:solidFill>
+                <a:latin typeface="Calibri" pitchFamily="34" charset="0"/>
+                <a:ea typeface="Calibri" pitchFamily="34" charset="-122"/>
+                <a:cs typeface="Calibri" pitchFamily="34" charset="-120"/>
+              </a:rPr>
+              <a:t>TRANSCRIBED · examples/agentic_small_molecule_binding/CLAUDE.md - transcribed from its revision history; the run outputs live under $WORK_DIR on Delta, not here · the tool list is mined, from examples/agentic_small_molecule_binding/tools.py:35</a:t>
+            </a:r>
+            <a:endParaRPr lang="en-US" sz="1000" dirty="0"/>
+          </a:p>
+        </p:txBody>
+      </p:sp>
+    </p:spTree>
+  </p:cSld>
+  <p:clrMapOvr>
+    <a:masterClrMapping/>
+  </p:clrMapOvr>
+</p:sld>
+</file>
+
+<file path=ppt/slides/slide22.xml><?xml version="1.0" encoding="utf-8"?>
+<p:sld xmlns:a="http://schemas.openxmlformats.org/drawingml/2006/main" xmlns:r="http://schemas.openxmlformats.org/officeDocument/2006/relationships" xmlns:p="http://schemas.openxmlformats.org/presentationml/2006/main">
+  <p:cSld name="Slide 22">
+    <p:spTree>
+      <p:nvGrpSpPr>
+        <p:cNvPr id="1" name=""/>
+        <p:cNvGrpSpPr/>
+        <p:nvPr/>
+      </p:nvGrpSpPr>
+      <p:grpSpPr>
+        <a:xfrm>
+          <a:off x="0" y="0"/>
+          <a:ext cx="0" cy="0"/>
+          <a:chOff x="0" y="0"/>
+          <a:chExt cx="0" cy="0"/>
+        </a:xfrm>
+      </p:grpSpPr>
+      <p:sp>
+        <p:nvSpPr>
+          <p:cNvPr id="2" name="Text 0"/>
+          <p:cNvSpPr txBox="1"/>
+          <p:nvPr/>
+        </p:nvSpPr>
+        <p:spPr>
+          <a:xfrm>
+            <a:off x="457200" y="320040"/>
+            <a:ext cx="8229600" cy="274320"/>
+          </a:xfrm>
+          <a:prstGeom prst="rect">
+            <a:avLst/>
+          </a:prstGeom>
+          <a:noFill/>
+          <a:ln/>
+        </p:spPr>
+        <p:txBody>
+          <a:bodyPr wrap="square" lIns="0" tIns="0" rIns="0" bIns="0" rtlCol="0" anchor="t"/>
+          <a:lstStyle/>
+          <a:p>
+            <a:pPr indent="0" marL="0">
+              <a:buNone/>
+            </a:pPr>
+            <a:r>
+              <a:rPr lang="en-US" sz="1200" b="1" spc="200" kern="0" dirty="0">
+                <a:solidFill>
+                  <a:srgbClr val="1E6470"/>
+                </a:solidFill>
+                <a:latin typeface="Calibri" pitchFamily="34" charset="0"/>
+                <a:ea typeface="Calibri" pitchFamily="34" charset="-122"/>
+                <a:cs typeface="Calibri" pitchFamily="34" charset="-120"/>
+              </a:rPr>
+              <a:t>ACT 3 · USABILITY</a:t>
+            </a:r>
+            <a:endParaRPr lang="en-US" sz="1200" dirty="0"/>
+          </a:p>
+        </p:txBody>
+      </p:sp>
+      <p:sp>
+        <p:nvSpPr>
+          <p:cNvPr id="3" name="Text 1"/>
+          <p:cNvSpPr txBox="1"/>
+          <p:nvPr/>
+        </p:nvSpPr>
+        <p:spPr>
+          <a:xfrm>
+            <a:off x="457200" y="566928"/>
+            <a:ext cx="11277295" cy="731520"/>
+          </a:xfrm>
+          <a:prstGeom prst="rect">
+            <a:avLst/>
+          </a:prstGeom>
+          <a:noFill/>
+          <a:ln/>
+        </p:spPr>
+        <p:txBody>
+          <a:bodyPr wrap="square" lIns="0" tIns="0" rIns="0" bIns="0" rtlCol="0" anchor="t"/>
+          <a:lstStyle/>
+          <a:p>
+            <a:pPr indent="0" marL="0">
+              <a:buNone/>
+            </a:pPr>
+            <a:r>
+              <a:rPr lang="en-US" sz="2800" b="1" dirty="0">
+                <a:solidFill>
+                  <a:srgbClr val="16222B"/>
+                </a:solidFill>
+                <a:latin typeface="Cambria" pitchFamily="34" charset="0"/>
+                <a:ea typeface="Cambria" pitchFamily="34" charset="-122"/>
+                <a:cs typeface="Cambria" pitchFamily="34" charset="-120"/>
+              </a:rPr>
+              <a:t>What those four hours say about these surfaces</a:t>
+            </a:r>
+            <a:endParaRPr lang="en-US" sz="2800" dirty="0"/>
+          </a:p>
+        </p:txBody>
+      </p:sp>
+      <p:graphicFrame>
+        <p:nvGraphicFramePr>
+          <p:cNvPr id="23" name="Table 0"/>
+          <p:cNvGraphicFramePr>
+            <a:graphicFrameLocks noGrp="1"/>
+          </p:cNvGraphicFramePr>
+          <p:nvPr>
+            <p:extLst>
+              <p:ext uri="{D42A27DB-BD31-4B8C-83A1-F6EECF244321}">
+                <p14:modId xmlns:p14="http://schemas.microsoft.com/office/powerpoint/2010/main" val="1579011935"/>
+              </p:ext>
+            </p:extLst>
+          </p:nvPr>
+        </p:nvGraphicFramePr>
+        <p:xfrm>
+          <a:off x="457200" y="1463040"/>
+          <a:ext cx="11274552" cy="914400"/>
+        </p:xfrm>
+        <a:graphic>
+          <a:graphicData uri="http://schemas.openxmlformats.org/drawingml/2006/table">
+            <a:tbl>
+              <a:tblPr/>
+              <a:tblGrid>
+                <a:gridCol w="4206240"/>
+                <a:gridCol w="7068312"/>
+              </a:tblGrid>
+              <a:tr h="731520">
+                <a:tc>
+                  <a:txBody>
+                    <a:bodyPr/>
+                    <a:lstStyle/>
+                    <a:p>
+                      <a:pPr indent="0" marL="0">
+                        <a:buNone/>
+                      </a:pPr>
+                      <a:r>
+                        <a:rPr lang="en-US" sz="1100" b="1" dirty="0">
+                          <a:solidFill>
+                            <a:srgbClr val="FFFFFF"/>
+                          </a:solidFill>
+                          <a:latin typeface="Calibri" pitchFamily="34" charset="0"/>
+                          <a:ea typeface="Calibri" pitchFamily="34" charset="-122"/>
+                          <a:cs typeface="Calibri" pitchFamily="34" charset="-120"/>
+                        </a:rPr>
+                        <a:t>What the live runs showed</a:t>
+                      </a:r>
+                      <a:endParaRPr lang="en-US" sz="1100" dirty="0">
+                        <a:latin typeface="Calibri" charset="0"/>
+                        <a:ea typeface="Calibri" charset="0"/>
+                        <a:cs typeface="Calibri" charset="0"/>
+                      </a:endParaRPr>
+                    </a:p>
+                  </a:txBody>
+                  <a:tcPr marL="82296" marR="82296" marT="82296" marB="82296" anchor="ctr">
+                    <a:lnL w="9525" cap="flat" cmpd="sng" algn="ctr">
+                      <a:solidFill>
+                        <a:srgbClr val="C9D1D8"/>
+                      </a:solidFill>
+                      <a:prstDash val="solid"/>
+                      <a:round/>
+                      <a:headEnd type="none" w="med" len="med"/>
+                      <a:tailEnd type="none" w="med" len="med"/>
+                    </a:lnL>
+                    <a:lnR w="9525" cap="flat" cmpd="sng" algn="ctr">
+                      <a:solidFill>
+                        <a:srgbClr val="C9D1D8"/>
+                      </a:solidFill>
+                      <a:prstDash val="solid"/>
+                      <a:round/>
+                      <a:headEnd type="none" w="med" len="med"/>
+                      <a:tailEnd type="none" w="med" len="med"/>
+                    </a:lnR>
+                    <a:lnT w="9525" cap="flat" cmpd="sng" algn="ctr">
+                      <a:solidFill>
+                        <a:srgbClr val="C9D1D8"/>
+                      </a:solidFill>
+                      <a:prstDash val="solid"/>
+                      <a:round/>
+                      <a:headEnd type="none" w="med" len="med"/>
+                      <a:tailEnd type="none" w="med" len="med"/>
+                    </a:lnT>
+                    <a:lnB w="9525" cap="flat" cmpd="sng" algn="ctr">
+                      <a:solidFill>
+                        <a:srgbClr val="C9D1D8"/>
+                      </a:solidFill>
+                      <a:prstDash val="solid"/>
+                      <a:round/>
+                      <a:headEnd type="none" w="med" len="med"/>
+                      <a:tailEnd type="none" w="med" len="med"/>
+                    </a:lnB>
+                    <a:solidFill>
+                      <a:srgbClr val="3B4E8C"/>
+                    </a:solidFill>
+                  </a:tcPr>
+                </a:tc>
+                <a:tc>
+                  <a:txBody>
+                    <a:bodyPr/>
+                    <a:lstStyle/>
+                    <a:p>
+                      <a:pPr indent="0" marL="0">
+                        <a:buNone/>
+                      </a:pPr>
+                      <a:r>
+                        <a:rPr lang="en-US" sz="1100" b="1" dirty="0">
+                          <a:solidFill>
+                            <a:srgbClr val="FFFFFF"/>
+                          </a:solidFill>
+                          <a:latin typeface="Calibri" pitchFamily="34" charset="0"/>
+                          <a:ea typeface="Calibri" pitchFamily="34" charset="-122"/>
+                          <a:cs typeface="Calibri" pitchFamily="34" charset="-120"/>
+                        </a:rPr>
+                        <a:t>Which surface answers it — and whether it has been exercised</a:t>
+                      </a:r>
+                      <a:endParaRPr lang="en-US" sz="1100" dirty="0">
+                        <a:latin typeface="Calibri" charset="0"/>
+                        <a:ea typeface="Calibri" charset="0"/>
+                        <a:cs typeface="Calibri" charset="0"/>
+                      </a:endParaRPr>
+                    </a:p>
+                  </a:txBody>
+                  <a:tcPr marL="82296" marR="82296" marT="82296" marB="82296" anchor="ctr">
+                    <a:lnL w="9525" cap="flat" cmpd="sng" algn="ctr">
+                      <a:solidFill>
+                        <a:srgbClr val="C9D1D8"/>
+                      </a:solidFill>
+                      <a:prstDash val="solid"/>
+                      <a:round/>
+                      <a:headEnd type="none" w="med" len="med"/>
+                      <a:tailEnd type="none" w="med" len="med"/>
+                    </a:lnL>
+                    <a:lnR w="9525" cap="flat" cmpd="sng" algn="ctr">
+                      <a:solidFill>
+                        <a:srgbClr val="C9D1D8"/>
+                      </a:solidFill>
+                      <a:prstDash val="solid"/>
+                      <a:round/>
+                      <a:headEnd type="none" w="med" len="med"/>
+                      <a:tailEnd type="none" w="med" len="med"/>
+                    </a:lnR>
+                    <a:lnT w="9525" cap="flat" cmpd="sng" algn="ctr">
+                      <a:solidFill>
+                        <a:srgbClr val="C9D1D8"/>
+                      </a:solidFill>
+                      <a:prstDash val="solid"/>
+                      <a:round/>
+                      <a:headEnd type="none" w="med" len="med"/>
+                      <a:tailEnd type="none" w="med" len="med"/>
+                    </a:lnT>
+                    <a:lnB w="9525" cap="flat" cmpd="sng" algn="ctr">
+                      <a:solidFill>
+                        <a:srgbClr val="C9D1D8"/>
+                      </a:solidFill>
+                      <a:prstDash val="solid"/>
+                      <a:round/>
+                      <a:headEnd type="none" w="med" len="med"/>
+                      <a:tailEnd type="none" w="med" len="med"/>
+                    </a:lnB>
+                    <a:solidFill>
+                      <a:srgbClr val="3B4E8C"/>
+                    </a:solidFill>
+                  </a:tcPr>
+                </a:tc>
+              </a:tr>
+              <a:tr h="731520">
+                <a:tc>
+                  <a:txBody>
+                    <a:bodyPr/>
+                    <a:lstStyle/>
+                    <a:p>
+                      <a:pPr algn="l" indent="0" marL="0">
+                        <a:buNone/>
+                      </a:pPr>
+                      <a:r>
+                        <a:rPr lang="en-US" sz="1050" b="1" dirty="0">
+                          <a:solidFill>
+                            <a:srgbClr val="22303C"/>
+                          </a:solidFill>
+                          <a:latin typeface="Calibri" pitchFamily="34" charset="0"/>
+                          <a:ea typeface="Calibri" pitchFamily="34" charset="-122"/>
+                          <a:cs typeface="Calibri" pitchFamily="34" charset="-120"/>
+                        </a:rPr>
+                        <a:t>The round trip is free: 16.2 against 15.5 rfd3 per pipeline-hour</a:t>
+                      </a:r>
+                      <a:endParaRPr lang="en-US" sz="1050" dirty="0">
+                        <a:latin typeface="Calibri" charset="0"/>
+                        <a:ea typeface="Calibri" charset="0"/>
+                        <a:cs typeface="Calibri" charset="0"/>
+                      </a:endParaRPr>
+                    </a:p>
+                  </a:txBody>
+                  <a:tcPr marL="82296" marR="82296" marT="82296" marB="82296" anchor="ctr">
+                    <a:lnL w="9525" cap="flat" cmpd="sng" algn="ctr">
+                      <a:solidFill>
+                        <a:srgbClr val="C9D1D8"/>
+                      </a:solidFill>
+                      <a:prstDash val="solid"/>
+                      <a:round/>
+                      <a:headEnd type="none" w="med" len="med"/>
+                      <a:tailEnd type="none" w="med" len="med"/>
+                    </a:lnL>
+                    <a:lnR w="9525" cap="flat" cmpd="sng" algn="ctr">
+                      <a:solidFill>
+                        <a:srgbClr val="C9D1D8"/>
+                      </a:solidFill>
+                      <a:prstDash val="solid"/>
+                      <a:round/>
+                      <a:headEnd type="none" w="med" len="med"/>
+                      <a:tailEnd type="none" w="med" len="med"/>
+                    </a:lnR>
+                    <a:lnT w="9525" cap="flat" cmpd="sng" algn="ctr">
+                      <a:solidFill>
+                        <a:srgbClr val="C9D1D8"/>
+                      </a:solidFill>
+                      <a:prstDash val="solid"/>
+                      <a:round/>
+                      <a:headEnd type="none" w="med" len="med"/>
+                      <a:tailEnd type="none" w="med" len="med"/>
+                    </a:lnT>
+                    <a:lnB w="9525" cap="flat" cmpd="sng" algn="ctr">
+                      <a:solidFill>
+                        <a:srgbClr val="C9D1D8"/>
+                      </a:solidFill>
+                      <a:prstDash val="solid"/>
+                      <a:round/>
+                      <a:headEnd type="none" w="med" len="med"/>
+                      <a:tailEnd type="none" w="med" len="med"/>
+                    </a:lnB>
+                    <a:solidFill>
+                      <a:srgbClr val="EEF2F5"/>
+                    </a:solidFill>
+                  </a:tcPr>
+                </a:tc>
+                <a:tc>
+                  <a:txBody>
+                    <a:bodyPr/>
+                    <a:lstStyle/>
+                    <a:p>
+                      <a:pPr algn="l" indent="0" marL="0">
+                        <a:buNone/>
+                      </a:pPr>
+                      <a:r>
+                        <a:rPr lang="en-US" sz="1050" dirty="0">
+                          <a:solidFill>
+                            <a:srgbClr val="22303C"/>
+                          </a:solidFill>
+                          <a:latin typeface="Calibri" pitchFamily="34" charset="0"/>
+                          <a:ea typeface="Calibri" pitchFamily="34" charset="-122"/>
+                          <a:cs typeface="Calibri" pitchFamily="34" charset="-120"/>
+                        </a:rPr>
+                        <a:t>A reasoner per experiment is affordable, which is the bet surfaces 3 and 4 are built on. Here it is measured against MOCKS only.</a:t>
+                      </a:r>
+                      <a:endParaRPr lang="en-US" sz="1050" dirty="0">
+                        <a:latin typeface="Calibri" charset="0"/>
+                        <a:ea typeface="Calibri" charset="0"/>
+                        <a:cs typeface="Calibri" charset="0"/>
+                      </a:endParaRPr>
+                    </a:p>
+                  </a:txBody>
+                  <a:tcPr marL="82296" marR="82296" marT="82296" marB="82296" anchor="ctr">
+                    <a:lnL w="9525" cap="flat" cmpd="sng" algn="ctr">
+                      <a:solidFill>
+                        <a:srgbClr val="C9D1D8"/>
+                      </a:solidFill>
+                      <a:prstDash val="solid"/>
+                      <a:round/>
+                      <a:headEnd type="none" w="med" len="med"/>
+                      <a:tailEnd type="none" w="med" len="med"/>
+                    </a:lnL>
+                    <a:lnR w="9525" cap="flat" cmpd="sng" algn="ctr">
+                      <a:solidFill>
+                        <a:srgbClr val="C9D1D8"/>
+                      </a:solidFill>
+                      <a:prstDash val="solid"/>
+                      <a:round/>
+                      <a:headEnd type="none" w="med" len="med"/>
+                      <a:tailEnd type="none" w="med" len="med"/>
+                    </a:lnR>
+                    <a:lnT w="9525" cap="flat" cmpd="sng" algn="ctr">
+                      <a:solidFill>
+                        <a:srgbClr val="C9D1D8"/>
+                      </a:solidFill>
+                      <a:prstDash val="solid"/>
+                      <a:round/>
+                      <a:headEnd type="none" w="med" len="med"/>
+                      <a:tailEnd type="none" w="med" len="med"/>
+                    </a:lnT>
+                    <a:lnB w="9525" cap="flat" cmpd="sng" algn="ctr">
+                      <a:solidFill>
+                        <a:srgbClr val="C9D1D8"/>
+                      </a:solidFill>
+                      <a:prstDash val="solid"/>
+                      <a:round/>
+                      <a:headEnd type="none" w="med" len="med"/>
+                      <a:tailEnd type="none" w="med" len="med"/>
+                    </a:lnB>
+                    <a:solidFill>
+                      <a:srgbClr val="EEF2F5"/>
+                    </a:solidFill>
+                  </a:tcPr>
+                </a:tc>
+              </a:tr>
+              <a:tr h="731520">
+                <a:tc>
+                  <a:txBody>
+                    <a:bodyPr/>
+                    <a:lstStyle/>
+                    <a:p>
+                      <a:pPr algn="l" indent="0" marL="0">
+                        <a:buNone/>
+                      </a:pPr>
+                      <a:r>
+                        <a:rPr lang="en-US" sz="1050" b="1" dirty="0">
+                          <a:solidFill>
+                            <a:srgbClr val="22303C"/>
+                          </a:solidFill>
+                          <a:latin typeface="Calibri" pitchFamily="34" charset="0"/>
+                          <a:ea typeface="Calibri" pitchFamily="34" charset="-122"/>
+                          <a:cs typeface="Calibri" pitchFamily="34" charset="-120"/>
+                        </a:rPr>
+                        <a:t>It skipped the cheap gate before expensive folds, and never looked at its own ensemble</a:t>
+                      </a:r>
+                      <a:endParaRPr lang="en-US" sz="1050" dirty="0">
+                        <a:latin typeface="Calibri" charset="0"/>
+                        <a:ea typeface="Calibri" charset="0"/>
+                        <a:cs typeface="Calibri" charset="0"/>
+                      </a:endParaRPr>
+                    </a:p>
+                  </a:txBody>
+                  <a:tcPr marL="82296" marR="82296" marT="82296" marB="82296" anchor="ctr">
+                    <a:lnL w="9525" cap="flat" cmpd="sng" algn="ctr">
+                      <a:solidFill>
+                        <a:srgbClr val="C9D1D8"/>
+                      </a:solidFill>
+                      <a:prstDash val="solid"/>
+                      <a:round/>
+                      <a:headEnd type="none" w="med" len="med"/>
+                      <a:tailEnd type="none" w="med" len="med"/>
+                    </a:lnL>
+                    <a:lnR w="9525" cap="flat" cmpd="sng" algn="ctr">
+                      <a:solidFill>
+                        <a:srgbClr val="C9D1D8"/>
+                      </a:solidFill>
+                      <a:prstDash val="solid"/>
+                      <a:round/>
+                      <a:headEnd type="none" w="med" len="med"/>
+                      <a:tailEnd type="none" w="med" len="med"/>
+                    </a:lnR>
+                    <a:lnT w="9525" cap="flat" cmpd="sng" algn="ctr">
+                      <a:solidFill>
+                        <a:srgbClr val="C9D1D8"/>
+                      </a:solidFill>
+                      <a:prstDash val="solid"/>
+                      <a:round/>
+                      <a:headEnd type="none" w="med" len="med"/>
+                      <a:tailEnd type="none" w="med" len="med"/>
+                    </a:lnT>
+                    <a:lnB w="9525" cap="flat" cmpd="sng" algn="ctr">
+                      <a:solidFill>
+                        <a:srgbClr val="C9D1D8"/>
+                      </a:solidFill>
+                      <a:prstDash val="solid"/>
+                      <a:round/>
+                      <a:headEnd type="none" w="med" len="med"/>
+                      <a:tailEnd type="none" w="med" len="med"/>
+                    </a:lnB>
+                    <a:solidFill>
+                      <a:srgbClr val="FFFFFF"/>
+                    </a:solidFill>
+                  </a:tcPr>
+                </a:tc>
+                <a:tc>
+                  <a:txBody>
+                    <a:bodyPr/>
+                    <a:lstStyle/>
+                    <a:p>
+                      <a:pPr algn="l" indent="0" marL="0">
+                        <a:buNone/>
+                      </a:pPr>
+                      <a:r>
+                        <a:rPr lang="en-US" sz="1050" dirty="0">
+                          <a:solidFill>
+                            <a:srgbClr val="22303C"/>
+                          </a:solidFill>
+                          <a:latin typeface="Calibri" pitchFamily="34" charset="0"/>
+                          <a:ea typeface="Calibri" pitchFamily="34" charset="-122"/>
+                          <a:cs typeface="Calibri" pitchFamily="34" charset="-120"/>
+                        </a:rPr>
+                        <a:t>The engine does not rely on the reasoner's discipline: gate 5 and the interlock refuse on cost BEFORE anything runs, and a policy cannot name a tool parameter at all.</a:t>
+                      </a:r>
+                      <a:endParaRPr lang="en-US" sz="1050" dirty="0">
+                        <a:latin typeface="Calibri" charset="0"/>
+                        <a:ea typeface="Calibri" charset="0"/>
+                        <a:cs typeface="Calibri" charset="0"/>
+                      </a:endParaRPr>
+                    </a:p>
+                  </a:txBody>
+                  <a:tcPr marL="82296" marR="82296" marT="82296" marB="82296" anchor="ctr">
+                    <a:lnL w="9525" cap="flat" cmpd="sng" algn="ctr">
+                      <a:solidFill>
+                        <a:srgbClr val="C9D1D8"/>
+                      </a:solidFill>
+                      <a:prstDash val="solid"/>
+                      <a:round/>
+                      <a:headEnd type="none" w="med" len="med"/>
+                      <a:tailEnd type="none" w="med" len="med"/>
+                    </a:lnL>
+                    <a:lnR w="9525" cap="flat" cmpd="sng" algn="ctr">
+                      <a:solidFill>
+                        <a:srgbClr val="C9D1D8"/>
+                      </a:solidFill>
+                      <a:prstDash val="solid"/>
+                      <a:round/>
+                      <a:headEnd type="none" w="med" len="med"/>
+                      <a:tailEnd type="none" w="med" len="med"/>
+                    </a:lnR>
+                    <a:lnT w="9525" cap="flat" cmpd="sng" algn="ctr">
+                      <a:solidFill>
+                        <a:srgbClr val="C9D1D8"/>
+                      </a:solidFill>
+                      <a:prstDash val="solid"/>
+                      <a:round/>
+                      <a:headEnd type="none" w="med" len="med"/>
+                      <a:tailEnd type="none" w="med" len="med"/>
+                    </a:lnT>
+                    <a:lnB w="9525" cap="flat" cmpd="sng" algn="ctr">
+                      <a:solidFill>
+                        <a:srgbClr val="C9D1D8"/>
+                      </a:solidFill>
+                      <a:prstDash val="solid"/>
+                      <a:round/>
+                      <a:headEnd type="none" w="med" len="med"/>
+                      <a:tailEnd type="none" w="med" len="med"/>
+                    </a:lnB>
+                    <a:solidFill>
+                      <a:srgbClr val="FFFFFF"/>
+                    </a:solidFill>
+                  </a:tcPr>
+                </a:tc>
+              </a:tr>
+              <a:tr h="731520">
+                <a:tc>
+                  <a:txBody>
+                    <a:bodyPr/>
+                    <a:lstStyle/>
+                    <a:p>
+                      <a:pPr algn="l" indent="0" marL="0">
+                        <a:buNone/>
+                      </a:pPr>
+                      <a:r>
+                        <a:rPr lang="en-US" sz="1050" b="1" dirty="0">
+                          <a:solidFill>
+                            <a:srgbClr val="22303C"/>
+                          </a:solidFill>
+                          <a:latin typeface="Calibri" pitchFamily="34" charset="0"/>
+                          <a:ea typeface="Calibri" pitchFamily="34" charset="-122"/>
+                          <a:cs typeface="Calibri" pitchFamily="34" charset="-120"/>
+                        </a:rPr>
+                        <a:t>A work dir the container could not see read exactly like a model failure</a:t>
+                      </a:r>
+                      <a:endParaRPr lang="en-US" sz="1050" dirty="0">
+                        <a:latin typeface="Calibri" charset="0"/>
+                        <a:ea typeface="Calibri" charset="0"/>
+                        <a:cs typeface="Calibri" charset="0"/>
+                      </a:endParaRPr>
+                    </a:p>
+                  </a:txBody>
+                  <a:tcPr marL="82296" marR="82296" marT="82296" marB="82296" anchor="ctr">
+                    <a:lnL w="9525" cap="flat" cmpd="sng" algn="ctr">
+                      <a:solidFill>
+                        <a:srgbClr val="C9D1D8"/>
+                      </a:solidFill>
+                      <a:prstDash val="solid"/>
+                      <a:round/>
+                      <a:headEnd type="none" w="med" len="med"/>
+                      <a:tailEnd type="none" w="med" len="med"/>
+                    </a:lnL>
+                    <a:lnR w="9525" cap="flat" cmpd="sng" algn="ctr">
+                      <a:solidFill>
+                        <a:srgbClr val="C9D1D8"/>
+                      </a:solidFill>
+                      <a:prstDash val="solid"/>
+                      <a:round/>
+                      <a:headEnd type="none" w="med" len="med"/>
+                      <a:tailEnd type="none" w="med" len="med"/>
+                    </a:lnR>
+                    <a:lnT w="9525" cap="flat" cmpd="sng" algn="ctr">
+                      <a:solidFill>
+                        <a:srgbClr val="C9D1D8"/>
+                      </a:solidFill>
+                      <a:prstDash val="solid"/>
+                      <a:round/>
+                      <a:headEnd type="none" w="med" len="med"/>
+                      <a:tailEnd type="none" w="med" len="med"/>
+                    </a:lnT>
+                    <a:lnB w="9525" cap="flat" cmpd="sng" algn="ctr">
+                      <a:solidFill>
+                        <a:srgbClr val="C9D1D8"/>
+                      </a:solidFill>
+                      <a:prstDash val="solid"/>
+                      <a:round/>
+                      <a:headEnd type="none" w="med" len="med"/>
+                      <a:tailEnd type="none" w="med" len="med"/>
+                    </a:lnB>
+                    <a:solidFill>
+                      <a:srgbClr val="EEF2F5"/>
+                    </a:solidFill>
+                  </a:tcPr>
+                </a:tc>
+                <a:tc>
+                  <a:txBody>
+                    <a:bodyPr/>
+                    <a:lstStyle/>
+                    <a:p>
+                      <a:pPr algn="l" indent="0" marL="0">
+                        <a:buNone/>
+                      </a:pPr>
+                      <a:r>
+                        <a:rPr lang="en-US" sz="1050" dirty="0">
+                          <a:solidFill>
+                            <a:srgbClr val="22303C"/>
+                          </a:solidFill>
+                          <a:latin typeface="Calibri" pitchFamily="34" charset="0"/>
+                          <a:ea typeface="Calibri" pitchFamily="34" charset="-122"/>
+                          <a:cs typeface="Calibri" pitchFamily="34" charset="-120"/>
+                        </a:rPr>
+                        <a:t>Exactly the class `impress-a preflight` exists for — and it would NOT have caught this one: it checks the login node, not what a container binds. An honest gap.</a:t>
+                      </a:r>
+                      <a:endParaRPr lang="en-US" sz="1050" dirty="0">
+                        <a:latin typeface="Calibri" charset="0"/>
+                        <a:ea typeface="Calibri" charset="0"/>
+                        <a:cs typeface="Calibri" charset="0"/>
+                      </a:endParaRPr>
+                    </a:p>
+                  </a:txBody>
+                  <a:tcPr marL="82296" marR="82296" marT="82296" marB="82296" anchor="ctr">
+                    <a:lnL w="9525" cap="flat" cmpd="sng" algn="ctr">
+                      <a:solidFill>
+                        <a:srgbClr val="C9D1D8"/>
+                      </a:solidFill>
+                      <a:prstDash val="solid"/>
+                      <a:round/>
+                      <a:headEnd type="none" w="med" len="med"/>
+                      <a:tailEnd type="none" w="med" len="med"/>
+                    </a:lnL>
+                    <a:lnR w="9525" cap="flat" cmpd="sng" algn="ctr">
+                      <a:solidFill>
+                        <a:srgbClr val="C9D1D8"/>
+                      </a:solidFill>
+                      <a:prstDash val="solid"/>
+                      <a:round/>
+                      <a:headEnd type="none" w="med" len="med"/>
+                      <a:tailEnd type="none" w="med" len="med"/>
+                    </a:lnR>
+                    <a:lnT w="9525" cap="flat" cmpd="sng" algn="ctr">
+                      <a:solidFill>
+                        <a:srgbClr val="C9D1D8"/>
+                      </a:solidFill>
+                      <a:prstDash val="solid"/>
+                      <a:round/>
+                      <a:headEnd type="none" w="med" len="med"/>
+                      <a:tailEnd type="none" w="med" len="med"/>
+                    </a:lnT>
+                    <a:lnB w="9525" cap="flat" cmpd="sng" algn="ctr">
+                      <a:solidFill>
+                        <a:srgbClr val="C9D1D8"/>
+                      </a:solidFill>
+                      <a:prstDash val="solid"/>
+                      <a:round/>
+                      <a:headEnd type="none" w="med" len="med"/>
+                      <a:tailEnd type="none" w="med" len="med"/>
+                    </a:lnB>
+                    <a:solidFill>
+                      <a:srgbClr val="EEF2F5"/>
+                    </a:solidFill>
+                  </a:tcPr>
+                </a:tc>
+              </a:tr>
+              <a:tr h="731520">
+                <a:tc>
+                  <a:txBody>
+                    <a:bodyPr/>
+                    <a:lstStyle/>
+                    <a:p>
+                      <a:pPr algn="l" indent="0" marL="0">
+                        <a:buNone/>
+                      </a:pPr>
+                      <a:r>
+                        <a:rPr lang="en-US" sz="1050" b="1" dirty="0">
+                          <a:solidFill>
+                            <a:srgbClr val="22303C"/>
+                          </a:solidFill>
+                          <a:latin typeface="Calibri" pitchFamily="34" charset="0"/>
+                          <a:ea typeface="Calibri" pitchFamily="34" charset="-122"/>
+                          <a:cs typeface="Calibri" pitchFamily="34" charset="-120"/>
+                        </a:rPr>
+                        <a:t>The model can live inside the allocation: 259 turns, $0 of API, served as one more task</a:t>
+                      </a:r>
+                      <a:endParaRPr lang="en-US" sz="1050" dirty="0">
+                        <a:latin typeface="Calibri" charset="0"/>
+                        <a:ea typeface="Calibri" charset="0"/>
+                        <a:cs typeface="Calibri" charset="0"/>
+                      </a:endParaRPr>
+                    </a:p>
+                  </a:txBody>
+                  <a:tcPr marL="82296" marR="82296" marT="82296" marB="82296" anchor="ctr">
+                    <a:lnL w="9525" cap="flat" cmpd="sng" algn="ctr">
+                      <a:solidFill>
+                        <a:srgbClr val="C9D1D8"/>
+                      </a:solidFill>
+                      <a:prstDash val="solid"/>
+                      <a:round/>
+                      <a:headEnd type="none" w="med" len="med"/>
+                      <a:tailEnd type="none" w="med" len="med"/>
+                    </a:lnL>
+                    <a:lnR w="9525" cap="flat" cmpd="sng" algn="ctr">
+                      <a:solidFill>
+                        <a:srgbClr val="C9D1D8"/>
+                      </a:solidFill>
+                      <a:prstDash val="solid"/>
+                      <a:round/>
+                      <a:headEnd type="none" w="med" len="med"/>
+                      <a:tailEnd type="none" w="med" len="med"/>
+                    </a:lnR>
+                    <a:lnT w="9525" cap="flat" cmpd="sng" algn="ctr">
+                      <a:solidFill>
+                        <a:srgbClr val="C9D1D8"/>
+                      </a:solidFill>
+                      <a:prstDash val="solid"/>
+                      <a:round/>
+                      <a:headEnd type="none" w="med" len="med"/>
+                      <a:tailEnd type="none" w="med" len="med"/>
+                    </a:lnT>
+                    <a:lnB w="9525" cap="flat" cmpd="sng" algn="ctr">
+                      <a:solidFill>
+                        <a:srgbClr val="C9D1D8"/>
+                      </a:solidFill>
+                      <a:prstDash val="solid"/>
+                      <a:round/>
+                      <a:headEnd type="none" w="med" len="med"/>
+                      <a:tailEnd type="none" w="med" len="med"/>
+                    </a:lnB>
+                    <a:solidFill>
+                      <a:srgbClr val="FFFFFF"/>
+                    </a:solidFill>
+                  </a:tcPr>
+                </a:tc>
+                <a:tc>
+                  <a:txBody>
+                    <a:bodyPr/>
+                    <a:lstStyle/>
+                    <a:p>
+                      <a:pPr algn="l" indent="0" marL="0">
+                        <a:buNone/>
+                      </a:pPr>
+                      <a:r>
+                        <a:rPr lang="en-US" sz="1050" dirty="0">
+                          <a:solidFill>
+                            <a:srgbClr val="22303C"/>
+                          </a:solidFill>
+                          <a:latin typeface="Calibri" pitchFamily="34" charset="0"/>
+                          <a:ea typeface="Calibri" pitchFamily="34" charset="-122"/>
+                          <a:cs typeface="Calibri" pitchFamily="34" charset="-120"/>
+                        </a:rPr>
+                        <a:t>That is what model C's endpoint could be. Today `--model C` with no caller falls back to model D after 5 s rather than failing — ask 5.</a:t>
+                      </a:r>
+                      <a:endParaRPr lang="en-US" sz="1050" dirty="0">
+                        <a:latin typeface="Calibri" charset="0"/>
+                        <a:ea typeface="Calibri" charset="0"/>
+                        <a:cs typeface="Calibri" charset="0"/>
+                      </a:endParaRPr>
+                    </a:p>
+                  </a:txBody>
+                  <a:tcPr marL="82296" marR="82296" marT="82296" marB="82296" anchor="ctr">
+                    <a:lnL w="9525" cap="flat" cmpd="sng" algn="ctr">
+                      <a:solidFill>
+                        <a:srgbClr val="C9D1D8"/>
+                      </a:solidFill>
+                      <a:prstDash val="solid"/>
+                      <a:round/>
+                      <a:headEnd type="none" w="med" len="med"/>
+                      <a:tailEnd type="none" w="med" len="med"/>
+                    </a:lnL>
+                    <a:lnR w="9525" cap="flat" cmpd="sng" algn="ctr">
+                      <a:solidFill>
+                        <a:srgbClr val="C9D1D8"/>
+                      </a:solidFill>
+                      <a:prstDash val="solid"/>
+                      <a:round/>
+                      <a:headEnd type="none" w="med" len="med"/>
+                      <a:tailEnd type="none" w="med" len="med"/>
+                    </a:lnR>
+                    <a:lnT w="9525" cap="flat" cmpd="sng" algn="ctr">
+                      <a:solidFill>
+                        <a:srgbClr val="C9D1D8"/>
+                      </a:solidFill>
+                      <a:prstDash val="solid"/>
+                      <a:round/>
+                      <a:headEnd type="none" w="med" len="med"/>
+                      <a:tailEnd type="none" w="med" len="med"/>
+                    </a:lnT>
+                    <a:lnB w="9525" cap="flat" cmpd="sng" algn="ctr">
+                      <a:solidFill>
+                        <a:srgbClr val="C9D1D8"/>
+                      </a:solidFill>
+                      <a:prstDash val="solid"/>
+                      <a:round/>
+                      <a:headEnd type="none" w="med" len="med"/>
+                      <a:tailEnd type="none" w="med" len="med"/>
+                    </a:lnB>
+                    <a:solidFill>
+                      <a:srgbClr val="FFFFFF"/>
+                    </a:solidFill>
+                  </a:tcPr>
+                </a:tc>
+              </a:tr>
+            </a:tbl>
+          </a:graphicData>
+        </a:graphic>
+      </p:graphicFrame>
+      <p:sp>
+        <p:nvSpPr>
+          <p:cNvPr id="5" name="Shape 2"/>
+          <p:cNvSpPr/>
+          <p:nvPr/>
+        </p:nvSpPr>
+        <p:spPr>
+          <a:xfrm>
+            <a:off x="457200" y="5349240"/>
+            <a:ext cx="11277295" cy="914400"/>
+          </a:xfrm>
+          <a:prstGeom prst="rect">
+            <a:avLst/>
+          </a:prstGeom>
+          <a:solidFill>
+            <a:srgbClr val="F9E0DD"/>
+          </a:solidFill>
+          <a:ln w="25400">
+            <a:solidFill>
+              <a:srgbClr val="C0392B"/>
+            </a:solidFill>
+            <a:prstDash val="solid"/>
+          </a:ln>
+        </p:spPr>
+      </p:sp>
+      <p:sp>
+        <p:nvSpPr>
+          <p:cNvPr id="6" name="Text 3"/>
+          <p:cNvSpPr txBox="1"/>
+          <p:nvPr/>
+        </p:nvSpPr>
+        <p:spPr>
+          <a:xfrm>
+            <a:off x="603504" y="5449824"/>
+            <a:ext cx="10984687" cy="731520"/>
+          </a:xfrm>
+          <a:prstGeom prst="rect">
+            <a:avLst/>
+          </a:prstGeom>
+          <a:noFill/>
+          <a:ln/>
+        </p:spPr>
+        <p:txBody>
+          <a:bodyPr wrap="square" lIns="0" tIns="0" rIns="0" bIns="0" rtlCol="0" anchor="t"/>
+          <a:lstStyle/>
+          <a:p>
+            <a:pPr indent="0" marL="0">
+              <a:buNone/>
+            </a:pPr>
+            <a:r>
+              <a:rPr lang="en-US" sz="1200" b="1" dirty="0">
+                <a:solidFill>
+                  <a:srgbClr val="C0392B"/>
+                </a:solidFill>
+                <a:latin typeface="Calibri" pitchFamily="34" charset="0"/>
+                <a:ea typeface="Calibri" pitchFamily="34" charset="-122"/>
+                <a:cs typeface="Calibri" pitchFamily="34" charset="-120"/>
+              </a:rPr>
+              <a:t>Say this out loud:  </a:t>
+            </a:r>
+            <a:pPr indent="0" marL="0">
+              <a:buNone/>
+            </a:pPr>
+            <a:r>
+              <a:rPr lang="en-US" sz="1200" dirty="0">
+                <a:solidFill>
+                  <a:srgbClr val="22303C"/>
+                </a:solidFill>
+                <a:latin typeface="Calibri" pitchFamily="34" charset="0"/>
+                <a:ea typeface="Calibri" pitchFamily="34" charset="-122"/>
+                <a:cs typeface="Calibri" pitchFamily="34" charset="-120"/>
+              </a:rPr>
+              <a:t>none of that ran through this package. Different code, no campaign engine, no gates, no trust ledger, one pipeline per GPU. It is evidence that the idea works on this hardware, and it is not evidence that this engine does. The component claim is still empty, and the nearest thing to a user it has is still me.</a:t>
+            </a:r>
+            <a:endParaRPr lang="en-US" sz="1200" dirty="0"/>
+          </a:p>
+        </p:txBody>
+      </p:sp>
+      <p:sp>
+        <p:nvSpPr>
+          <p:cNvPr id="8" name="Text 4"/>
+          <p:cNvSpPr txBox="1"/>
+          <p:nvPr/>
+        </p:nvSpPr>
+        <p:spPr>
+          <a:xfrm>
+            <a:off x="457200" y="6492240"/>
+            <a:ext cx="11277295" cy="228600"/>
+          </a:xfrm>
+          <a:prstGeom prst="rect">
+            <a:avLst/>
+          </a:prstGeom>
+          <a:noFill/>
+          <a:ln/>
+        </p:spPr>
+        <p:txBody>
+          <a:bodyPr wrap="square" lIns="0" tIns="0" rIns="0" bIns="0" rtlCol="0" anchor="t"/>
+          <a:lstStyle/>
+          <a:p>
+            <a:pPr indent="0" marL="0">
+              <a:buNone/>
+            </a:pPr>
+            <a:r>
+              <a:rPr lang="en-US" sz="1000" i="1" dirty="0">
+                <a:solidFill>
+                  <a:srgbClr val="5E6B75"/>
+                </a:solidFill>
+                <a:latin typeface="Calibri" pitchFamily="34" charset="0"/>
+                <a:ea typeface="Calibri" pitchFamily="34" charset="-122"/>
+                <a:cs typeface="Calibri" pitchFamily="34" charset="-120"/>
+              </a:rPr>
+              <a:t>the live figures are TRANSCRIBED · examples/agentic_small_molecule_binding/CLAUDE.md - transcribed from its revision history; the run outputs live under $WORK_DIR on Delta, not here</a:t>
+            </a:r>
+            <a:endParaRPr lang="en-US" sz="1000" dirty="0"/>
+          </a:p>
+        </p:txBody>
+      </p:sp>
+    </p:spTree>
+  </p:cSld>
+  <p:clrMapOvr>
+    <a:masterClrMapping/>
+  </p:clrMapOvr>
+</p:sld>
+</file>
+
+<file path=ppt/slides/slide23.xml><?xml version="1.0" encoding="utf-8"?>
+<p:sld xmlns:a="http://schemas.openxmlformats.org/drawingml/2006/main" xmlns:r="http://schemas.openxmlformats.org/officeDocument/2006/relationships" xmlns:p="http://schemas.openxmlformats.org/presentationml/2006/main">
+  <p:cSld name="Slide 23">
+    <p:spTree>
+      <p:nvGrpSpPr>
+        <p:cNvPr id="1" name=""/>
+        <p:cNvGrpSpPr/>
+        <p:nvPr/>
+      </p:nvGrpSpPr>
+      <p:grpSpPr>
+        <a:xfrm>
+          <a:off x="0" y="0"/>
+          <a:ext cx="0" cy="0"/>
+          <a:chOff x="0" y="0"/>
+          <a:chExt cx="0" cy="0"/>
+        </a:xfrm>
+      </p:grpSpPr>
+      <p:sp>
+        <p:nvSpPr>
+          <p:cNvPr id="2" name="Text 0"/>
+          <p:cNvSpPr txBox="1"/>
+          <p:nvPr/>
+        </p:nvSpPr>
+        <p:spPr>
+          <a:xfrm>
+            <a:off x="457200" y="320040"/>
+            <a:ext cx="8229600" cy="274320"/>
+          </a:xfrm>
+          <a:prstGeom prst="rect">
+            <a:avLst/>
+          </a:prstGeom>
+          <a:noFill/>
+          <a:ln/>
+        </p:spPr>
+        <p:txBody>
+          <a:bodyPr wrap="square" lIns="0" tIns="0" rIns="0" bIns="0" rtlCol="0" anchor="t"/>
+          <a:lstStyle/>
+          <a:p>
+            <a:pPr indent="0" marL="0">
+              <a:buNone/>
+            </a:pPr>
+            <a:r>
+              <a:rPr lang="en-US" sz="1200" b="1" spc="200" kern="0" dirty="0">
+                <a:solidFill>
+                  <a:srgbClr val="1E6470"/>
+                </a:solidFill>
+                <a:latin typeface="Calibri" pitchFamily="34" charset="0"/>
+                <a:ea typeface="Calibri" pitchFamily="34" charset="-122"/>
+                <a:cs typeface="Calibri" pitchFamily="34" charset="-120"/>
+              </a:rPr>
+              <a:t>ACT 3 · USABILITY</a:t>
+            </a:r>
+            <a:endParaRPr lang="en-US" sz="1200" dirty="0"/>
+          </a:p>
+        </p:txBody>
+      </p:sp>
+      <p:sp>
+        <p:nvSpPr>
+          <p:cNvPr id="3" name="Text 1"/>
+          <p:cNvSpPr txBox="1"/>
+          <p:nvPr/>
+        </p:nvSpPr>
+        <p:spPr>
+          <a:xfrm>
+            <a:off x="457200" y="566928"/>
+            <a:ext cx="11277295" cy="731520"/>
+          </a:xfrm>
+          <a:prstGeom prst="rect">
+            <a:avLst/>
+          </a:prstGeom>
+          <a:noFill/>
+          <a:ln/>
+        </p:spPr>
+        <p:txBody>
+          <a:bodyPr wrap="square" lIns="0" tIns="0" rIns="0" bIns="0" rtlCol="0" anchor="t"/>
+          <a:lstStyle/>
+          <a:p>
+            <a:pPr indent="0" marL="0">
+              <a:buNone/>
+            </a:pPr>
+            <a:r>
+              <a:rPr lang="en-US" sz="2800" b="1" dirty="0">
+                <a:solidFill>
+                  <a:srgbClr val="16222B"/>
+                </a:solidFill>
+                <a:latin typeface="Cambria" pitchFamily="34" charset="0"/>
+                <a:ea typeface="Cambria" pitchFamily="34" charset="-122"/>
+                <a:cs typeface="Cambria" pitchFamily="34" charset="-120"/>
+              </a:rPr>
+              <a:t>As an application: one command, one honest gate</a:t>
+            </a:r>
+            <a:endParaRPr lang="en-US" sz="2800" dirty="0"/>
+          </a:p>
+        </p:txBody>
+      </p:sp>
+      <p:sp>
+        <p:nvSpPr>
+          <p:cNvPr id="4" name="Shape 2"/>
+          <p:cNvSpPr/>
+          <p:nvPr/>
+        </p:nvSpPr>
+        <p:spPr>
+          <a:xfrm>
+            <a:off x="457200" y="1371600"/>
+            <a:ext cx="6858000" cy="2286000"/>
+          </a:xfrm>
+          <a:prstGeom prst="rect">
+            <a:avLst/>
+          </a:prstGeom>
+          <a:solidFill>
+            <a:srgbClr val="16222B"/>
+          </a:solidFill>
+          <a:ln w="12700">
+            <a:solidFill>
+              <a:srgbClr val="16222B"/>
+            </a:solidFill>
+            <a:prstDash val="solid"/>
+          </a:ln>
+        </p:spPr>
+      </p:sp>
+      <p:sp>
+        <p:nvSpPr>
+          <p:cNvPr id="5" name="Text 3"/>
+          <p:cNvSpPr txBox="1"/>
+          <p:nvPr/>
+        </p:nvSpPr>
+        <p:spPr>
+          <a:xfrm>
+            <a:off x="557784" y="1463040"/>
+            <a:ext cx="6656832" cy="2103120"/>
+          </a:xfrm>
+          <a:prstGeom prst="rect">
+            <a:avLst/>
+          </a:prstGeom>
+          <a:noFill/>
+          <a:ln/>
+        </p:spPr>
+        <p:txBody>
+          <a:bodyPr wrap="square" lIns="0" tIns="0" rIns="0" bIns="0" rtlCol="0" anchor="t"/>
+          <a:lstStyle/>
+          <a:p>
+            <a:pPr indent="0" marL="0">
+              <a:lnSpc>
+                <a:spcPts val="1300"/>
+              </a:lnSpc>
+              <a:buNone/>
+            </a:pPr>
+            <a:r>
+              <a:rPr lang="en-US" sz="950" dirty="0">
+                <a:solidFill>
+                  <a:srgbClr val="DCE5EC"/>
+                </a:solidFill>
+                <a:latin typeface="Consolas" pitchFamily="34" charset="0"/>
+                <a:ea typeface="Consolas" pitchFamily="34" charset="-122"/>
+                <a:cs typeface="Consolas" pitchFamily="34" charset="-120"/>
+              </a:rPr>
+              <a:t>$ impress-a preflight campaigns/delta-small-molecule-smoke.yaml</a:t>
+            </a:r>
+            <a:endParaRPr lang="en-US" sz="950" dirty="0"/>
+          </a:p>
+          <a:p>
+            <a:pPr indent="0" marL="0">
+              <a:lnSpc>
+                <a:spcPts val="1300"/>
+              </a:lnSpc>
+              <a:buNone/>
+            </a:pPr>
+            <a:endParaRPr lang="en-US" sz="950" dirty="0"/>
+          </a:p>
+          <a:p>
+            <a:pPr indent="0" marL="0">
+              <a:lnSpc>
+                <a:spcPts val="1300"/>
+              </a:lnSpc>
+              <a:buNone/>
+            </a:pPr>
+            <a:r>
+              <a:rPr lang="en-US" sz="950" dirty="0">
+                <a:solidFill>
+                  <a:srgbClr val="DCE5EC"/>
+                </a:solidFill>
+                <a:latin typeface="Consolas" pitchFamily="34" charset="0"/>
+                <a:ea typeface="Consolas" pitchFamily="34" charset="-122"/>
+                <a:cs typeface="Consolas" pitchFamily="34" charset="-120"/>
+              </a:rPr>
+              <a:t>  preflight</a:t>
+            </a:r>
+            <a:endParaRPr lang="en-US" sz="950" dirty="0"/>
+          </a:p>
+          <a:p>
+            <a:pPr indent="0" marL="0">
+              <a:lnSpc>
+                <a:spcPts val="1300"/>
+              </a:lnSpc>
+              <a:buNone/>
+            </a:pPr>
+            <a:endParaRPr lang="en-US" sz="950" dirty="0"/>
+          </a:p>
+          <a:p>
+            <a:pPr indent="0" marL="0">
+              <a:lnSpc>
+                <a:spcPts val="1300"/>
+              </a:lnSpc>
+              <a:buNone/>
+            </a:pPr>
+            <a:r>
+              <a:rPr lang="en-US" sz="950" dirty="0">
+                <a:solidFill>
+                  <a:srgbClr val="DCE5EC"/>
+                </a:solidFill>
+                <a:latin typeface="Consolas" pitchFamily="34" charset="0"/>
+                <a:ea typeface="Consolas" pitchFamily="34" charset="-122"/>
+                <a:cs typeface="Consolas" pitchFamily="34" charset="-120"/>
+              </a:rPr>
+              <a:t>    [ok  ] $WORK_DIR            /work/nvme/&lt;project&gt;/&lt;user&gt;</a:t>
+            </a:r>
+            <a:endParaRPr lang="en-US" sz="950" dirty="0"/>
+          </a:p>
+          <a:p>
+            <a:pPr indent="0" marL="0">
+              <a:lnSpc>
+                <a:spcPts val="1300"/>
+              </a:lnSpc>
+              <a:buNone/>
+            </a:pPr>
+            <a:r>
+              <a:rPr lang="en-US" sz="950" dirty="0">
+                <a:solidFill>
+                  <a:srgbClr val="DCE5EC"/>
+                </a:solidFill>
+                <a:latin typeface="Consolas" pitchFamily="34" charset="0"/>
+                <a:ea typeface="Consolas" pitchFamily="34" charset="-122"/>
+                <a:cs typeface="Consolas" pitchFamily="34" charset="-120"/>
+              </a:rPr>
+              <a:t>    [FAIL] $MPNN_DIR            no model_params/ - run its get_model_params.sh</a:t>
+            </a:r>
+            <a:endParaRPr lang="en-US" sz="950" dirty="0"/>
+          </a:p>
+          <a:p>
+            <a:pPr indent="0" marL="0">
+              <a:lnSpc>
+                <a:spcPts val="1300"/>
+              </a:lnSpc>
+              <a:buNone/>
+            </a:pPr>
+            <a:r>
+              <a:rPr lang="en-US" sz="950" dirty="0">
+                <a:solidFill>
+                  <a:srgbClr val="DCE5EC"/>
+                </a:solidFill>
+                <a:latin typeface="Consolas" pitchFamily="34" charset="0"/>
+                <a:ea typeface="Consolas" pitchFamily="34" charset="-122"/>
+                <a:cs typeface="Consolas" pitchFamily="34" charset="-120"/>
+              </a:rPr>
+              <a:t>    [ok  ] boltz CCD cache      extraction proven complete</a:t>
+            </a:r>
+            <a:endParaRPr lang="en-US" sz="950" dirty="0"/>
+          </a:p>
+          <a:p>
+            <a:pPr indent="0" marL="0">
+              <a:lnSpc>
+                <a:spcPts val="1300"/>
+              </a:lnSpc>
+              <a:buNone/>
+            </a:pPr>
+            <a:r>
+              <a:rPr lang="en-US" sz="950" dirty="0">
+                <a:solidFill>
+                  <a:srgbClr val="DCE5EC"/>
+                </a:solidFill>
+                <a:latin typeface="Consolas" pitchFamily="34" charset="0"/>
+                <a:ea typeface="Consolas" pitchFamily="34" charset="-122"/>
+                <a:cs typeface="Consolas" pitchFamily="34" charset="-120"/>
+              </a:rPr>
+              <a:t>    [warn] pyrosetta            timed out after 120s - a loaded login node can</a:t>
+            </a:r>
+            <a:endParaRPr lang="en-US" sz="950" dirty="0"/>
+          </a:p>
+          <a:p>
+            <a:pPr indent="0" marL="0">
+              <a:lnSpc>
+                <a:spcPts val="1300"/>
+              </a:lnSpc>
+              <a:buNone/>
+            </a:pPr>
+            <a:r>
+              <a:rPr lang="en-US" sz="950" dirty="0">
+                <a:solidFill>
+                  <a:srgbClr val="DCE5EC"/>
+                </a:solidFill>
+                <a:latin typeface="Consolas" pitchFamily="34" charset="0"/>
+                <a:ea typeface="Consolas" pitchFamily="34" charset="-122"/>
+                <a:cs typeface="Consolas" pitchFamily="34" charset="-120"/>
+              </a:rPr>
+              <a:t>                                take that long to import it; re-run</a:t>
+            </a:r>
+            <a:endParaRPr lang="en-US" sz="950" dirty="0"/>
+          </a:p>
+          <a:p>
+            <a:pPr indent="0" marL="0">
+              <a:lnSpc>
+                <a:spcPts val="1300"/>
+              </a:lnSpc>
+              <a:buNone/>
+            </a:pPr>
+            <a:r>
+              <a:rPr lang="en-US" sz="950" dirty="0">
+                <a:solidFill>
+                  <a:srgbClr val="DCE5EC"/>
+                </a:solidFill>
+                <a:latin typeface="Consolas" pitchFamily="34" charset="0"/>
+                <a:ea typeface="Consolas" pitchFamily="34" charset="-122"/>
+                <a:cs typeface="Consolas" pitchFamily="34" charset="-120"/>
+              </a:rPr>
+              <a:t>    [ok  ] venv on fast storage /work/nvme/&lt;project&gt;/&lt;user&gt;/venv</a:t>
+            </a:r>
+            <a:endParaRPr lang="en-US" sz="950" dirty="0"/>
+          </a:p>
+          <a:p>
+            <a:pPr indent="0" marL="0">
+              <a:lnSpc>
+                <a:spcPts val="1300"/>
+              </a:lnSpc>
+              <a:buNone/>
+            </a:pPr>
+            <a:endParaRPr lang="en-US" sz="950" dirty="0"/>
+          </a:p>
+          <a:p>
+            <a:pPr indent="0" marL="0">
+              <a:lnSpc>
+                <a:spcPts val="1300"/>
+              </a:lnSpc>
+              <a:buNone/>
+            </a:pPr>
+            <a:r>
+              <a:rPr lang="en-US" sz="950" dirty="0">
+                <a:solidFill>
+                  <a:srgbClr val="DCE5EC"/>
+                </a:solidFill>
+                <a:latin typeface="Consolas" pitchFamily="34" charset="0"/>
+                <a:ea typeface="Consolas" pitchFamily="34" charset="-122"/>
+                <a:cs typeface="Consolas" pitchFamily="34" charset="-120"/>
+              </a:rPr>
+              <a:t>  7/9 ok, 1 undetermined (pyrosetta) - missing: $MPNN_DIR</a:t>
+            </a:r>
+            <a:endParaRPr lang="en-US" sz="950" dirty="0"/>
+          </a:p>
+        </p:txBody>
+      </p:sp>
+      <p:sp>
+        <p:nvSpPr>
+          <p:cNvPr id="6" name="Text 4"/>
+          <p:cNvSpPr txBox="1"/>
+          <p:nvPr/>
+        </p:nvSpPr>
+        <p:spPr>
+          <a:xfrm>
+            <a:off x="457200" y="3675888"/>
+            <a:ext cx="6858000" cy="182880"/>
+          </a:xfrm>
+          <a:prstGeom prst="rect">
+            <a:avLst/>
+          </a:prstGeom>
+          <a:noFill/>
+          <a:ln/>
+        </p:spPr>
+        <p:txBody>
+          <a:bodyPr wrap="square" lIns="0" tIns="0" rIns="0" bIns="0" rtlCol="0" anchor="t"/>
+          <a:lstStyle/>
+          <a:p>
+            <a:pPr algn="r" indent="0" marL="0">
+              <a:buNone/>
+            </a:pPr>
+            <a:r>
+              <a:rPr lang="en-US" sz="850" dirty="0">
+                <a:solidFill>
+                  <a:srgbClr val="5E6B75"/>
+                </a:solidFill>
+                <a:latin typeface="Consolas" pitchFamily="34" charset="0"/>
+                <a:ea typeface="Consolas" pitchFamily="34" charset="-122"/>
+                <a:cs typeface="Consolas" pitchFamily="34" charset="-120"/>
+              </a:rPr>
+              <a:t>cli/__init__.py:252 · ILLUSTRATIVE (shape of real output)</a:t>
+            </a:r>
+            <a:endParaRPr lang="en-US" sz="850" dirty="0"/>
+          </a:p>
+        </p:txBody>
+      </p:sp>
+      <p:sp>
+        <p:nvSpPr>
+          <p:cNvPr id="7" name="Shape 5"/>
+          <p:cNvSpPr/>
+          <p:nvPr/>
+        </p:nvSpPr>
+        <p:spPr>
+          <a:xfrm>
+            <a:off x="7543800" y="1371600"/>
+            <a:ext cx="4187952" cy="2286000"/>
+          </a:xfrm>
+          <a:prstGeom prst="rect">
+            <a:avLst/>
+          </a:prstGeom>
+          <a:solidFill>
+            <a:srgbClr val="E4F1EA"/>
+          </a:solidFill>
+          <a:ln w="12700">
+            <a:solidFill>
+              <a:srgbClr val="E4F1EA"/>
+            </a:solidFill>
+            <a:prstDash val="solid"/>
+          </a:ln>
+        </p:spPr>
+      </p:sp>
+      <p:sp>
+        <p:nvSpPr>
+          <p:cNvPr id="8" name="Text 6"/>
+          <p:cNvSpPr txBox="1"/>
+          <p:nvPr/>
+        </p:nvSpPr>
+        <p:spPr>
+          <a:xfrm>
+            <a:off x="7671816" y="1453896"/>
+            <a:ext cx="3931920" cy="274320"/>
+          </a:xfrm>
+          <a:prstGeom prst="rect">
+            <a:avLst/>
+          </a:prstGeom>
+          <a:noFill/>
+          <a:ln/>
+        </p:spPr>
+        <p:txBody>
+          <a:bodyPr wrap="square" lIns="0" tIns="0" rIns="0" bIns="0" rtlCol="0" anchor="t"/>
+          <a:lstStyle/>
+          <a:p>
+            <a:pPr indent="0" marL="0">
+              <a:buNone/>
+            </a:pPr>
+            <a:r>
+              <a:rPr lang="en-US" sz="1300" b="1" dirty="0">
+                <a:solidFill>
+                  <a:srgbClr val="2E7D5B"/>
+                </a:solidFill>
+                <a:latin typeface="Calibri" pitchFamily="34" charset="0"/>
+                <a:ea typeface="Calibri" pitchFamily="34" charset="-122"/>
+                <a:cs typeface="Calibri" pitchFamily="34" charset="-120"/>
+              </a:rPr>
+              <a:t>Why the third state exists</a:t>
+            </a:r>
+            <a:endParaRPr lang="en-US" sz="1300" dirty="0"/>
+          </a:p>
+        </p:txBody>
+      </p:sp>
+      <p:sp>
+        <p:nvSpPr>
+          <p:cNvPr id="9" name="Text 7"/>
+          <p:cNvSpPr txBox="1"/>
+          <p:nvPr/>
+        </p:nvSpPr>
+        <p:spPr>
+          <a:xfrm>
+            <a:off x="7671816" y="1764792"/>
+            <a:ext cx="3931920" cy="1810512"/>
+          </a:xfrm>
+          <a:prstGeom prst="rect">
+            <a:avLst/>
+          </a:prstGeom>
+          <a:noFill/>
+          <a:ln/>
+        </p:spPr>
+        <p:txBody>
+          <a:bodyPr wrap="square" lIns="0" tIns="0" rIns="0" bIns="0" rtlCol="0" anchor="t"/>
+          <a:lstStyle/>
+          <a:p>
+            <a:pPr marL="342900" indent="-342900">
+              <a:spcAft>
+                <a:spcPts val="400"/>
+              </a:spcAft>
+              <a:buSzPct val="100000"/>
+              <a:buChar char="•"/>
+            </a:pPr>
+            <a:r>
+              <a:rPr lang="en-US" sz="1050" dirty="0">
+                <a:solidFill>
+                  <a:srgbClr val="22303C"/>
+                </a:solidFill>
+                <a:latin typeface="Calibri" pitchFamily="34" charset="0"/>
+                <a:ea typeface="Calibri" pitchFamily="34" charset="-122"/>
+                <a:cs typeface="Calibri" pitchFamily="34" charset="-120"/>
+              </a:rPr>
+              <a:t>Every real adapter raises on a missing env var — but only once a task is RUNNING, which on HPC means inside the allocation, after the queue wait.</a:t>
+            </a:r>
+            <a:endParaRPr lang="en-US" sz="1050" dirty="0"/>
+          </a:p>
+          <a:p>
+            <a:pPr marL="342900" indent="-342900">
+              <a:spcAft>
+                <a:spcPts val="400"/>
+              </a:spcAft>
+              <a:buSzPct val="100000"/>
+              <a:buChar char="•"/>
+            </a:pPr>
+            <a:r>
+              <a:rPr lang="en-US" sz="1050" dirty="0">
+                <a:solidFill>
+                  <a:srgbClr val="22303C"/>
+                </a:solidFill>
+                <a:latin typeface="Calibri" pitchFamily="34" charset="0"/>
+                <a:ea typeface="Calibri" pitchFamily="34" charset="-122"/>
+                <a:cs typeface="Calibri" pitchFamily="34" charset="-120"/>
+              </a:rPr>
+              <a:t>`ok` is tri-state: None means UNDETERMINED, not failed. A probe that shells out to import a heavy science stack can take minutes on a busy login node, and reporting that as FAIL trains the reader to ignore the FAIL column.</a:t>
+            </a:r>
+            <a:endParaRPr lang="en-US" sz="1050" dirty="0"/>
+          </a:p>
+        </p:txBody>
+      </p:sp>
+      <p:sp>
+        <p:nvSpPr>
+          <p:cNvPr id="10" name="Shape 8"/>
+          <p:cNvSpPr/>
+          <p:nvPr/>
+        </p:nvSpPr>
+        <p:spPr>
+          <a:xfrm>
+            <a:off x="457200" y="3840480"/>
+            <a:ext cx="5577840" cy="1188720"/>
+          </a:xfrm>
+          <a:prstGeom prst="rect">
+            <a:avLst/>
+          </a:prstGeom>
+          <a:solidFill>
+            <a:srgbClr val="EEF2F5"/>
+          </a:solidFill>
+          <a:ln w="12700">
+            <a:solidFill>
+              <a:srgbClr val="EEF2F5"/>
+            </a:solidFill>
+            <a:prstDash val="solid"/>
+          </a:ln>
+        </p:spPr>
+      </p:sp>
+      <p:sp>
+        <p:nvSpPr>
+          <p:cNvPr id="11" name="Text 9"/>
+          <p:cNvSpPr txBox="1"/>
+          <p:nvPr/>
+        </p:nvSpPr>
+        <p:spPr>
+          <a:xfrm>
+            <a:off x="585216" y="3922776"/>
+            <a:ext cx="5321808" cy="274320"/>
+          </a:xfrm>
+          <a:prstGeom prst="rect">
+            <a:avLst/>
+          </a:prstGeom>
+          <a:noFill/>
+          <a:ln/>
+        </p:spPr>
+        <p:txBody>
+          <a:bodyPr wrap="square" lIns="0" tIns="0" rIns="0" bIns="0" rtlCol="0" anchor="t"/>
+          <a:lstStyle/>
+          <a:p>
+            <a:pPr indent="0" marL="0">
+              <a:buNone/>
+            </a:pPr>
+            <a:r>
+              <a:rPr lang="en-US" sz="1300" b="1" dirty="0">
+                <a:solidFill>
+                  <a:srgbClr val="16222B"/>
+                </a:solidFill>
+                <a:latin typeface="Calibri" pitchFamily="34" charset="0"/>
+                <a:ea typeface="Calibri" pitchFamily="34" charset="-122"/>
+                <a:cs typeface="Calibri" pitchFamily="34" charset="-120"/>
+              </a:rPr>
+              <a:t>The rule that must not erode</a:t>
+            </a:r>
+            <a:endParaRPr lang="en-US" sz="1300" dirty="0"/>
+          </a:p>
+        </p:txBody>
+      </p:sp>
+      <p:sp>
+        <p:nvSpPr>
+          <p:cNvPr id="12" name="Text 10"/>
+          <p:cNvSpPr txBox="1"/>
+          <p:nvPr/>
+        </p:nvSpPr>
+        <p:spPr>
+          <a:xfrm>
+            <a:off x="585216" y="4233672"/>
+            <a:ext cx="5321808" cy="713232"/>
+          </a:xfrm>
+          <a:prstGeom prst="rect">
+            <a:avLst/>
+          </a:prstGeom>
+          <a:noFill/>
+          <a:ln/>
+        </p:spPr>
+        <p:txBody>
+          <a:bodyPr wrap="square" lIns="0" tIns="0" rIns="0" bIns="0" rtlCol="0" anchor="t"/>
+          <a:lstStyle/>
+          <a:p>
+            <a:pPr marL="342900" indent="-342900">
+              <a:spcAft>
+                <a:spcPts val="400"/>
+              </a:spcAft>
+              <a:buSzPct val="100000"/>
+              <a:buChar char="•"/>
+            </a:pPr>
+            <a:r>
+              <a:rPr lang="en-US" sz="1050" dirty="0">
+                <a:solidFill>
+                  <a:srgbClr val="22303C"/>
+                </a:solidFill>
+                <a:latin typeface="Calibri" pitchFamily="34" charset="0"/>
+                <a:ea typeface="Calibri" pitchFamily="34" charset="-122"/>
+                <a:cs typeface="Calibri" pitchFamily="34" charset="-120"/>
+              </a:rPr>
+              <a:t>None is ONLY for a probe that produced no answer. A deterministic negative is always False: a missing `$MPNN_DIR` is a FAIL forever; a pyrosetta *import error* is a FAIL, a pyrosetta *timeout* is undetermined.</a:t>
+            </a:r>
+            <a:endParaRPr lang="en-US" sz="1050" dirty="0"/>
+          </a:p>
+        </p:txBody>
+      </p:sp>
+      <p:sp>
+        <p:nvSpPr>
+          <p:cNvPr id="13" name="Shape 11"/>
+          <p:cNvSpPr/>
+          <p:nvPr/>
+        </p:nvSpPr>
+        <p:spPr>
+          <a:xfrm>
+            <a:off x="6245352" y="3840480"/>
+            <a:ext cx="5577840" cy="1188720"/>
+          </a:xfrm>
+          <a:prstGeom prst="rect">
+            <a:avLst/>
+          </a:prstGeom>
+          <a:solidFill>
+            <a:srgbClr val="EEF2F5"/>
+          </a:solidFill>
+          <a:ln w="12700">
+            <a:solidFill>
+              <a:srgbClr val="EEF2F5"/>
+            </a:solidFill>
+            <a:prstDash val="solid"/>
+          </a:ln>
+        </p:spPr>
+      </p:sp>
+      <p:sp>
+        <p:nvSpPr>
+          <p:cNvPr id="14" name="Text 12"/>
+          <p:cNvSpPr txBox="1"/>
+          <p:nvPr/>
+        </p:nvSpPr>
+        <p:spPr>
+          <a:xfrm>
+            <a:off x="6373368" y="3922776"/>
+            <a:ext cx="5321808" cy="274320"/>
+          </a:xfrm>
+          <a:prstGeom prst="rect">
+            <a:avLst/>
+          </a:prstGeom>
+          <a:noFill/>
+          <a:ln/>
+        </p:spPr>
+        <p:txBody>
+          <a:bodyPr wrap="square" lIns="0" tIns="0" rIns="0" bIns="0" rtlCol="0" anchor="t"/>
+          <a:lstStyle/>
+          <a:p>
+            <a:pPr indent="0" marL="0">
+              <a:buNone/>
+            </a:pPr>
+            <a:r>
+              <a:rPr lang="en-US" sz="1300" b="1" dirty="0">
+                <a:solidFill>
+                  <a:srgbClr val="16222B"/>
+                </a:solidFill>
+                <a:latin typeface="Calibri" pitchFamily="34" charset="0"/>
+                <a:ea typeface="Calibri" pitchFamily="34" charset="-122"/>
+                <a:cs typeface="Calibri" pitchFamily="34" charset="-120"/>
+              </a:rPr>
+              <a:t>What it caught that nothing else would</a:t>
+            </a:r>
+            <a:endParaRPr lang="en-US" sz="1300" dirty="0"/>
+          </a:p>
+        </p:txBody>
+      </p:sp>
+      <p:sp>
+        <p:nvSpPr>
+          <p:cNvPr id="15" name="Text 13"/>
+          <p:cNvSpPr txBox="1"/>
+          <p:nvPr/>
+        </p:nvSpPr>
+        <p:spPr>
+          <a:xfrm>
+            <a:off x="6373368" y="4233672"/>
+            <a:ext cx="5321808" cy="713232"/>
+          </a:xfrm>
+          <a:prstGeom prst="rect">
+            <a:avLst/>
+          </a:prstGeom>
+          <a:noFill/>
+          <a:ln/>
+        </p:spPr>
+        <p:txBody>
+          <a:bodyPr wrap="square" lIns="0" tIns="0" rIns="0" bIns="0" rtlCol="0" anchor="t"/>
+          <a:lstStyle/>
+          <a:p>
+            <a:pPr marL="342900" indent="-342900">
+              <a:spcAft>
+                <a:spcPts val="400"/>
+              </a:spcAft>
+              <a:buSzPct val="100000"/>
+              <a:buChar char="•"/>
+            </a:pPr>
+            <a:r>
+              <a:rPr lang="en-US" sz="1050" dirty="0">
+                <a:solidFill>
+                  <a:srgbClr val="22303C"/>
+                </a:solidFill>
+                <a:latin typeface="Calibri" pitchFamily="34" charset="0"/>
+                <a:ea typeface="Calibri" pitchFamily="34" charset="-122"/>
+                <a:cs typeface="Calibri" pitchFamily="34" charset="-120"/>
+              </a:rPr>
+              <a:t>A venv on HDD rather than NVMe — which works perfectly, about 8x slower, and lands as an unexplained task timeout inside an allocation.</a:t>
+            </a:r>
+            <a:endParaRPr lang="en-US" sz="1050" dirty="0"/>
+          </a:p>
+          <a:p>
+            <a:pPr marL="342900" indent="-342900">
+              <a:spcAft>
+                <a:spcPts val="400"/>
+              </a:spcAft>
+              <a:buSzPct val="100000"/>
+              <a:buChar char="•"/>
+            </a:pPr>
+            <a:r>
+              <a:rPr lang="en-US" sz="1050" dirty="0">
+                <a:solidFill>
+                  <a:srgbClr val="22303C"/>
+                </a:solidFill>
+                <a:latin typeface="Calibri" pitchFamily="34" charset="0"/>
+                <a:ea typeface="Calibri" pitchFamily="34" charset="-122"/>
+                <a:cs typeface="Calibri" pitchFamily="34" charset="-120"/>
+              </a:rPr>
+              <a:t>`ml_collections`, which only LigandMPNN's bundled openfold imports.</a:t>
+            </a:r>
+            <a:endParaRPr lang="en-US" sz="1050" dirty="0"/>
+          </a:p>
+        </p:txBody>
+      </p:sp>
+      <p:sp>
+        <p:nvSpPr>
+          <p:cNvPr id="16" name="Shape 14"/>
+          <p:cNvSpPr/>
+          <p:nvPr/>
+        </p:nvSpPr>
+        <p:spPr>
+          <a:xfrm>
+            <a:off x="457200" y="5166360"/>
+            <a:ext cx="11277295" cy="914400"/>
+          </a:xfrm>
+          <a:prstGeom prst="roundRect">
+            <a:avLst>
+              <a:gd name="adj" fmla="val 8000"/>
+            </a:avLst>
+          </a:prstGeom>
+          <a:solidFill>
+            <a:srgbClr val="E3F0F1"/>
+          </a:solidFill>
+          <a:ln w="19050">
+            <a:solidFill>
+              <a:srgbClr val="1E6470"/>
+            </a:solidFill>
+            <a:prstDash val="solid"/>
+          </a:ln>
+        </p:spPr>
+      </p:sp>
+      <p:sp>
+        <p:nvSpPr>
+          <p:cNvPr id="17" name="Text 15"/>
+          <p:cNvSpPr txBox="1"/>
+          <p:nvPr/>
+        </p:nvSpPr>
+        <p:spPr>
+          <a:xfrm>
+            <a:off x="530352" y="5212080"/>
+            <a:ext cx="11130991" cy="822960"/>
+          </a:xfrm>
+          <a:prstGeom prst="rect">
+            <a:avLst/>
+          </a:prstGeom>
+          <a:noFill/>
+          <a:ln/>
+        </p:spPr>
+        <p:txBody>
+          <a:bodyPr wrap="square" lIns="0" tIns="0" rIns="0" bIns="0" rtlCol="0" anchor="ctr"/>
+          <a:lstStyle/>
+          <a:p>
+            <a:pPr algn="ctr" indent="0" marL="0">
+              <a:buNone/>
+            </a:pPr>
+            <a:r>
+              <a:rPr lang="en-US" sz="1150" b="1" dirty="0">
+                <a:solidFill>
+                  <a:srgbClr val="1E6470"/>
+                </a:solidFill>
+                <a:latin typeface="Calibri" pitchFamily="34" charset="0"/>
+                <a:ea typeface="Calibri" pitchFamily="34" charset="-122"/>
+                <a:cs typeface="Calibri" pitchFamily="34" charset="-120"/>
+              </a:rPr>
+              <a:t>Each job writes one self-contained directory: manifest.json (job id, campaign, model, git sha + dirty), slurm.out, campaign.log, provenance/*.jsonl, jobs/ledger.jsonl</a:t>
+            </a:r>
+            <a:endParaRPr lang="en-US" sz="1400" dirty="0"/>
+          </a:p>
+          <a:p>
+            <a:pPr algn="ctr" indent="0" marL="0">
+              <a:buNone/>
+            </a:pPr>
+            <a:r>
+              <a:rPr lang="en-US" sz="1000" dirty="0">
+                <a:solidFill>
+                  <a:srgbClr val="5E6B75"/>
+                </a:solidFill>
+                <a:latin typeface="Calibri" pitchFamily="34" charset="0"/>
+                <a:ea typeface="Calibri" pitchFamily="34" charset="-122"/>
+                <a:cs typeface="Calibri" pitchFamily="34" charset="-120"/>
+              </a:rPr>
+              <a:t>a run you can hand to someone else, including whether the checkout was dirty when it started</a:t>
+            </a:r>
+            <a:endParaRPr lang="en-US" sz="1400" dirty="0"/>
+          </a:p>
+        </p:txBody>
+      </p:sp>
+      <p:sp>
+        <p:nvSpPr>
+          <p:cNvPr id="19" name="Text 16"/>
+          <p:cNvSpPr txBox="1"/>
+          <p:nvPr/>
+        </p:nvSpPr>
+        <p:spPr>
+          <a:xfrm>
+            <a:off x="457200" y="6492240"/>
+            <a:ext cx="11277295" cy="228600"/>
+          </a:xfrm>
+          <a:prstGeom prst="rect">
+            <a:avLst/>
+          </a:prstGeom>
+          <a:noFill/>
+          <a:ln/>
+        </p:spPr>
+        <p:txBody>
+          <a:bodyPr wrap="square" lIns="0" tIns="0" rIns="0" bIns="0" rtlCol="0" anchor="t"/>
+          <a:lstStyle/>
+          <a:p>
+            <a:pPr indent="0" marL="0">
+              <a:buNone/>
+            </a:pPr>
+            <a:r>
+              <a:rPr lang="en-US" sz="1000" i="1" dirty="0">
+                <a:solidFill>
+                  <a:srgbClr val="5E6B75"/>
+                </a:solidFill>
+                <a:latin typeface="Calibri" pitchFamily="34" charset="0"/>
+                <a:ea typeface="Calibri" pitchFamily="34" charset="-122"/>
+                <a:cs typeface="Calibri" pitchFamily="34" charset="-120"/>
+              </a:rPr>
+              <a:t>the output above is the shape of real preflight output, with paths replaced by placeholders — see CODE_FOR_DECK.md</a:t>
+            </a:r>
+            <a:endParaRPr lang="en-US" sz="1000" dirty="0"/>
+          </a:p>
+        </p:txBody>
+      </p:sp>
+    </p:spTree>
+  </p:cSld>
+  <p:clrMapOvr>
+    <a:masterClrMapping/>
+  </p:clrMapOvr>
+</p:sld>
+</file>
+
+<file path=ppt/slides/slide24.xml><?xml version="1.0" encoding="utf-8"?>
+<p:sld xmlns:a="http://schemas.openxmlformats.org/drawingml/2006/main" xmlns:r="http://schemas.openxmlformats.org/officeDocument/2006/relationships" xmlns:p="http://schemas.openxmlformats.org/presentationml/2006/main">
+  <p:cSld name="Slide 24">
+    <p:spTree>
+      <p:nvGrpSpPr>
+        <p:cNvPr id="1" name=""/>
+        <p:cNvGrpSpPr/>
+        <p:nvPr/>
+      </p:nvGrpSpPr>
+      <p:grpSpPr>
+        <a:xfrm>
+          <a:off x="0" y="0"/>
+          <a:ext cx="0" cy="0"/>
+          <a:chOff x="0" y="0"/>
+          <a:chExt cx="0" cy="0"/>
+        </a:xfrm>
+      </p:grpSpPr>
+      <p:sp>
+        <p:nvSpPr>
+          <p:cNvPr id="2" name="Text 0"/>
+          <p:cNvSpPr txBox="1"/>
+          <p:nvPr/>
+        </p:nvSpPr>
+        <p:spPr>
+          <a:xfrm>
+            <a:off x="457200" y="320040"/>
+            <a:ext cx="8229600" cy="274320"/>
+          </a:xfrm>
+          <a:prstGeom prst="rect">
+            <a:avLst/>
+          </a:prstGeom>
+          <a:noFill/>
+          <a:ln/>
+        </p:spPr>
+        <p:txBody>
+          <a:bodyPr wrap="square" lIns="0" tIns="0" rIns="0" bIns="0" rtlCol="0" anchor="t"/>
+          <a:lstStyle/>
+          <a:p>
+            <a:pPr indent="0" marL="0">
+              <a:buNone/>
+            </a:pPr>
+            <a:r>
+              <a:rPr lang="en-US" sz="1200" b="1" spc="200" kern="0" dirty="0">
+                <a:solidFill>
+                  <a:srgbClr val="1E6470"/>
+                </a:solidFill>
+                <a:latin typeface="Calibri" pitchFamily="34" charset="0"/>
+                <a:ea typeface="Calibri" pitchFamily="34" charset="-122"/>
+                <a:cs typeface="Calibri" pitchFamily="34" charset="-120"/>
+              </a:rPr>
+              <a:t>ACT 3 · USABILITY</a:t>
+            </a:r>
+            <a:endParaRPr lang="en-US" sz="1200" dirty="0"/>
+          </a:p>
+        </p:txBody>
+      </p:sp>
+      <p:sp>
+        <p:nvSpPr>
+          <p:cNvPr id="3" name="Text 1"/>
+          <p:cNvSpPr txBox="1"/>
+          <p:nvPr/>
+        </p:nvSpPr>
+        <p:spPr>
+          <a:xfrm>
+            <a:off x="457200" y="566928"/>
+            <a:ext cx="11277295" cy="731520"/>
+          </a:xfrm>
+          <a:prstGeom prst="rect">
+            <a:avLst/>
+          </a:prstGeom>
+          <a:noFill/>
+          <a:ln/>
+        </p:spPr>
+        <p:txBody>
+          <a:bodyPr wrap="square" lIns="0" tIns="0" rIns="0" bIns="0" rtlCol="0" anchor="t"/>
+          <a:lstStyle/>
+          <a:p>
+            <a:pPr indent="0" marL="0">
+              <a:buNone/>
+            </a:pPr>
+            <a:r>
+              <a:rPr lang="en-US" sz="2800" b="1" dirty="0">
+                <a:solidFill>
+                  <a:srgbClr val="16222B"/>
+                </a:solidFill>
+                <a:latin typeface="Cambria" pitchFamily="34" charset="0"/>
+                <a:ea typeface="Cambria" pitchFamily="34" charset="-122"/>
+                <a:cs typeface="Cambria" pitchFamily="34" charset="-120"/>
+              </a:rPr>
+              <a:t>Surface 5: one protocol, two transports</a:t>
+            </a:r>
+            <a:endParaRPr lang="en-US" sz="2800" dirty="0"/>
+          </a:p>
+        </p:txBody>
+      </p:sp>
+      <p:graphicFrame>
+        <p:nvGraphicFramePr>
+          <p:cNvPr id="25" name="Table 0"/>
           <p:cNvGraphicFramePr>
             <a:graphicFrameLocks noGrp="1"/>
           </p:cNvGraphicFramePr>
@@ -22101,9 +28060,9 @@
 </p:sld>
 </file>
 
-<file path=ppt/slides/slide21.xml><?xml version="1.0" encoding="utf-8"?>
+<file path=ppt/slides/slide25.xml><?xml version="1.0" encoding="utf-8"?>
 <p:sld xmlns:a="http://schemas.openxmlformats.org/drawingml/2006/main" xmlns:r="http://schemas.openxmlformats.org/officeDocument/2006/relationships" xmlns:p="http://schemas.openxmlformats.org/presentationml/2006/main">
-  <p:cSld name="Slide 21">
+  <p:cSld name="Slide 25">
     <p:spTree>
       <p:nvGrpSpPr>
         <p:cNvPr id="1" name=""/>
@@ -24123,9 +30082,9 @@
 </p:sld>
 </file>
 
-<file path=ppt/slides/slide22.xml><?xml version="1.0" encoding="utf-8"?>
+<file path=ppt/slides/slide26.xml><?xml version="1.0" encoding="utf-8"?>
 <p:sld xmlns:a="http://schemas.openxmlformats.org/drawingml/2006/main" xmlns:r="http://schemas.openxmlformats.org/officeDocument/2006/relationships" xmlns:p="http://schemas.openxmlformats.org/presentationml/2006/main">
-  <p:cSld name="Slide 22">
+  <p:cSld name="Slide 26">
     <p:spTree>
       <p:nvGrpSpPr>
         <p:cNvPr id="1" name=""/>
@@ -25178,7 +31137,7 @@
                 <a:ea typeface="Calibri" pitchFamily="34" charset="-122"/>
                 <a:cs typeface="Calibri" pitchFamily="34" charset="-120"/>
               </a:rPr>
-              <a:t>71 ms steady-state cycle, mocks, one host</a:t>
+              <a:t>84 ms steady-state cycle, mocks, one host</a:t>
             </a:r>
             <a:endParaRPr lang="en-US" sz="850" dirty="0"/>
           </a:p>
@@ -26584,9 +32543,9 @@
 </p:sld>
 </file>
 
-<file path=ppt/slides/slide23.xml><?xml version="1.0" encoding="utf-8"?>
+<file path=ppt/slides/slide27.xml><?xml version="1.0" encoding="utf-8"?>
 <p:sld xmlns:a="http://schemas.openxmlformats.org/drawingml/2006/main" xmlns:r="http://schemas.openxmlformats.org/officeDocument/2006/relationships" xmlns:p="http://schemas.openxmlformats.org/presentationml/2006/main">
-  <p:cSld name="Slide 23">
+  <p:cSld name="Slide 27">
     <p:bg>
       <p:bgPr>
         <a:solidFill>
@@ -27994,7 +33953,7 @@
                 <a:ea typeface="Calibri" pitchFamily="34" charset="-122"/>
                 <a:cs typeface="Calibri" pitchFamily="34" charset="-120"/>
               </a:rPr>
-              <a:t>The CLI imports every policy at module scope, so `impress-a tools` pays for langgraph. About 1.6 s of this deck's 2.8 s run was startup, outside the loop.  cli/__init__.py:31</a:t>
+              <a:t>The CLI imports every policy at module scope, so `impress-a tools` pays for langgraph. About 2.3 s of this deck's 3.5 s run was startup, outside the loop.  cli/__init__.py:31</a:t>
             </a:r>
             <a:endParaRPr lang="en-US" sz="950" dirty="0"/>
           </a:p>
@@ -28033,7 +33992,7 @@
                 <a:ea typeface="Calibri" pitchFamily="34" charset="-122"/>
                 <a:cs typeface="Calibri" pitchFamily="34" charset="-120"/>
               </a:rPr>
-              <a:t>every ask names a file and a line · merge-impress-a @ c163fe2</a:t>
+              <a:t>every ask names a file and a line · examples/agentic-small-molecule-binding @ b5a3b2d</a:t>
             </a:r>
             <a:endParaRPr lang="en-US" sz="1000" dirty="0"/>
           </a:p>
@@ -28047,9 +34006,9 @@
 </p:sld>
 </file>
 
-<file path=ppt/slides/slide24.xml><?xml version="1.0" encoding="utf-8"?>
+<file path=ppt/slides/slide28.xml><?xml version="1.0" encoding="utf-8"?>
 <p:sld xmlns:a="http://schemas.openxmlformats.org/drawingml/2006/main" xmlns:r="http://schemas.openxmlformats.org/officeDocument/2006/relationships" xmlns:p="http://schemas.openxmlformats.org/presentationml/2006/main">
-  <p:cSld name="Slide 24">
+  <p:cSld name="Slide 28">
     <p:spTree>
       <p:nvGrpSpPr>
         <p:cNvPr id="1" name=""/>
@@ -28144,7 +34103,7 @@
       </p:sp>
       <p:graphicFrame>
         <p:nvGraphicFramePr>
-          <p:cNvPr id="25" name="Table 0"/>
+          <p:cNvPr id="29" name="Table 0"/>
           <p:cNvGraphicFramePr>
             <a:graphicFrameLocks noGrp="1"/>
           </p:cNvGraphicFramePr>
@@ -30794,9 +36753,9 @@
 </p:sld>
 </file>
 
-<file path=ppt/slides/slide25.xml><?xml version="1.0" encoding="utf-8"?>
+<file path=ppt/slides/slide29.xml><?xml version="1.0" encoding="utf-8"?>
 <p:sld xmlns:a="http://schemas.openxmlformats.org/drawingml/2006/main" xmlns:r="http://schemas.openxmlformats.org/officeDocument/2006/relationships" xmlns:p="http://schemas.openxmlformats.org/presentationml/2006/main">
-  <p:cSld name="Slide 25">
+  <p:cSld name="Slide 29">
     <p:spTree>
       <p:nvGrpSpPr>
         <p:cNvPr id="1" name=""/>
@@ -32791,7 +38750,7 @@
                 <a:ea typeface="Calibri" pitchFamily="34" charset="-122"/>
                 <a:cs typeface="Calibri" pitchFamily="34" charset="-120"/>
               </a:rPr>
-              <a:t>2.8 s end to end, 14 provenance records</a:t>
+              <a:t>3.5 s end to end, 14 provenance records</a:t>
             </a:r>
             <a:endParaRPr lang="en-US" sz="1100" dirty="0"/>
           </a:p>
@@ -36996,7 +42955,7 @@
                 <a:ea typeface="Calibri" pitchFamily="34" charset="-122"/>
                 <a:cs typeface="Calibri" pitchFamily="34" charset="-120"/>
               </a:rPr>
-              <a:t>A new cross-layer import fails the suite by default — slide 21.</a:t>
+              <a:t>A new cross-layer import fails the suite by default — slide 25.</a:t>
             </a:r>
             <a:endParaRPr lang="en-US" sz="1100" dirty="0"/>
           </a:p>
@@ -37035,7 +42994,7 @@
                 <a:ea typeface="Calibri" pitchFamily="34" charset="-122"/>
                 <a:cs typeface="Calibri" pitchFamily="34" charset="-120"/>
               </a:rPr>
-              <a:t>mined from the declarations themselves: run_model.py::surfaces() · merge-impress-a @ c163fe2</a:t>
+              <a:t>mined from the declarations themselves: run_model.py::surfaces() · examples/agentic-small-molecule-binding @ b5a3b2d</a:t>
             </a:r>
             <a:endParaRPr lang="en-US" sz="1000" dirty="0"/>
           </a:p>
@@ -38621,7 +44580,7 @@
                           <a:ea typeface="Calibri" pitchFamily="34" charset="-122"/>
                           <a:cs typeface="Calibri" pitchFamily="34" charset="-120"/>
                         </a:rPr>
-                        <a:t>checks the real-toolkit environment BEFORE the queue — slide 19</a:t>
+                        <a:t>checks the real-toolkit environment BEFORE the queue — slide 23</a:t>
                       </a:r>
                       <a:endParaRPr lang="en-US" sz="1050" dirty="0">
                         <a:latin typeface="Calibri" charset="0"/>
@@ -41940,7 +47899,7 @@
                 <a:ea typeface="Calibri" pitchFamily="34" charset="-122"/>
                 <a:cs typeface="Calibri" pitchFamily="34" charset="-120"/>
               </a:rPr>
-              <a:t>`policy/` may import `core` and nothing else — enforced by `ast`, slide 21.</a:t>
+              <a:t>`policy/` may import `core` and nothing else — enforced by `ast`, slide 25.</a:t>
             </a:r>
             <a:endParaRPr lang="en-US" sz="1100" dirty="0"/>
           </a:p>
